--- a/output/wordlabs-pens-3day.pptx
+++ b/output/wordlabs-pens-3day.pptx
@@ -5622,7 +5622,7 @@
                 <a:ea typeface="Trebuchet MS" pitchFamily="34" charset="-122"/>
                 <a:cs typeface="Trebuchet MS" pitchFamily="34" charset="-120"/>
               </a:rPr>
-              <a:t>0</a:t>
+              <a:t>1</a:t>
             </a:r>
             <a:pPr algn="ctr" indent="0" marL="0">
               <a:buNone/>
@@ -6040,7 +6040,7 @@
                 <a:ea typeface="Calibri" pitchFamily="34" charset="-122"/>
                 <a:cs typeface="Calibri" pitchFamily="34" charset="-120"/>
               </a:rPr>
-              <a:t>The </a:t>
+              <a:t>The doctor visited the </a:t>
             </a:r>
             <a:pPr algn="l" indent="0" marL="0">
               <a:buNone/>
@@ -6057,7 +6057,7 @@
                 <a:ea typeface="Calibri" pitchFamily="34" charset="-122"/>
                 <a:cs typeface="Calibri" pitchFamily="34" charset="-120"/>
               </a:rPr>
-              <a:t>expensive</a:t>
+              <a:t>dispensary</a:t>
             </a:r>
             <a:pPr algn="l" indent="0" marL="0">
               <a:buNone/>
@@ -6071,7 +6071,7 @@
                 <a:ea typeface="Calibri" pitchFamily="34" charset="-122"/>
                 <a:cs typeface="Calibri" pitchFamily="34" charset="-120"/>
               </a:rPr>
-              <a:t> repairs were meant to </a:t>
+              <a:t>, then explained how the </a:t>
             </a:r>
             <a:pPr algn="l" indent="0" marL="0">
               <a:buNone/>
@@ -6088,7 +6088,7 @@
                 <a:ea typeface="Calibri" pitchFamily="34" charset="-122"/>
                 <a:cs typeface="Calibri" pitchFamily="34" charset="-120"/>
               </a:rPr>
-              <a:t>compensate</a:t>
+              <a:t>expensive</a:t>
             </a:r>
             <a:pPr algn="l" indent="0" marL="0">
               <a:buNone/>
@@ -6102,7 +6102,7 @@
                 <a:ea typeface="Calibri" pitchFamily="34" charset="-122"/>
                 <a:cs typeface="Calibri" pitchFamily="34" charset="-120"/>
               </a:rPr>
-              <a:t> the family for all the damage done to their home.</a:t>
+              <a:t> treatment would help.</a:t>
             </a:r>
             <a:endParaRPr lang="en-US" sz="1800" dirty="0"/>
           </a:p>
@@ -6257,7 +6257,7 @@
                 <a:ea typeface="Trebuchet MS" pitchFamily="34" charset="-122"/>
                 <a:cs typeface="Trebuchet MS" pitchFamily="34" charset="-120"/>
               </a:rPr>
-              <a:t>expensive</a:t>
+              <a:t>dispensary</a:t>
             </a:r>
             <a:endParaRPr lang="en-US" sz="1400" dirty="0"/>
           </a:p>
@@ -6385,7 +6385,7 @@
                 <a:ea typeface="Trebuchet MS" pitchFamily="34" charset="-122"/>
                 <a:cs typeface="Trebuchet MS" pitchFamily="34" charset="-120"/>
               </a:rPr>
-              <a:t>compensate</a:t>
+              <a:t>expensive</a:t>
             </a:r>
             <a:endParaRPr lang="en-US" sz="1400" dirty="0"/>
           </a:p>
@@ -6855,7 +6855,7 @@
                 <a:ea typeface="Trebuchet MS" pitchFamily="34" charset="-122"/>
                 <a:cs typeface="Trebuchet MS" pitchFamily="34" charset="-120"/>
               </a:rPr>
-              <a:t>expensive</a:t>
+              <a:t>dispensary</a:t>
             </a:r>
             <a:endParaRPr lang="en-US" sz="2800" dirty="0"/>
           </a:p>
@@ -7682,7 +7682,7 @@
                 <a:ea typeface="Trebuchet MS" pitchFamily="34" charset="-122"/>
                 <a:cs typeface="Trebuchet MS" pitchFamily="34" charset="-120"/>
               </a:rPr>
-              <a:t>expensive</a:t>
+              <a:t>dispensary</a:t>
             </a:r>
             <a:endParaRPr lang="en-US" sz="2800" dirty="0"/>
           </a:p>
@@ -7821,7 +7821,7 @@
                 <a:ea typeface="Trebuchet MS" pitchFamily="34" charset="-122"/>
                 <a:cs typeface="Trebuchet MS" pitchFamily="34" charset="-120"/>
               </a:rPr>
-              <a:t>ex</a:t>
+              <a:t>dis</a:t>
             </a:r>
             <a:endParaRPr lang="en-US" sz="1300" dirty="0"/>
           </a:p>
@@ -7860,7 +7860,7 @@
                 <a:ea typeface="Calibri" pitchFamily="34" charset="-122"/>
                 <a:cs typeface="Calibri" pitchFamily="34" charset="-120"/>
               </a:rPr>
-              <a:t>out</a:t>
+              <a:t>apart, away</a:t>
             </a:r>
             <a:endParaRPr lang="en-US" sz="850" dirty="0"/>
           </a:p>
@@ -7972,7 +7972,7 @@
                 <a:ea typeface="Calibri" pitchFamily="34" charset="-122"/>
                 <a:cs typeface="Calibri" pitchFamily="34" charset="-120"/>
               </a:rPr>
-              <a:t>to weigh, pay</a:t>
+              <a:t>to hang, weigh, pay</a:t>
             </a:r>
             <a:endParaRPr lang="en-US" sz="850" dirty="0"/>
           </a:p>
@@ -7995,11 +7995,11 @@
             </a:avLst>
           </a:prstGeom>
           <a:solidFill>
-            <a:srgbClr val="FCE7F3"/>
+            <a:srgbClr val="DDD6FE"/>
           </a:solidFill>
           <a:ln w="19050">
             <a:solidFill>
-              <a:srgbClr val="DB2777"/>
+              <a:srgbClr val="7C3AED"/>
             </a:solidFill>
             <a:prstDash val="solid"/>
           </a:ln>
@@ -8039,13 +8039,13 @@
             <a:r>
               <a:rPr lang="en-US" sz="1300" b="1" dirty="0">
                 <a:solidFill>
-                  <a:srgbClr val="9D174D"/>
+                  <a:srgbClr val="4C1D95"/>
                 </a:solidFill>
                 <a:latin typeface="Trebuchet MS" pitchFamily="34" charset="0"/>
                 <a:ea typeface="Trebuchet MS" pitchFamily="34" charset="-122"/>
                 <a:cs typeface="Trebuchet MS" pitchFamily="34" charset="-120"/>
               </a:rPr>
-              <a:t>ive</a:t>
+              <a:t>ary</a:t>
             </a:r>
             <a:endParaRPr lang="en-US" sz="1300" dirty="0"/>
           </a:p>
@@ -8084,7 +8084,7 @@
                 <a:ea typeface="Calibri" pitchFamily="34" charset="-122"/>
                 <a:cs typeface="Calibri" pitchFamily="34" charset="-120"/>
               </a:rPr>
-              <a:t>having the quality of</a:t>
+              <a:t>place connected with</a:t>
             </a:r>
             <a:endParaRPr lang="en-US" sz="850" dirty="0"/>
           </a:p>
@@ -8779,7 +8779,7 @@
                 <a:ea typeface="Trebuchet MS" pitchFamily="34" charset="-122"/>
                 <a:cs typeface="Trebuchet MS" pitchFamily="34" charset="-120"/>
               </a:rPr>
-              <a:t>expensive</a:t>
+              <a:t>dispensary</a:t>
             </a:r>
             <a:endParaRPr lang="en-US" sz="2800" dirty="0"/>
           </a:p>
@@ -8918,7 +8918,7 @@
                 <a:ea typeface="Trebuchet MS" pitchFamily="34" charset="-122"/>
                 <a:cs typeface="Trebuchet MS" pitchFamily="34" charset="-120"/>
               </a:rPr>
-              <a:t>ex</a:t>
+              <a:t>dis</a:t>
             </a:r>
             <a:endParaRPr lang="en-US" sz="1300" dirty="0"/>
           </a:p>
@@ -8957,7 +8957,7 @@
                 <a:ea typeface="Calibri" pitchFamily="34" charset="-122"/>
                 <a:cs typeface="Calibri" pitchFamily="34" charset="-120"/>
               </a:rPr>
-              <a:t>out</a:t>
+              <a:t>apart, away</a:t>
             </a:r>
             <a:endParaRPr lang="en-US" sz="850" dirty="0"/>
           </a:p>
@@ -9069,7 +9069,7 @@
                 <a:ea typeface="Calibri" pitchFamily="34" charset="-122"/>
                 <a:cs typeface="Calibri" pitchFamily="34" charset="-120"/>
               </a:rPr>
-              <a:t>to weigh, pay</a:t>
+              <a:t>to hang, weigh, pay</a:t>
             </a:r>
             <a:endParaRPr lang="en-US" sz="850" dirty="0"/>
           </a:p>
@@ -9092,11 +9092,11 @@
             </a:avLst>
           </a:prstGeom>
           <a:solidFill>
-            <a:srgbClr val="FCE7F3"/>
+            <a:srgbClr val="DDD6FE"/>
           </a:solidFill>
           <a:ln w="19050">
             <a:solidFill>
-              <a:srgbClr val="DB2777"/>
+              <a:srgbClr val="7C3AED"/>
             </a:solidFill>
             <a:prstDash val="solid"/>
           </a:ln>
@@ -9136,13 +9136,13 @@
             <a:r>
               <a:rPr lang="en-US" sz="1300" b="1" dirty="0">
                 <a:solidFill>
-                  <a:srgbClr val="9D174D"/>
+                  <a:srgbClr val="4C1D95"/>
                 </a:solidFill>
                 <a:latin typeface="Trebuchet MS" pitchFamily="34" charset="0"/>
                 <a:ea typeface="Trebuchet MS" pitchFamily="34" charset="-122"/>
                 <a:cs typeface="Trebuchet MS" pitchFamily="34" charset="-120"/>
               </a:rPr>
-              <a:t>ive</a:t>
+              <a:t>ary</a:t>
             </a:r>
             <a:endParaRPr lang="en-US" sz="1300" dirty="0"/>
           </a:p>
@@ -9181,7 +9181,7 @@
                 <a:ea typeface="Calibri" pitchFamily="34" charset="-122"/>
                 <a:cs typeface="Calibri" pitchFamily="34" charset="-120"/>
               </a:rPr>
-              <a:t>having the quality of</a:t>
+              <a:t>place connected with</a:t>
             </a:r>
             <a:endParaRPr lang="en-US" sz="850" dirty="0"/>
           </a:p>
@@ -9288,8 +9288,8 @@
         </p:nvSpPr>
         <p:spPr>
           <a:xfrm>
-            <a:off x="2313432" y="3364992"/>
-            <a:ext cx="1645920" cy="475488"/>
+            <a:off x="1975104" y="3364992"/>
+            <a:ext cx="1554480" cy="475488"/>
           </a:xfrm>
           <a:prstGeom prst="rect">
             <a:avLst>
@@ -9315,8 +9315,8 @@
         </p:nvSpPr>
         <p:spPr>
           <a:xfrm>
-            <a:off x="2313432" y="3364992"/>
-            <a:ext cx="1645920" cy="475488"/>
+            <a:off x="1975104" y="3364992"/>
+            <a:ext cx="1554480" cy="475488"/>
           </a:xfrm>
           <a:prstGeom prst="rect">
             <a:avLst/>
@@ -9340,7 +9340,7 @@
                 <a:ea typeface="Trebuchet MS" pitchFamily="34" charset="-122"/>
                 <a:cs typeface="Trebuchet MS" pitchFamily="34" charset="-120"/>
               </a:rPr>
-              <a:t>ex</a:t>
+              <a:t>dis</a:t>
             </a:r>
             <a:endParaRPr lang="en-US" sz="1400" dirty="0"/>
           </a:p>
@@ -9354,8 +9354,8 @@
         </p:nvSpPr>
         <p:spPr>
           <a:xfrm>
-            <a:off x="3959352" y="3364992"/>
-            <a:ext cx="411480" cy="475488"/>
+            <a:off x="3529584" y="3364992"/>
+            <a:ext cx="73152" cy="475488"/>
           </a:xfrm>
           <a:prstGeom prst="rect">
             <a:avLst/>
@@ -9393,8 +9393,8 @@
         </p:nvSpPr>
         <p:spPr>
           <a:xfrm>
-            <a:off x="4370832" y="3364992"/>
-            <a:ext cx="1645920" cy="475488"/>
+            <a:off x="3602736" y="3364992"/>
+            <a:ext cx="1554480" cy="475488"/>
           </a:xfrm>
           <a:prstGeom prst="rect">
             <a:avLst>
@@ -9420,8 +9420,8 @@
         </p:nvSpPr>
         <p:spPr>
           <a:xfrm>
-            <a:off x="4370832" y="3364992"/>
-            <a:ext cx="1645920" cy="475488"/>
+            <a:off x="3602736" y="3364992"/>
+            <a:ext cx="1554480" cy="475488"/>
           </a:xfrm>
           <a:prstGeom prst="rect">
             <a:avLst/>
@@ -9459,8 +9459,8 @@
         </p:nvSpPr>
         <p:spPr>
           <a:xfrm>
-            <a:off x="6016752" y="3364992"/>
-            <a:ext cx="411480" cy="475488"/>
+            <a:off x="5157216" y="3364992"/>
+            <a:ext cx="73152" cy="475488"/>
           </a:xfrm>
           <a:prstGeom prst="rect">
             <a:avLst/>
@@ -9498,8 +9498,8 @@
         </p:nvSpPr>
         <p:spPr>
           <a:xfrm>
-            <a:off x="6428232" y="3364992"/>
-            <a:ext cx="1645920" cy="475488"/>
+            <a:off x="5230368" y="3364992"/>
+            <a:ext cx="1554480" cy="475488"/>
           </a:xfrm>
           <a:prstGeom prst="rect">
             <a:avLst>
@@ -9525,8 +9525,8 @@
         </p:nvSpPr>
         <p:spPr>
           <a:xfrm>
-            <a:off x="6428232" y="3364992"/>
-            <a:ext cx="1645920" cy="475488"/>
+            <a:off x="5230368" y="3364992"/>
+            <a:ext cx="1554480" cy="475488"/>
           </a:xfrm>
           <a:prstGeom prst="rect">
             <a:avLst/>
@@ -9550,7 +9550,7 @@
                 <a:ea typeface="Trebuchet MS" pitchFamily="34" charset="-122"/>
                 <a:cs typeface="Trebuchet MS" pitchFamily="34" charset="-120"/>
               </a:rPr>
-              <a:t>sive</a:t>
+              <a:t>sa</a:t>
             </a:r>
             <a:endParaRPr lang="en-US" sz="1400" dirty="0"/>
           </a:p>
@@ -9558,7 +9558,112 @@
       </p:sp>
       <p:sp>
         <p:nvSpPr>
-          <p:cNvPr id="36" name="Shape 34"/>
+          <p:cNvPr id="36" name="Text 34"/>
+          <p:cNvSpPr/>
+          <p:nvPr/>
+        </p:nvSpPr>
+        <p:spPr>
+          <a:xfrm>
+            <a:off x="6784848" y="3364992"/>
+            <a:ext cx="73152" cy="475488"/>
+          </a:xfrm>
+          <a:prstGeom prst="rect">
+            <a:avLst/>
+          </a:prstGeom>
+          <a:noFill/>
+          <a:ln/>
+        </p:spPr>
+        <p:txBody>
+          <a:bodyPr wrap="square" lIns="0" tIns="0" rIns="0" bIns="0" rtlCol="0" anchor="ctr"/>
+          <a:lstStyle/>
+          <a:p>
+            <a:pPr algn="ctr" indent="0" marL="0">
+              <a:buNone/>
+            </a:pPr>
+            <a:r>
+              <a:rPr lang="en-US" sz="1600" b="1" dirty="0">
+                <a:solidFill>
+                  <a:srgbClr val="0D9488"/>
+                </a:solidFill>
+                <a:latin typeface="Trebuchet MS" pitchFamily="34" charset="0"/>
+                <a:ea typeface="Trebuchet MS" pitchFamily="34" charset="-122"/>
+                <a:cs typeface="Trebuchet MS" pitchFamily="34" charset="-120"/>
+              </a:rPr>
+              <a:t>·</a:t>
+            </a:r>
+            <a:endParaRPr lang="en-US" sz="1600" dirty="0"/>
+          </a:p>
+        </p:txBody>
+      </p:sp>
+      <p:sp>
+        <p:nvSpPr>
+          <p:cNvPr id="37" name="Shape 35"/>
+          <p:cNvSpPr/>
+          <p:nvPr/>
+        </p:nvSpPr>
+        <p:spPr>
+          <a:xfrm>
+            <a:off x="6858000" y="3364992"/>
+            <a:ext cx="1554480" cy="475488"/>
+          </a:xfrm>
+          <a:prstGeom prst="rect">
+            <a:avLst>
+              <a:gd name="adj" fmla="val 9615"/>
+            </a:avLst>
+          </a:prstGeom>
+          <a:solidFill>
+            <a:srgbClr val="FFFFFF"/>
+          </a:solidFill>
+          <a:ln w="12700">
+            <a:solidFill>
+              <a:srgbClr val="0D9488"/>
+            </a:solidFill>
+            <a:prstDash val="solid"/>
+          </a:ln>
+        </p:spPr>
+      </p:sp>
+      <p:sp>
+        <p:nvSpPr>
+          <p:cNvPr id="38" name="Text 36"/>
+          <p:cNvSpPr/>
+          <p:nvPr/>
+        </p:nvSpPr>
+        <p:spPr>
+          <a:xfrm>
+            <a:off x="6858000" y="3364992"/>
+            <a:ext cx="1554480" cy="475488"/>
+          </a:xfrm>
+          <a:prstGeom prst="rect">
+            <a:avLst/>
+          </a:prstGeom>
+          <a:noFill/>
+          <a:ln/>
+        </p:spPr>
+        <p:txBody>
+          <a:bodyPr wrap="square" lIns="0" tIns="0" rIns="0" bIns="0" rtlCol="0" anchor="ctr"/>
+          <a:lstStyle/>
+          <a:p>
+            <a:pPr algn="ctr" indent="0" marL="0">
+              <a:buNone/>
+            </a:pPr>
+            <a:r>
+              <a:rPr lang="en-US" sz="1400" b="1" dirty="0">
+                <a:solidFill>
+                  <a:srgbClr val="0D9488"/>
+                </a:solidFill>
+                <a:latin typeface="Trebuchet MS" pitchFamily="34" charset="0"/>
+                <a:ea typeface="Trebuchet MS" pitchFamily="34" charset="-122"/>
+                <a:cs typeface="Trebuchet MS" pitchFamily="34" charset="-120"/>
+              </a:rPr>
+              <a:t>ry</a:t>
+            </a:r>
+            <a:endParaRPr lang="en-US" sz="1400" dirty="0"/>
+          </a:p>
+        </p:txBody>
+      </p:sp>
+      <p:sp>
+        <p:nvSpPr>
+          <p:cNvPr id="39" name="Shape 37"/>
           <p:cNvSpPr/>
           <p:nvPr/>
         </p:nvSpPr>
@@ -9585,7 +9690,7 @@
       </p:sp>
       <p:sp>
         <p:nvSpPr>
-          <p:cNvPr id="37" name="Text 35"/>
+          <p:cNvPr id="40" name="Text 38"/>
           <p:cNvSpPr/>
           <p:nvPr/>
         </p:nvSpPr>
@@ -9624,7 +9729,7 @@
       </p:sp>
       <p:sp>
         <p:nvSpPr>
-          <p:cNvPr id="38" name="Shape 36"/>
+          <p:cNvPr id="41" name="Shape 39"/>
           <p:cNvSpPr/>
           <p:nvPr/>
         </p:nvSpPr>
@@ -9651,7 +9756,7 @@
       </p:sp>
       <p:sp>
         <p:nvSpPr>
-          <p:cNvPr id="39" name="Text 37"/>
+          <p:cNvPr id="42" name="Text 40"/>
           <p:cNvSpPr/>
           <p:nvPr/>
         </p:nvSpPr>
@@ -10113,7 +10218,7 @@
                 <a:ea typeface="Trebuchet MS" pitchFamily="34" charset="-122"/>
                 <a:cs typeface="Trebuchet MS" pitchFamily="34" charset="-120"/>
               </a:rPr>
-              <a:t>expensive</a:t>
+              <a:t>dispensary</a:t>
             </a:r>
             <a:endParaRPr lang="en-US" sz="2800" dirty="0"/>
           </a:p>
@@ -10252,7 +10357,7 @@
                 <a:ea typeface="Trebuchet MS" pitchFamily="34" charset="-122"/>
                 <a:cs typeface="Trebuchet MS" pitchFamily="34" charset="-120"/>
               </a:rPr>
-              <a:t>ex</a:t>
+              <a:t>dis</a:t>
             </a:r>
             <a:endParaRPr lang="en-US" sz="1300" dirty="0"/>
           </a:p>
@@ -10291,7 +10396,7 @@
                 <a:ea typeface="Calibri" pitchFamily="34" charset="-122"/>
                 <a:cs typeface="Calibri" pitchFamily="34" charset="-120"/>
               </a:rPr>
-              <a:t>out</a:t>
+              <a:t>apart, away</a:t>
             </a:r>
             <a:endParaRPr lang="en-US" sz="850" dirty="0"/>
           </a:p>
@@ -10403,7 +10508,7 @@
                 <a:ea typeface="Calibri" pitchFamily="34" charset="-122"/>
                 <a:cs typeface="Calibri" pitchFamily="34" charset="-120"/>
               </a:rPr>
-              <a:t>to weigh, pay</a:t>
+              <a:t>to hang, weigh, pay</a:t>
             </a:r>
             <a:endParaRPr lang="en-US" sz="850" dirty="0"/>
           </a:p>
@@ -10426,11 +10531,11 @@
             </a:avLst>
           </a:prstGeom>
           <a:solidFill>
-            <a:srgbClr val="FCE7F3"/>
+            <a:srgbClr val="DDD6FE"/>
           </a:solidFill>
           <a:ln w="19050">
             <a:solidFill>
-              <a:srgbClr val="DB2777"/>
+              <a:srgbClr val="7C3AED"/>
             </a:solidFill>
             <a:prstDash val="solid"/>
           </a:ln>
@@ -10470,13 +10575,13 @@
             <a:r>
               <a:rPr lang="en-US" sz="1300" b="1" dirty="0">
                 <a:solidFill>
-                  <a:srgbClr val="9D174D"/>
+                  <a:srgbClr val="4C1D95"/>
                 </a:solidFill>
                 <a:latin typeface="Trebuchet MS" pitchFamily="34" charset="0"/>
                 <a:ea typeface="Trebuchet MS" pitchFamily="34" charset="-122"/>
                 <a:cs typeface="Trebuchet MS" pitchFamily="34" charset="-120"/>
               </a:rPr>
-              <a:t>ive</a:t>
+              <a:t>ary</a:t>
             </a:r>
             <a:endParaRPr lang="en-US" sz="1300" dirty="0"/>
           </a:p>
@@ -10515,7 +10620,7 @@
                 <a:ea typeface="Calibri" pitchFamily="34" charset="-122"/>
                 <a:cs typeface="Calibri" pitchFamily="34" charset="-120"/>
               </a:rPr>
-              <a:t>having the quality of</a:t>
+              <a:t>place connected with</a:t>
             </a:r>
             <a:endParaRPr lang="en-US" sz="850" dirty="0"/>
           </a:p>
@@ -10622,8 +10727,8 @@
         </p:nvSpPr>
         <p:spPr>
           <a:xfrm>
-            <a:off x="2313432" y="3364992"/>
-            <a:ext cx="1645920" cy="475488"/>
+            <a:off x="1975104" y="3364992"/>
+            <a:ext cx="1554480" cy="475488"/>
           </a:xfrm>
           <a:prstGeom prst="rect">
             <a:avLst>
@@ -10649,8 +10754,8 @@
         </p:nvSpPr>
         <p:spPr>
           <a:xfrm>
-            <a:off x="2313432" y="3364992"/>
-            <a:ext cx="1645920" cy="475488"/>
+            <a:off x="1975104" y="3364992"/>
+            <a:ext cx="1554480" cy="475488"/>
           </a:xfrm>
           <a:prstGeom prst="rect">
             <a:avLst/>
@@ -10674,7 +10779,7 @@
                 <a:ea typeface="Trebuchet MS" pitchFamily="34" charset="-122"/>
                 <a:cs typeface="Trebuchet MS" pitchFamily="34" charset="-120"/>
               </a:rPr>
-              <a:t>ex</a:t>
+              <a:t>dis</a:t>
             </a:r>
             <a:endParaRPr lang="en-US" sz="1400" dirty="0"/>
           </a:p>
@@ -10688,8 +10793,8 @@
         </p:nvSpPr>
         <p:spPr>
           <a:xfrm>
-            <a:off x="3959352" y="3364992"/>
-            <a:ext cx="411480" cy="475488"/>
+            <a:off x="3529584" y="3364992"/>
+            <a:ext cx="73152" cy="475488"/>
           </a:xfrm>
           <a:prstGeom prst="rect">
             <a:avLst/>
@@ -10727,8 +10832,8 @@
         </p:nvSpPr>
         <p:spPr>
           <a:xfrm>
-            <a:off x="4370832" y="3364992"/>
-            <a:ext cx="1645920" cy="475488"/>
+            <a:off x="3602736" y="3364992"/>
+            <a:ext cx="1554480" cy="475488"/>
           </a:xfrm>
           <a:prstGeom prst="rect">
             <a:avLst>
@@ -10754,8 +10859,8 @@
         </p:nvSpPr>
         <p:spPr>
           <a:xfrm>
-            <a:off x="4370832" y="3364992"/>
-            <a:ext cx="1645920" cy="475488"/>
+            <a:off x="3602736" y="3364992"/>
+            <a:ext cx="1554480" cy="475488"/>
           </a:xfrm>
           <a:prstGeom prst="rect">
             <a:avLst/>
@@ -10793,8 +10898,8 @@
         </p:nvSpPr>
         <p:spPr>
           <a:xfrm>
-            <a:off x="6016752" y="3364992"/>
-            <a:ext cx="411480" cy="475488"/>
+            <a:off x="5157216" y="3364992"/>
+            <a:ext cx="73152" cy="475488"/>
           </a:xfrm>
           <a:prstGeom prst="rect">
             <a:avLst/>
@@ -10832,8 +10937,8 @@
         </p:nvSpPr>
         <p:spPr>
           <a:xfrm>
-            <a:off x="6428232" y="3364992"/>
-            <a:ext cx="1645920" cy="475488"/>
+            <a:off x="5230368" y="3364992"/>
+            <a:ext cx="1554480" cy="475488"/>
           </a:xfrm>
           <a:prstGeom prst="rect">
             <a:avLst>
@@ -10859,8 +10964,8 @@
         </p:nvSpPr>
         <p:spPr>
           <a:xfrm>
-            <a:off x="6428232" y="3364992"/>
-            <a:ext cx="1645920" cy="475488"/>
+            <a:off x="5230368" y="3364992"/>
+            <a:ext cx="1554480" cy="475488"/>
           </a:xfrm>
           <a:prstGeom prst="rect">
             <a:avLst/>
@@ -10884,7 +10989,7 @@
                 <a:ea typeface="Trebuchet MS" pitchFamily="34" charset="-122"/>
                 <a:cs typeface="Trebuchet MS" pitchFamily="34" charset="-120"/>
               </a:rPr>
-              <a:t>sive</a:t>
+              <a:t>sa</a:t>
             </a:r>
             <a:endParaRPr lang="en-US" sz="1400" dirty="0"/>
           </a:p>
@@ -10892,7 +10997,112 @@
       </p:sp>
       <p:sp>
         <p:nvSpPr>
-          <p:cNvPr id="36" name="Shape 34"/>
+          <p:cNvPr id="36" name="Text 34"/>
+          <p:cNvSpPr/>
+          <p:nvPr/>
+        </p:nvSpPr>
+        <p:spPr>
+          <a:xfrm>
+            <a:off x="6784848" y="3364992"/>
+            <a:ext cx="73152" cy="475488"/>
+          </a:xfrm>
+          <a:prstGeom prst="rect">
+            <a:avLst/>
+          </a:prstGeom>
+          <a:noFill/>
+          <a:ln/>
+        </p:spPr>
+        <p:txBody>
+          <a:bodyPr wrap="square" lIns="0" tIns="0" rIns="0" bIns="0" rtlCol="0" anchor="ctr"/>
+          <a:lstStyle/>
+          <a:p>
+            <a:pPr algn="ctr" indent="0" marL="0">
+              <a:buNone/>
+            </a:pPr>
+            <a:r>
+              <a:rPr lang="en-US" sz="1600" b="1" dirty="0">
+                <a:solidFill>
+                  <a:srgbClr val="0D9488"/>
+                </a:solidFill>
+                <a:latin typeface="Trebuchet MS" pitchFamily="34" charset="0"/>
+                <a:ea typeface="Trebuchet MS" pitchFamily="34" charset="-122"/>
+                <a:cs typeface="Trebuchet MS" pitchFamily="34" charset="-120"/>
+              </a:rPr>
+              <a:t>·</a:t>
+            </a:r>
+            <a:endParaRPr lang="en-US" sz="1600" dirty="0"/>
+          </a:p>
+        </p:txBody>
+      </p:sp>
+      <p:sp>
+        <p:nvSpPr>
+          <p:cNvPr id="37" name="Shape 35"/>
+          <p:cNvSpPr/>
+          <p:nvPr/>
+        </p:nvSpPr>
+        <p:spPr>
+          <a:xfrm>
+            <a:off x="6858000" y="3364992"/>
+            <a:ext cx="1554480" cy="475488"/>
+          </a:xfrm>
+          <a:prstGeom prst="rect">
+            <a:avLst>
+              <a:gd name="adj" fmla="val 9615"/>
+            </a:avLst>
+          </a:prstGeom>
+          <a:solidFill>
+            <a:srgbClr val="FFFFFF"/>
+          </a:solidFill>
+          <a:ln w="12700">
+            <a:solidFill>
+              <a:srgbClr val="0D9488"/>
+            </a:solidFill>
+            <a:prstDash val="solid"/>
+          </a:ln>
+        </p:spPr>
+      </p:sp>
+      <p:sp>
+        <p:nvSpPr>
+          <p:cNvPr id="38" name="Text 36"/>
+          <p:cNvSpPr/>
+          <p:nvPr/>
+        </p:nvSpPr>
+        <p:spPr>
+          <a:xfrm>
+            <a:off x="6858000" y="3364992"/>
+            <a:ext cx="1554480" cy="475488"/>
+          </a:xfrm>
+          <a:prstGeom prst="rect">
+            <a:avLst/>
+          </a:prstGeom>
+          <a:noFill/>
+          <a:ln/>
+        </p:spPr>
+        <p:txBody>
+          <a:bodyPr wrap="square" lIns="0" tIns="0" rIns="0" bIns="0" rtlCol="0" anchor="ctr"/>
+          <a:lstStyle/>
+          <a:p>
+            <a:pPr algn="ctr" indent="0" marL="0">
+              <a:buNone/>
+            </a:pPr>
+            <a:r>
+              <a:rPr lang="en-US" sz="1400" b="1" dirty="0">
+                <a:solidFill>
+                  <a:srgbClr val="0D9488"/>
+                </a:solidFill>
+                <a:latin typeface="Trebuchet MS" pitchFamily="34" charset="0"/>
+                <a:ea typeface="Trebuchet MS" pitchFamily="34" charset="-122"/>
+                <a:cs typeface="Trebuchet MS" pitchFamily="34" charset="-120"/>
+              </a:rPr>
+              <a:t>ry</a:t>
+            </a:r>
+            <a:endParaRPr lang="en-US" sz="1400" dirty="0"/>
+          </a:p>
+        </p:txBody>
+      </p:sp>
+      <p:sp>
+        <p:nvSpPr>
+          <p:cNvPr id="39" name="Shape 37"/>
           <p:cNvSpPr/>
           <p:nvPr/>
         </p:nvSpPr>
@@ -10919,7 +11129,7 @@
       </p:sp>
       <p:sp>
         <p:nvSpPr>
-          <p:cNvPr id="37" name="Text 35"/>
+          <p:cNvPr id="40" name="Text 38"/>
           <p:cNvSpPr/>
           <p:nvPr/>
         </p:nvSpPr>
@@ -10958,7 +11168,7 @@
       </p:sp>
       <p:sp>
         <p:nvSpPr>
-          <p:cNvPr id="38" name="Shape 36"/>
+          <p:cNvPr id="41" name="Shape 39"/>
           <p:cNvSpPr/>
           <p:nvPr/>
         </p:nvSpPr>
@@ -10985,14 +11195,14 @@
       </p:sp>
       <p:sp>
         <p:nvSpPr>
-          <p:cNvPr id="39" name="Shape 37"/>
-          <p:cNvSpPr/>
-          <p:nvPr/>
-        </p:nvSpPr>
-        <p:spPr>
-          <a:xfrm>
-            <a:off x="2124837" y="4169664"/>
-            <a:ext cx="685800" cy="475488"/>
+          <p:cNvPr id="42" name="Shape 40"/>
+          <p:cNvSpPr/>
+          <p:nvPr/>
+        </p:nvSpPr>
+        <p:spPr>
+          <a:xfrm>
+            <a:off x="1951828" y="4169664"/>
+            <a:ext cx="603504" cy="475488"/>
           </a:xfrm>
           <a:prstGeom prst="rect">
             <a:avLst>
@@ -11012,14 +11222,14 @@
       </p:sp>
       <p:sp>
         <p:nvSpPr>
-          <p:cNvPr id="40" name="Text 38"/>
-          <p:cNvSpPr/>
-          <p:nvPr/>
-        </p:nvSpPr>
-        <p:spPr>
-          <a:xfrm>
-            <a:off x="2124837" y="4169664"/>
-            <a:ext cx="685800" cy="475488"/>
+          <p:cNvPr id="43" name="Text 41"/>
+          <p:cNvSpPr/>
+          <p:nvPr/>
+        </p:nvSpPr>
+        <p:spPr>
+          <a:xfrm>
+            <a:off x="1951828" y="4169664"/>
+            <a:ext cx="603504" cy="475488"/>
           </a:xfrm>
           <a:prstGeom prst="rect">
             <a:avLst/>
@@ -11043,7 +11253,7 @@
                 <a:ea typeface="Trebuchet MS" pitchFamily="34" charset="-122"/>
                 <a:cs typeface="Trebuchet MS" pitchFamily="34" charset="-120"/>
               </a:rPr>
-              <a:t>e</a:t>
+              <a:t>d</a:t>
             </a:r>
             <a:endParaRPr lang="en-US" sz="900" dirty="0"/>
           </a:p>
@@ -11051,14 +11261,14 @@
       </p:sp>
       <p:sp>
         <p:nvSpPr>
-          <p:cNvPr id="41" name="Shape 39"/>
-          <p:cNvSpPr/>
-          <p:nvPr/>
-        </p:nvSpPr>
-        <p:spPr>
-          <a:xfrm>
-            <a:off x="3033522" y="4169664"/>
-            <a:ext cx="685800" cy="475488"/>
+          <p:cNvPr id="44" name="Shape 42"/>
+          <p:cNvSpPr/>
+          <p:nvPr/>
+        </p:nvSpPr>
+        <p:spPr>
+          <a:xfrm>
+            <a:off x="2605209" y="4169664"/>
+            <a:ext cx="603504" cy="475488"/>
           </a:xfrm>
           <a:prstGeom prst="rect">
             <a:avLst>
@@ -11078,14 +11288,14 @@
       </p:sp>
       <p:sp>
         <p:nvSpPr>
-          <p:cNvPr id="42" name="Text 40"/>
-          <p:cNvSpPr/>
-          <p:nvPr/>
-        </p:nvSpPr>
-        <p:spPr>
-          <a:xfrm>
-            <a:off x="3033522" y="4169664"/>
-            <a:ext cx="685800" cy="475488"/>
+          <p:cNvPr id="45" name="Text 43"/>
+          <p:cNvSpPr/>
+          <p:nvPr/>
+        </p:nvSpPr>
+        <p:spPr>
+          <a:xfrm>
+            <a:off x="2605209" y="4169664"/>
+            <a:ext cx="603504" cy="475488"/>
           </a:xfrm>
           <a:prstGeom prst="rect">
             <a:avLst/>
@@ -11109,7 +11319,7 @@
                 <a:ea typeface="Trebuchet MS" pitchFamily="34" charset="-122"/>
                 <a:cs typeface="Trebuchet MS" pitchFamily="34" charset="-120"/>
               </a:rPr>
-              <a:t>x</a:t>
+              <a:t>i</a:t>
             </a:r>
             <a:endParaRPr lang="en-US" sz="900" dirty="0"/>
           </a:p>
@@ -11117,14 +11327,14 @@
       </p:sp>
       <p:sp>
         <p:nvSpPr>
-          <p:cNvPr id="43" name="Shape 41"/>
-          <p:cNvSpPr/>
-          <p:nvPr/>
-        </p:nvSpPr>
-        <p:spPr>
-          <a:xfrm>
-            <a:off x="3942207" y="4169664"/>
-            <a:ext cx="685800" cy="475488"/>
+          <p:cNvPr id="46" name="Shape 44"/>
+          <p:cNvSpPr/>
+          <p:nvPr/>
+        </p:nvSpPr>
+        <p:spPr>
+          <a:xfrm>
+            <a:off x="3258589" y="4169664"/>
+            <a:ext cx="603504" cy="475488"/>
           </a:xfrm>
           <a:prstGeom prst="rect">
             <a:avLst>
@@ -11144,14 +11354,14 @@
       </p:sp>
       <p:sp>
         <p:nvSpPr>
-          <p:cNvPr id="44" name="Text 42"/>
-          <p:cNvSpPr/>
-          <p:nvPr/>
-        </p:nvSpPr>
-        <p:spPr>
-          <a:xfrm>
-            <a:off x="3942207" y="4169664"/>
-            <a:ext cx="685800" cy="475488"/>
+          <p:cNvPr id="47" name="Text 45"/>
+          <p:cNvSpPr/>
+          <p:nvPr/>
+        </p:nvSpPr>
+        <p:spPr>
+          <a:xfrm>
+            <a:off x="3258589" y="4169664"/>
+            <a:ext cx="603504" cy="475488"/>
           </a:xfrm>
           <a:prstGeom prst="rect">
             <a:avLst/>
@@ -11175,7 +11385,7 @@
                 <a:ea typeface="Trebuchet MS" pitchFamily="34" charset="-122"/>
                 <a:cs typeface="Trebuchet MS" pitchFamily="34" charset="-120"/>
               </a:rPr>
-              <a:t>p</a:t>
+              <a:t>s</a:t>
             </a:r>
             <a:endParaRPr lang="en-US" sz="900" dirty="0"/>
           </a:p>
@@ -11183,14 +11393,14 @@
       </p:sp>
       <p:sp>
         <p:nvSpPr>
-          <p:cNvPr id="45" name="Shape 43"/>
-          <p:cNvSpPr/>
-          <p:nvPr/>
-        </p:nvSpPr>
-        <p:spPr>
-          <a:xfrm>
-            <a:off x="4850892" y="4169664"/>
-            <a:ext cx="685800" cy="475488"/>
+          <p:cNvPr id="48" name="Shape 46"/>
+          <p:cNvSpPr/>
+          <p:nvPr/>
+        </p:nvSpPr>
+        <p:spPr>
+          <a:xfrm>
+            <a:off x="3911969" y="4169664"/>
+            <a:ext cx="603504" cy="475488"/>
           </a:xfrm>
           <a:prstGeom prst="rect">
             <a:avLst>
@@ -11210,14 +11420,14 @@
       </p:sp>
       <p:sp>
         <p:nvSpPr>
-          <p:cNvPr id="46" name="Text 44"/>
-          <p:cNvSpPr/>
-          <p:nvPr/>
-        </p:nvSpPr>
-        <p:spPr>
-          <a:xfrm>
-            <a:off x="4850892" y="4169664"/>
-            <a:ext cx="685800" cy="475488"/>
+          <p:cNvPr id="49" name="Text 47"/>
+          <p:cNvSpPr/>
+          <p:nvPr/>
+        </p:nvSpPr>
+        <p:spPr>
+          <a:xfrm>
+            <a:off x="3911969" y="4169664"/>
+            <a:ext cx="603504" cy="475488"/>
           </a:xfrm>
           <a:prstGeom prst="rect">
             <a:avLst/>
@@ -11241,7 +11451,7 @@
                 <a:ea typeface="Trebuchet MS" pitchFamily="34" charset="-122"/>
                 <a:cs typeface="Trebuchet MS" pitchFamily="34" charset="-120"/>
               </a:rPr>
-              <a:t>e</a:t>
+              <a:t>p</a:t>
             </a:r>
             <a:endParaRPr lang="en-US" sz="900" dirty="0"/>
           </a:p>
@@ -11249,14 +11459,14 @@
       </p:sp>
       <p:sp>
         <p:nvSpPr>
-          <p:cNvPr id="47" name="Shape 45"/>
-          <p:cNvSpPr/>
-          <p:nvPr/>
-        </p:nvSpPr>
-        <p:spPr>
-          <a:xfrm>
-            <a:off x="5759577" y="4169664"/>
-            <a:ext cx="685800" cy="475488"/>
+          <p:cNvPr id="50" name="Shape 48"/>
+          <p:cNvSpPr/>
+          <p:nvPr/>
+        </p:nvSpPr>
+        <p:spPr>
+          <a:xfrm>
+            <a:off x="4565350" y="4169664"/>
+            <a:ext cx="603504" cy="475488"/>
           </a:xfrm>
           <a:prstGeom prst="rect">
             <a:avLst>
@@ -11276,14 +11486,14 @@
       </p:sp>
       <p:sp>
         <p:nvSpPr>
-          <p:cNvPr id="48" name="Text 46"/>
-          <p:cNvSpPr/>
-          <p:nvPr/>
-        </p:nvSpPr>
-        <p:spPr>
-          <a:xfrm>
-            <a:off x="5759577" y="4169664"/>
-            <a:ext cx="685800" cy="475488"/>
+          <p:cNvPr id="51" name="Text 49"/>
+          <p:cNvSpPr/>
+          <p:nvPr/>
+        </p:nvSpPr>
+        <p:spPr>
+          <a:xfrm>
+            <a:off x="4565350" y="4169664"/>
+            <a:ext cx="603504" cy="475488"/>
           </a:xfrm>
           <a:prstGeom prst="rect">
             <a:avLst/>
@@ -11307,7 +11517,7 @@
                 <a:ea typeface="Trebuchet MS" pitchFamily="34" charset="-122"/>
                 <a:cs typeface="Trebuchet MS" pitchFamily="34" charset="-120"/>
               </a:rPr>
-              <a:t>n</a:t>
+              <a:t>e</a:t>
             </a:r>
             <a:endParaRPr lang="en-US" sz="900" dirty="0"/>
           </a:p>
@@ -11315,14 +11525,14 @@
       </p:sp>
       <p:sp>
         <p:nvSpPr>
-          <p:cNvPr id="49" name="Shape 47"/>
-          <p:cNvSpPr/>
-          <p:nvPr/>
-        </p:nvSpPr>
-        <p:spPr>
-          <a:xfrm>
-            <a:off x="6668262" y="4169664"/>
-            <a:ext cx="685800" cy="475488"/>
+          <p:cNvPr id="52" name="Shape 50"/>
+          <p:cNvSpPr/>
+          <p:nvPr/>
+        </p:nvSpPr>
+        <p:spPr>
+          <a:xfrm>
+            <a:off x="5218730" y="4169664"/>
+            <a:ext cx="603504" cy="475488"/>
           </a:xfrm>
           <a:prstGeom prst="rect">
             <a:avLst>
@@ -11342,14 +11552,14 @@
       </p:sp>
       <p:sp>
         <p:nvSpPr>
-          <p:cNvPr id="50" name="Text 48"/>
-          <p:cNvSpPr/>
-          <p:nvPr/>
-        </p:nvSpPr>
-        <p:spPr>
-          <a:xfrm>
-            <a:off x="6668262" y="4169664"/>
-            <a:ext cx="685800" cy="475488"/>
+          <p:cNvPr id="53" name="Text 51"/>
+          <p:cNvSpPr/>
+          <p:nvPr/>
+        </p:nvSpPr>
+        <p:spPr>
+          <a:xfrm>
+            <a:off x="5218730" y="4169664"/>
+            <a:ext cx="603504" cy="475488"/>
           </a:xfrm>
           <a:prstGeom prst="rect">
             <a:avLst/>
@@ -11373,7 +11583,7 @@
                 <a:ea typeface="Trebuchet MS" pitchFamily="34" charset="-122"/>
                 <a:cs typeface="Trebuchet MS" pitchFamily="34" charset="-120"/>
               </a:rPr>
-              <a:t>s</a:t>
+              <a:t>n</a:t>
             </a:r>
             <a:endParaRPr lang="en-US" sz="900" dirty="0"/>
           </a:p>
@@ -11381,14 +11591,14 @@
       </p:sp>
       <p:sp>
         <p:nvSpPr>
-          <p:cNvPr id="51" name="Shape 49"/>
-          <p:cNvSpPr/>
-          <p:nvPr/>
-        </p:nvSpPr>
-        <p:spPr>
-          <a:xfrm>
-            <a:off x="7576947" y="4169664"/>
-            <a:ext cx="685800" cy="475488"/>
+          <p:cNvPr id="54" name="Shape 52"/>
+          <p:cNvSpPr/>
+          <p:nvPr/>
+        </p:nvSpPr>
+        <p:spPr>
+          <a:xfrm>
+            <a:off x="5872111" y="4169664"/>
+            <a:ext cx="603504" cy="475488"/>
           </a:xfrm>
           <a:prstGeom prst="rect">
             <a:avLst>
@@ -11408,14 +11618,14 @@
       </p:sp>
       <p:sp>
         <p:nvSpPr>
-          <p:cNvPr id="52" name="Text 50"/>
-          <p:cNvSpPr/>
-          <p:nvPr/>
-        </p:nvSpPr>
-        <p:spPr>
-          <a:xfrm>
-            <a:off x="7576947" y="4169664"/>
-            <a:ext cx="685800" cy="475488"/>
+          <p:cNvPr id="55" name="Text 53"/>
+          <p:cNvSpPr/>
+          <p:nvPr/>
+        </p:nvSpPr>
+        <p:spPr>
+          <a:xfrm>
+            <a:off x="5872111" y="4169664"/>
+            <a:ext cx="603504" cy="475488"/>
           </a:xfrm>
           <a:prstGeom prst="rect">
             <a:avLst/>
@@ -11439,7 +11649,205 @@
                 <a:ea typeface="Trebuchet MS" pitchFamily="34" charset="-122"/>
                 <a:cs typeface="Trebuchet MS" pitchFamily="34" charset="-120"/>
               </a:rPr>
-              <a:t>ive</a:t>
+              <a:t>s</a:t>
+            </a:r>
+            <a:endParaRPr lang="en-US" sz="900" dirty="0"/>
+          </a:p>
+        </p:txBody>
+      </p:sp>
+      <p:sp>
+        <p:nvSpPr>
+          <p:cNvPr id="56" name="Shape 54"/>
+          <p:cNvSpPr/>
+          <p:nvPr/>
+        </p:nvSpPr>
+        <p:spPr>
+          <a:xfrm>
+            <a:off x="6525491" y="4169664"/>
+            <a:ext cx="603504" cy="475488"/>
+          </a:xfrm>
+          <a:prstGeom prst="rect">
+            <a:avLst>
+              <a:gd name="adj" fmla="val 7692"/>
+            </a:avLst>
+          </a:prstGeom>
+          <a:solidFill>
+            <a:srgbClr val="FFFFFF"/>
+          </a:solidFill>
+          <a:ln w="12700">
+            <a:solidFill>
+              <a:srgbClr val="DB2777"/>
+            </a:solidFill>
+            <a:prstDash val="solid"/>
+          </a:ln>
+        </p:spPr>
+      </p:sp>
+      <p:sp>
+        <p:nvSpPr>
+          <p:cNvPr id="57" name="Text 55"/>
+          <p:cNvSpPr/>
+          <p:nvPr/>
+        </p:nvSpPr>
+        <p:spPr>
+          <a:xfrm>
+            <a:off x="6525491" y="4169664"/>
+            <a:ext cx="603504" cy="475488"/>
+          </a:xfrm>
+          <a:prstGeom prst="rect">
+            <a:avLst/>
+          </a:prstGeom>
+          <a:noFill/>
+          <a:ln/>
+        </p:spPr>
+        <p:txBody>
+          <a:bodyPr wrap="square" lIns="0" tIns="0" rIns="0" bIns="0" rtlCol="0" anchor="ctr"/>
+          <a:lstStyle/>
+          <a:p>
+            <a:pPr algn="ctr" indent="0" marL="0">
+              <a:buNone/>
+            </a:pPr>
+            <a:r>
+              <a:rPr lang="en-US" sz="900" b="1" dirty="0">
+                <a:solidFill>
+                  <a:srgbClr val="9D174D"/>
+                </a:solidFill>
+                <a:latin typeface="Trebuchet MS" pitchFamily="34" charset="0"/>
+                <a:ea typeface="Trebuchet MS" pitchFamily="34" charset="-122"/>
+                <a:cs typeface="Trebuchet MS" pitchFamily="34" charset="-120"/>
+              </a:rPr>
+              <a:t>a</a:t>
+            </a:r>
+            <a:endParaRPr lang="en-US" sz="900" dirty="0"/>
+          </a:p>
+        </p:txBody>
+      </p:sp>
+      <p:sp>
+        <p:nvSpPr>
+          <p:cNvPr id="58" name="Shape 56"/>
+          <p:cNvSpPr/>
+          <p:nvPr/>
+        </p:nvSpPr>
+        <p:spPr>
+          <a:xfrm>
+            <a:off x="7178871" y="4169664"/>
+            <a:ext cx="603504" cy="475488"/>
+          </a:xfrm>
+          <a:prstGeom prst="rect">
+            <a:avLst>
+              <a:gd name="adj" fmla="val 7692"/>
+            </a:avLst>
+          </a:prstGeom>
+          <a:solidFill>
+            <a:srgbClr val="FFFFFF"/>
+          </a:solidFill>
+          <a:ln w="12700">
+            <a:solidFill>
+              <a:srgbClr val="DB2777"/>
+            </a:solidFill>
+            <a:prstDash val="solid"/>
+          </a:ln>
+        </p:spPr>
+      </p:sp>
+      <p:sp>
+        <p:nvSpPr>
+          <p:cNvPr id="59" name="Text 57"/>
+          <p:cNvSpPr/>
+          <p:nvPr/>
+        </p:nvSpPr>
+        <p:spPr>
+          <a:xfrm>
+            <a:off x="7178871" y="4169664"/>
+            <a:ext cx="603504" cy="475488"/>
+          </a:xfrm>
+          <a:prstGeom prst="rect">
+            <a:avLst/>
+          </a:prstGeom>
+          <a:noFill/>
+          <a:ln/>
+        </p:spPr>
+        <p:txBody>
+          <a:bodyPr wrap="square" lIns="0" tIns="0" rIns="0" bIns="0" rtlCol="0" anchor="ctr"/>
+          <a:lstStyle/>
+          <a:p>
+            <a:pPr algn="ctr" indent="0" marL="0">
+              <a:buNone/>
+            </a:pPr>
+            <a:r>
+              <a:rPr lang="en-US" sz="900" b="1" dirty="0">
+                <a:solidFill>
+                  <a:srgbClr val="9D174D"/>
+                </a:solidFill>
+                <a:latin typeface="Trebuchet MS" pitchFamily="34" charset="0"/>
+                <a:ea typeface="Trebuchet MS" pitchFamily="34" charset="-122"/>
+                <a:cs typeface="Trebuchet MS" pitchFamily="34" charset="-120"/>
+              </a:rPr>
+              <a:t>r</a:t>
+            </a:r>
+            <a:endParaRPr lang="en-US" sz="900" dirty="0"/>
+          </a:p>
+        </p:txBody>
+      </p:sp>
+      <p:sp>
+        <p:nvSpPr>
+          <p:cNvPr id="60" name="Shape 58"/>
+          <p:cNvSpPr/>
+          <p:nvPr/>
+        </p:nvSpPr>
+        <p:spPr>
+          <a:xfrm>
+            <a:off x="7832252" y="4169664"/>
+            <a:ext cx="603504" cy="475488"/>
+          </a:xfrm>
+          <a:prstGeom prst="rect">
+            <a:avLst>
+              <a:gd name="adj" fmla="val 7692"/>
+            </a:avLst>
+          </a:prstGeom>
+          <a:solidFill>
+            <a:srgbClr val="FFFFFF"/>
+          </a:solidFill>
+          <a:ln w="12700">
+            <a:solidFill>
+              <a:srgbClr val="DB2777"/>
+            </a:solidFill>
+            <a:prstDash val="solid"/>
+          </a:ln>
+        </p:spPr>
+      </p:sp>
+      <p:sp>
+        <p:nvSpPr>
+          <p:cNvPr id="61" name="Text 59"/>
+          <p:cNvSpPr/>
+          <p:nvPr/>
+        </p:nvSpPr>
+        <p:spPr>
+          <a:xfrm>
+            <a:off x="7832252" y="4169664"/>
+            <a:ext cx="603504" cy="475488"/>
+          </a:xfrm>
+          <a:prstGeom prst="rect">
+            <a:avLst/>
+          </a:prstGeom>
+          <a:noFill/>
+          <a:ln/>
+        </p:spPr>
+        <p:txBody>
+          <a:bodyPr wrap="square" lIns="0" tIns="0" rIns="0" bIns="0" rtlCol="0" anchor="ctr"/>
+          <a:lstStyle/>
+          <a:p>
+            <a:pPr algn="ctr" indent="0" marL="0">
+              <a:buNone/>
+            </a:pPr>
+            <a:r>
+              <a:rPr lang="en-US" sz="900" b="1" dirty="0">
+                <a:solidFill>
+                  <a:srgbClr val="9D174D"/>
+                </a:solidFill>
+                <a:latin typeface="Trebuchet MS" pitchFamily="34" charset="0"/>
+                <a:ea typeface="Trebuchet MS" pitchFamily="34" charset="-122"/>
+                <a:cs typeface="Trebuchet MS" pitchFamily="34" charset="-120"/>
+              </a:rPr>
+              <a:t>y</a:t>
             </a:r>
             <a:endParaRPr lang="en-US" sz="900" dirty="0"/>
           </a:p>
@@ -11870,7 +12278,7 @@
                 <a:ea typeface="Trebuchet MS" pitchFamily="34" charset="-122"/>
                 <a:cs typeface="Trebuchet MS" pitchFamily="34" charset="-120"/>
               </a:rPr>
-              <a:t>compensate</a:t>
+              <a:t>expensive</a:t>
             </a:r>
             <a:endParaRPr lang="en-US" sz="2800" dirty="0"/>
           </a:p>
@@ -12697,7 +13105,7 @@
                 <a:ea typeface="Trebuchet MS" pitchFamily="34" charset="-122"/>
                 <a:cs typeface="Trebuchet MS" pitchFamily="34" charset="-120"/>
               </a:rPr>
-              <a:t>compensate</a:t>
+              <a:t>expensive</a:t>
             </a:r>
             <a:endParaRPr lang="en-US" sz="2800" dirty="0"/>
           </a:p>
@@ -12836,7 +13244,7 @@
                 <a:ea typeface="Trebuchet MS" pitchFamily="34" charset="-122"/>
                 <a:cs typeface="Trebuchet MS" pitchFamily="34" charset="-120"/>
               </a:rPr>
-              <a:t>com</a:t>
+              <a:t>ex</a:t>
             </a:r>
             <a:endParaRPr lang="en-US" sz="1300" dirty="0"/>
           </a:p>
@@ -12875,7 +13283,7 @@
                 <a:ea typeface="Calibri" pitchFamily="34" charset="-122"/>
                 <a:cs typeface="Calibri" pitchFamily="34" charset="-120"/>
               </a:rPr>
-              <a:t>together, with</a:t>
+              <a:t>out, away from</a:t>
             </a:r>
             <a:endParaRPr lang="en-US" sz="850" dirty="0"/>
           </a:p>
@@ -12987,7 +13395,7 @@
                 <a:ea typeface="Calibri" pitchFamily="34" charset="-122"/>
                 <a:cs typeface="Calibri" pitchFamily="34" charset="-120"/>
               </a:rPr>
-              <a:t>to weigh, pay</a:t>
+              <a:t>to hang, weigh, pay</a:t>
             </a:r>
             <a:endParaRPr lang="en-US" sz="850" dirty="0"/>
           </a:p>
@@ -13060,7 +13468,7 @@
                 <a:ea typeface="Trebuchet MS" pitchFamily="34" charset="-122"/>
                 <a:cs typeface="Trebuchet MS" pitchFamily="34" charset="-120"/>
               </a:rPr>
-              <a:t>ate</a:t>
+              <a:t>ive</a:t>
             </a:r>
             <a:endParaRPr lang="en-US" sz="1300" dirty="0"/>
           </a:p>
@@ -13099,7 +13507,7 @@
                 <a:ea typeface="Calibri" pitchFamily="34" charset="-122"/>
                 <a:cs typeface="Calibri" pitchFamily="34" charset="-120"/>
               </a:rPr>
-              <a:t>to make or do</a:t>
+              <a:t>having the quality of</a:t>
             </a:r>
             <a:endParaRPr lang="en-US" sz="850" dirty="0"/>
           </a:p>
@@ -13794,7 +14202,7 @@
                 <a:ea typeface="Trebuchet MS" pitchFamily="34" charset="-122"/>
                 <a:cs typeface="Trebuchet MS" pitchFamily="34" charset="-120"/>
               </a:rPr>
-              <a:t>compensate</a:t>
+              <a:t>expensive</a:t>
             </a:r>
             <a:endParaRPr lang="en-US" sz="2800" dirty="0"/>
           </a:p>
@@ -13933,7 +14341,7 @@
                 <a:ea typeface="Trebuchet MS" pitchFamily="34" charset="-122"/>
                 <a:cs typeface="Trebuchet MS" pitchFamily="34" charset="-120"/>
               </a:rPr>
-              <a:t>com</a:t>
+              <a:t>ex</a:t>
             </a:r>
             <a:endParaRPr lang="en-US" sz="1300" dirty="0"/>
           </a:p>
@@ -13972,7 +14380,7 @@
                 <a:ea typeface="Calibri" pitchFamily="34" charset="-122"/>
                 <a:cs typeface="Calibri" pitchFamily="34" charset="-120"/>
               </a:rPr>
-              <a:t>together, with</a:t>
+              <a:t>out, away from</a:t>
             </a:r>
             <a:endParaRPr lang="en-US" sz="850" dirty="0"/>
           </a:p>
@@ -14084,7 +14492,7 @@
                 <a:ea typeface="Calibri" pitchFamily="34" charset="-122"/>
                 <a:cs typeface="Calibri" pitchFamily="34" charset="-120"/>
               </a:rPr>
-              <a:t>to weigh, pay</a:t>
+              <a:t>to hang, weigh, pay</a:t>
             </a:r>
             <a:endParaRPr lang="en-US" sz="850" dirty="0"/>
           </a:p>
@@ -14157,7 +14565,7 @@
                 <a:ea typeface="Trebuchet MS" pitchFamily="34" charset="-122"/>
                 <a:cs typeface="Trebuchet MS" pitchFamily="34" charset="-120"/>
               </a:rPr>
-              <a:t>ate</a:t>
+              <a:t>ive</a:t>
             </a:r>
             <a:endParaRPr lang="en-US" sz="1300" dirty="0"/>
           </a:p>
@@ -14196,7 +14604,7 @@
                 <a:ea typeface="Calibri" pitchFamily="34" charset="-122"/>
                 <a:cs typeface="Calibri" pitchFamily="34" charset="-120"/>
               </a:rPr>
-              <a:t>to make or do</a:t>
+              <a:t>having the quality of</a:t>
             </a:r>
             <a:endParaRPr lang="en-US" sz="850" dirty="0"/>
           </a:p>
@@ -14355,7 +14763,7 @@
                 <a:ea typeface="Trebuchet MS" pitchFamily="34" charset="-122"/>
                 <a:cs typeface="Trebuchet MS" pitchFamily="34" charset="-120"/>
               </a:rPr>
-              <a:t>com</a:t>
+              <a:t>ex</a:t>
             </a:r>
             <a:endParaRPr lang="en-US" sz="1400" dirty="0"/>
           </a:p>
@@ -14565,7 +14973,7 @@
                 <a:ea typeface="Trebuchet MS" pitchFamily="34" charset="-122"/>
                 <a:cs typeface="Trebuchet MS" pitchFamily="34" charset="-120"/>
               </a:rPr>
-              <a:t>sate</a:t>
+              <a:t>sive</a:t>
             </a:r>
             <a:endParaRPr lang="en-US" sz="1400" dirty="0"/>
           </a:p>
@@ -15393,7 +15801,7 @@
                 <a:ea typeface="Trebuchet MS" pitchFamily="34" charset="-122"/>
                 <a:cs typeface="Trebuchet MS" pitchFamily="34" charset="-120"/>
               </a:rPr>
-              <a:t>compensate</a:t>
+              <a:t>expensive</a:t>
             </a:r>
             <a:endParaRPr lang="en-US" sz="2800" dirty="0"/>
           </a:p>
@@ -15532,7 +15940,7 @@
                 <a:ea typeface="Trebuchet MS" pitchFamily="34" charset="-122"/>
                 <a:cs typeface="Trebuchet MS" pitchFamily="34" charset="-120"/>
               </a:rPr>
-              <a:t>com</a:t>
+              <a:t>ex</a:t>
             </a:r>
             <a:endParaRPr lang="en-US" sz="1300" dirty="0"/>
           </a:p>
@@ -15571,7 +15979,7 @@
                 <a:ea typeface="Calibri" pitchFamily="34" charset="-122"/>
                 <a:cs typeface="Calibri" pitchFamily="34" charset="-120"/>
               </a:rPr>
-              <a:t>together, with</a:t>
+              <a:t>out, away from</a:t>
             </a:r>
             <a:endParaRPr lang="en-US" sz="850" dirty="0"/>
           </a:p>
@@ -15683,7 +16091,7 @@
                 <a:ea typeface="Calibri" pitchFamily="34" charset="-122"/>
                 <a:cs typeface="Calibri" pitchFamily="34" charset="-120"/>
               </a:rPr>
-              <a:t>to weigh, pay</a:t>
+              <a:t>to hang, weigh, pay</a:t>
             </a:r>
             <a:endParaRPr lang="en-US" sz="850" dirty="0"/>
           </a:p>
@@ -15756,7 +16164,7 @@
                 <a:ea typeface="Trebuchet MS" pitchFamily="34" charset="-122"/>
                 <a:cs typeface="Trebuchet MS" pitchFamily="34" charset="-120"/>
               </a:rPr>
-              <a:t>ate</a:t>
+              <a:t>ive</a:t>
             </a:r>
             <a:endParaRPr lang="en-US" sz="1300" dirty="0"/>
           </a:p>
@@ -15795,7 +16203,7 @@
                 <a:ea typeface="Calibri" pitchFamily="34" charset="-122"/>
                 <a:cs typeface="Calibri" pitchFamily="34" charset="-120"/>
               </a:rPr>
-              <a:t>to make or do</a:t>
+              <a:t>having the quality of</a:t>
             </a:r>
             <a:endParaRPr lang="en-US" sz="850" dirty="0"/>
           </a:p>
@@ -15954,7 +16362,7 @@
                 <a:ea typeface="Trebuchet MS" pitchFamily="34" charset="-122"/>
                 <a:cs typeface="Trebuchet MS" pitchFamily="34" charset="-120"/>
               </a:rPr>
-              <a:t>com</a:t>
+              <a:t>ex</a:t>
             </a:r>
             <a:endParaRPr lang="en-US" sz="1400" dirty="0"/>
           </a:p>
@@ -16164,7 +16572,7 @@
                 <a:ea typeface="Trebuchet MS" pitchFamily="34" charset="-122"/>
                 <a:cs typeface="Trebuchet MS" pitchFamily="34" charset="-120"/>
               </a:rPr>
-              <a:t>sate</a:t>
+              <a:t>sive</a:t>
             </a:r>
             <a:endParaRPr lang="en-US" sz="1400" dirty="0"/>
           </a:p>
@@ -16245,11 +16653,11 @@
         <p:spPr>
           <a:xfrm>
             <a:off x="1874520" y="4096512"/>
-            <a:ext cx="6903720" cy="804672"/>
+            <a:ext cx="6903720" cy="658368"/>
           </a:xfrm>
           <a:prstGeom prst="rect">
             <a:avLst>
-              <a:gd name="adj" fmla="val 6818"/>
+              <a:gd name="adj" fmla="val 8333"/>
             </a:avLst>
           </a:prstGeom>
           <a:solidFill>
@@ -16272,11 +16680,11 @@
         <p:spPr>
           <a:xfrm>
             <a:off x="2023872" y="4169664"/>
-            <a:ext cx="685800" cy="384048"/>
+            <a:ext cx="685800" cy="475488"/>
           </a:xfrm>
           <a:prstGeom prst="rect">
             <a:avLst>
-              <a:gd name="adj" fmla="val 9524"/>
+              <a:gd name="adj" fmla="val 7692"/>
             </a:avLst>
           </a:prstGeom>
           <a:solidFill>
@@ -16299,7 +16707,7 @@
         <p:spPr>
           <a:xfrm>
             <a:off x="2023872" y="4169664"/>
-            <a:ext cx="685800" cy="384048"/>
+            <a:ext cx="685800" cy="475488"/>
           </a:xfrm>
           <a:prstGeom prst="rect">
             <a:avLst/>
@@ -16323,7 +16731,7 @@
                 <a:ea typeface="Trebuchet MS" pitchFamily="34" charset="-122"/>
                 <a:cs typeface="Trebuchet MS" pitchFamily="34" charset="-120"/>
               </a:rPr>
-              <a:t>c</a:t>
+              <a:t>e</a:t>
             </a:r>
             <a:endParaRPr lang="en-US" sz="900" dirty="0"/>
           </a:p>
@@ -16331,57 +16739,18 @@
       </p:sp>
       <p:sp>
         <p:nvSpPr>
-          <p:cNvPr id="41" name="Text 39"/>
-          <p:cNvSpPr/>
-          <p:nvPr/>
-        </p:nvSpPr>
-        <p:spPr>
-          <a:xfrm>
-            <a:off x="2023872" y="4572000"/>
-            <a:ext cx="685800" cy="219456"/>
-          </a:xfrm>
-          <a:prstGeom prst="rect">
-            <a:avLst/>
-          </a:prstGeom>
-          <a:noFill/>
-          <a:ln/>
-        </p:spPr>
-        <p:txBody>
-          <a:bodyPr wrap="square" lIns="0" tIns="0" rIns="0" bIns="0" rtlCol="0" anchor="t"/>
-          <a:lstStyle/>
-          <a:p>
-            <a:pPr algn="ctr" indent="0" marL="0">
-              <a:buNone/>
-            </a:pPr>
-            <a:r>
-              <a:rPr lang="en-US" sz="750" i="1" dirty="0">
-                <a:solidFill>
-                  <a:srgbClr val="94A3B8"/>
-                </a:solidFill>
-                <a:latin typeface="Calibri" pitchFamily="34" charset="0"/>
-                <a:ea typeface="Calibri" pitchFamily="34" charset="-122"/>
-                <a:cs typeface="Calibri" pitchFamily="34" charset="-120"/>
-              </a:rPr>
-              <a:t>/k/</a:t>
-            </a:r>
-            <a:endParaRPr lang="en-US" sz="750" dirty="0"/>
-          </a:p>
-        </p:txBody>
-      </p:sp>
-      <p:sp>
-        <p:nvSpPr>
-          <p:cNvPr id="42" name="Shape 40"/>
+          <p:cNvPr id="41" name="Shape 39"/>
           <p:cNvSpPr/>
           <p:nvPr/>
         </p:nvSpPr>
         <p:spPr>
           <a:xfrm>
             <a:off x="2831592" y="4169664"/>
-            <a:ext cx="685800" cy="384048"/>
+            <a:ext cx="685800" cy="475488"/>
           </a:xfrm>
           <a:prstGeom prst="rect">
             <a:avLst>
-              <a:gd name="adj" fmla="val 9524"/>
+              <a:gd name="adj" fmla="val 7692"/>
             </a:avLst>
           </a:prstGeom>
           <a:solidFill>
@@ -16397,14 +16766,14 @@
       </p:sp>
       <p:sp>
         <p:nvSpPr>
-          <p:cNvPr id="43" name="Text 41"/>
+          <p:cNvPr id="42" name="Text 40"/>
           <p:cNvSpPr/>
           <p:nvPr/>
         </p:nvSpPr>
         <p:spPr>
           <a:xfrm>
             <a:off x="2831592" y="4169664"/>
-            <a:ext cx="685800" cy="384048"/>
+            <a:ext cx="685800" cy="475488"/>
           </a:xfrm>
           <a:prstGeom prst="rect">
             <a:avLst/>
@@ -16428,7 +16797,7 @@
                 <a:ea typeface="Trebuchet MS" pitchFamily="34" charset="-122"/>
                 <a:cs typeface="Trebuchet MS" pitchFamily="34" charset="-120"/>
               </a:rPr>
-              <a:t>o</a:t>
+              <a:t>x</a:t>
             </a:r>
             <a:endParaRPr lang="en-US" sz="900" dirty="0"/>
           </a:p>
@@ -16436,18 +16805,18 @@
       </p:sp>
       <p:sp>
         <p:nvSpPr>
-          <p:cNvPr id="44" name="Shape 42"/>
+          <p:cNvPr id="43" name="Shape 41"/>
           <p:cNvSpPr/>
           <p:nvPr/>
         </p:nvSpPr>
         <p:spPr>
           <a:xfrm>
             <a:off x="3639312" y="4169664"/>
-            <a:ext cx="685800" cy="384048"/>
+            <a:ext cx="685800" cy="475488"/>
           </a:xfrm>
           <a:prstGeom prst="rect">
             <a:avLst>
-              <a:gd name="adj" fmla="val 9524"/>
+              <a:gd name="adj" fmla="val 7692"/>
             </a:avLst>
           </a:prstGeom>
           <a:solidFill>
@@ -16463,14 +16832,14 @@
       </p:sp>
       <p:sp>
         <p:nvSpPr>
-          <p:cNvPr id="45" name="Text 43"/>
+          <p:cNvPr id="44" name="Text 42"/>
           <p:cNvSpPr/>
           <p:nvPr/>
         </p:nvSpPr>
         <p:spPr>
           <a:xfrm>
             <a:off x="3639312" y="4169664"/>
-            <a:ext cx="685800" cy="384048"/>
+            <a:ext cx="685800" cy="475488"/>
           </a:xfrm>
           <a:prstGeom prst="rect">
             <a:avLst/>
@@ -16494,7 +16863,7 @@
                 <a:ea typeface="Trebuchet MS" pitchFamily="34" charset="-122"/>
                 <a:cs typeface="Trebuchet MS" pitchFamily="34" charset="-120"/>
               </a:rPr>
-              <a:t>m</a:t>
+              <a:t>p</a:t>
             </a:r>
             <a:endParaRPr lang="en-US" sz="900" dirty="0"/>
           </a:p>
@@ -16502,18 +16871,18 @@
       </p:sp>
       <p:sp>
         <p:nvSpPr>
-          <p:cNvPr id="46" name="Shape 44"/>
+          <p:cNvPr id="45" name="Shape 43"/>
           <p:cNvSpPr/>
           <p:nvPr/>
         </p:nvSpPr>
         <p:spPr>
           <a:xfrm>
             <a:off x="4447032" y="4169664"/>
-            <a:ext cx="685800" cy="384048"/>
+            <a:ext cx="685800" cy="475488"/>
           </a:xfrm>
           <a:prstGeom prst="rect">
             <a:avLst>
-              <a:gd name="adj" fmla="val 9524"/>
+              <a:gd name="adj" fmla="val 7692"/>
             </a:avLst>
           </a:prstGeom>
           <a:solidFill>
@@ -16529,14 +16898,14 @@
       </p:sp>
       <p:sp>
         <p:nvSpPr>
-          <p:cNvPr id="47" name="Text 45"/>
+          <p:cNvPr id="46" name="Text 44"/>
           <p:cNvSpPr/>
           <p:nvPr/>
         </p:nvSpPr>
         <p:spPr>
           <a:xfrm>
             <a:off x="4447032" y="4169664"/>
-            <a:ext cx="685800" cy="384048"/>
+            <a:ext cx="685800" cy="475488"/>
           </a:xfrm>
           <a:prstGeom prst="rect">
             <a:avLst/>
@@ -16560,7 +16929,7 @@
                 <a:ea typeface="Trebuchet MS" pitchFamily="34" charset="-122"/>
                 <a:cs typeface="Trebuchet MS" pitchFamily="34" charset="-120"/>
               </a:rPr>
-              <a:t>p</a:t>
+              <a:t>e</a:t>
             </a:r>
             <a:endParaRPr lang="en-US" sz="900" dirty="0"/>
           </a:p>
@@ -16568,18 +16937,18 @@
       </p:sp>
       <p:sp>
         <p:nvSpPr>
-          <p:cNvPr id="48" name="Shape 46"/>
+          <p:cNvPr id="47" name="Shape 45"/>
           <p:cNvSpPr/>
           <p:nvPr/>
         </p:nvSpPr>
         <p:spPr>
           <a:xfrm>
             <a:off x="5254752" y="4169664"/>
-            <a:ext cx="685800" cy="384048"/>
+            <a:ext cx="685800" cy="475488"/>
           </a:xfrm>
           <a:prstGeom prst="rect">
             <a:avLst>
-              <a:gd name="adj" fmla="val 9524"/>
+              <a:gd name="adj" fmla="val 7692"/>
             </a:avLst>
           </a:prstGeom>
           <a:solidFill>
@@ -16595,14 +16964,14 @@
       </p:sp>
       <p:sp>
         <p:nvSpPr>
-          <p:cNvPr id="49" name="Text 47"/>
+          <p:cNvPr id="48" name="Text 46"/>
           <p:cNvSpPr/>
           <p:nvPr/>
         </p:nvSpPr>
         <p:spPr>
           <a:xfrm>
             <a:off x="5254752" y="4169664"/>
-            <a:ext cx="685800" cy="384048"/>
+            <a:ext cx="685800" cy="475488"/>
           </a:xfrm>
           <a:prstGeom prst="rect">
             <a:avLst/>
@@ -16626,7 +16995,7 @@
                 <a:ea typeface="Trebuchet MS" pitchFamily="34" charset="-122"/>
                 <a:cs typeface="Trebuchet MS" pitchFamily="34" charset="-120"/>
               </a:rPr>
-              <a:t>e</a:t>
+              <a:t>n</a:t>
             </a:r>
             <a:endParaRPr lang="en-US" sz="900" dirty="0"/>
           </a:p>
@@ -16634,18 +17003,18 @@
       </p:sp>
       <p:sp>
         <p:nvSpPr>
-          <p:cNvPr id="50" name="Shape 48"/>
+          <p:cNvPr id="49" name="Shape 47"/>
           <p:cNvSpPr/>
           <p:nvPr/>
         </p:nvSpPr>
         <p:spPr>
           <a:xfrm>
             <a:off x="6062472" y="4169664"/>
-            <a:ext cx="685800" cy="384048"/>
+            <a:ext cx="685800" cy="475488"/>
           </a:xfrm>
           <a:prstGeom prst="rect">
             <a:avLst>
-              <a:gd name="adj" fmla="val 9524"/>
+              <a:gd name="adj" fmla="val 7692"/>
             </a:avLst>
           </a:prstGeom>
           <a:solidFill>
@@ -16661,14 +17030,14 @@
       </p:sp>
       <p:sp>
         <p:nvSpPr>
-          <p:cNvPr id="51" name="Text 49"/>
+          <p:cNvPr id="50" name="Text 48"/>
           <p:cNvSpPr/>
           <p:nvPr/>
         </p:nvSpPr>
         <p:spPr>
           <a:xfrm>
             <a:off x="6062472" y="4169664"/>
-            <a:ext cx="685800" cy="384048"/>
+            <a:ext cx="685800" cy="475488"/>
           </a:xfrm>
           <a:prstGeom prst="rect">
             <a:avLst/>
@@ -16692,7 +17061,7 @@
                 <a:ea typeface="Trebuchet MS" pitchFamily="34" charset="-122"/>
                 <a:cs typeface="Trebuchet MS" pitchFamily="34" charset="-120"/>
               </a:rPr>
-              <a:t>n</a:t>
+              <a:t>s</a:t>
             </a:r>
             <a:endParaRPr lang="en-US" sz="900" dirty="0"/>
           </a:p>
@@ -16700,18 +17069,18 @@
       </p:sp>
       <p:sp>
         <p:nvSpPr>
-          <p:cNvPr id="52" name="Shape 50"/>
+          <p:cNvPr id="51" name="Shape 49"/>
           <p:cNvSpPr/>
           <p:nvPr/>
         </p:nvSpPr>
         <p:spPr>
           <a:xfrm>
             <a:off x="6870192" y="4169664"/>
-            <a:ext cx="685800" cy="384048"/>
+            <a:ext cx="685800" cy="475488"/>
           </a:xfrm>
           <a:prstGeom prst="rect">
             <a:avLst>
-              <a:gd name="adj" fmla="val 9524"/>
+              <a:gd name="adj" fmla="val 7692"/>
             </a:avLst>
           </a:prstGeom>
           <a:solidFill>
@@ -16727,14 +17096,14 @@
       </p:sp>
       <p:sp>
         <p:nvSpPr>
-          <p:cNvPr id="53" name="Text 51"/>
+          <p:cNvPr id="52" name="Text 50"/>
           <p:cNvSpPr/>
           <p:nvPr/>
         </p:nvSpPr>
         <p:spPr>
           <a:xfrm>
             <a:off x="6870192" y="4169664"/>
-            <a:ext cx="685800" cy="384048"/>
+            <a:ext cx="685800" cy="475488"/>
           </a:xfrm>
           <a:prstGeom prst="rect">
             <a:avLst/>
@@ -16758,7 +17127,7 @@
                 <a:ea typeface="Trebuchet MS" pitchFamily="34" charset="-122"/>
                 <a:cs typeface="Trebuchet MS" pitchFamily="34" charset="-120"/>
               </a:rPr>
-              <a:t>s</a:t>
+              <a:t>i</a:t>
             </a:r>
             <a:endParaRPr lang="en-US" sz="900" dirty="0"/>
           </a:p>
@@ -16766,18 +17135,18 @@
       </p:sp>
       <p:sp>
         <p:nvSpPr>
-          <p:cNvPr id="54" name="Shape 52"/>
+          <p:cNvPr id="53" name="Shape 51"/>
           <p:cNvSpPr/>
           <p:nvPr/>
         </p:nvSpPr>
         <p:spPr>
           <a:xfrm>
             <a:off x="7677912" y="4169664"/>
-            <a:ext cx="685800" cy="384048"/>
+            <a:ext cx="685800" cy="475488"/>
           </a:xfrm>
           <a:prstGeom prst="rect">
             <a:avLst>
-              <a:gd name="adj" fmla="val 9524"/>
+              <a:gd name="adj" fmla="val 7692"/>
             </a:avLst>
           </a:prstGeom>
           <a:solidFill>
@@ -16793,14 +17162,14 @@
       </p:sp>
       <p:sp>
         <p:nvSpPr>
-          <p:cNvPr id="55" name="Text 53"/>
+          <p:cNvPr id="54" name="Text 52"/>
           <p:cNvSpPr/>
           <p:nvPr/>
         </p:nvSpPr>
         <p:spPr>
           <a:xfrm>
             <a:off x="7677912" y="4169664"/>
-            <a:ext cx="685800" cy="384048"/>
+            <a:ext cx="685800" cy="475488"/>
           </a:xfrm>
           <a:prstGeom prst="rect">
             <a:avLst/>
@@ -16824,7 +17193,7 @@
                 <a:ea typeface="Trebuchet MS" pitchFamily="34" charset="-122"/>
                 <a:cs typeface="Trebuchet MS" pitchFamily="34" charset="-120"/>
               </a:rPr>
-              <a:t>ate</a:t>
+              <a:t>ve</a:t>
             </a:r>
             <a:endParaRPr lang="en-US" sz="900" dirty="0"/>
           </a:p>
@@ -18150,7 +18519,7 @@
                 <a:ea typeface="Calibri" pitchFamily="34" charset="-122"/>
                 <a:cs typeface="Calibri" pitchFamily="34" charset="-120"/>
               </a:rPr>
-              <a:t>The manager chose to </a:t>
+              <a:t>She received </a:t>
             </a:r>
             <a:pPr algn="l" indent="0" marL="0">
               <a:buNone/>
@@ -18167,7 +18536,7 @@
                 <a:ea typeface="Calibri" pitchFamily="34" charset="-122"/>
                 <a:cs typeface="Calibri" pitchFamily="34" charset="-120"/>
               </a:rPr>
-              <a:t>suspend</a:t>
+              <a:t>compensation</a:t>
             </a:r>
             <a:pPr algn="l" indent="0" marL="0">
               <a:buNone/>
@@ -18181,7 +18550,7 @@
                 <a:ea typeface="Calibri" pitchFamily="34" charset="-122"/>
                 <a:cs typeface="Calibri" pitchFamily="34" charset="-120"/>
               </a:rPr>
-              <a:t> the costly project; she hoped to </a:t>
+              <a:t> for her loss; the </a:t>
             </a:r>
             <a:pPr algn="l" indent="0" marL="0">
               <a:buNone/>
@@ -18212,7 +18581,7 @@
                 <a:ea typeface="Calibri" pitchFamily="34" charset="-122"/>
                 <a:cs typeface="Calibri" pitchFamily="34" charset="-120"/>
               </a:rPr>
-              <a:t> the workers with extra pay, but the </a:t>
+              <a:t> helped her feel better, and the </a:t>
             </a:r>
             <a:pPr algn="l" indent="0" marL="0">
               <a:buNone/>
@@ -18229,7 +18598,7 @@
                 <a:ea typeface="Calibri" pitchFamily="34" charset="-122"/>
                 <a:cs typeface="Calibri" pitchFamily="34" charset="-120"/>
               </a:rPr>
-              <a:t>expenses</a:t>
+              <a:t>suspense</a:t>
             </a:r>
             <a:pPr algn="l" indent="0" marL="0">
               <a:buNone/>
@@ -18243,7 +18612,7 @@
                 <a:ea typeface="Calibri" pitchFamily="34" charset="-122"/>
                 <a:cs typeface="Calibri" pitchFamily="34" charset="-120"/>
               </a:rPr>
-              <a:t> kept rising.</a:t>
+              <a:t> finally ended.</a:t>
             </a:r>
             <a:endParaRPr lang="en-US" sz="1800" dirty="0"/>
           </a:p>
@@ -18398,7 +18767,7 @@
                 <a:ea typeface="Trebuchet MS" pitchFamily="34" charset="-122"/>
                 <a:cs typeface="Trebuchet MS" pitchFamily="34" charset="-120"/>
               </a:rPr>
-              <a:t>suspend</a:t>
+              <a:t>compensation</a:t>
             </a:r>
             <a:endParaRPr lang="en-US" sz="1400" dirty="0"/>
           </a:p>
@@ -18654,7 +19023,7 @@
                 <a:ea typeface="Trebuchet MS" pitchFamily="34" charset="-122"/>
                 <a:cs typeface="Trebuchet MS" pitchFamily="34" charset="-120"/>
               </a:rPr>
-              <a:t>expenses</a:t>
+              <a:t>suspense</a:t>
             </a:r>
             <a:endParaRPr lang="en-US" sz="1400" dirty="0"/>
           </a:p>
@@ -19124,7 +19493,7 @@
                 <a:ea typeface="Trebuchet MS" pitchFamily="34" charset="-122"/>
                 <a:cs typeface="Trebuchet MS" pitchFamily="34" charset="-120"/>
               </a:rPr>
-              <a:t>suspend</a:t>
+              <a:t>compensation</a:t>
             </a:r>
             <a:endParaRPr lang="en-US" sz="2800" dirty="0"/>
           </a:p>
@@ -19951,7 +20320,7 @@
                 <a:ea typeface="Trebuchet MS" pitchFamily="34" charset="-122"/>
                 <a:cs typeface="Trebuchet MS" pitchFamily="34" charset="-120"/>
               </a:rPr>
-              <a:t>suspend</a:t>
+              <a:t>compensation</a:t>
             </a:r>
             <a:endParaRPr lang="en-US" sz="2800" dirty="0"/>
           </a:p>
@@ -20031,8 +20400,8 @@
         </p:nvSpPr>
         <p:spPr>
           <a:xfrm>
-            <a:off x="2938272" y="2258568"/>
-            <a:ext cx="1828800" cy="292608"/>
+            <a:off x="1989734" y="2258568"/>
+            <a:ext cx="1581912" cy="292608"/>
           </a:xfrm>
           <a:prstGeom prst="rect">
             <a:avLst>
@@ -20065,8 +20434,8 @@
         </p:nvSpPr>
         <p:spPr>
           <a:xfrm>
-            <a:off x="2938272" y="2258568"/>
-            <a:ext cx="1828800" cy="292608"/>
+            <a:off x="1989734" y="2258568"/>
+            <a:ext cx="1581912" cy="292608"/>
           </a:xfrm>
           <a:prstGeom prst="rect">
             <a:avLst/>
@@ -20090,7 +20459,7 @@
                 <a:ea typeface="Trebuchet MS" pitchFamily="34" charset="-122"/>
                 <a:cs typeface="Trebuchet MS" pitchFamily="34" charset="-120"/>
               </a:rPr>
-              <a:t>sus</a:t>
+              <a:t>com</a:t>
             </a:r>
             <a:endParaRPr lang="en-US" sz="1300" dirty="0"/>
           </a:p>
@@ -20104,8 +20473,8 @@
         </p:nvSpPr>
         <p:spPr>
           <a:xfrm>
-            <a:off x="2938272" y="2569464"/>
-            <a:ext cx="1828800" cy="201168"/>
+            <a:off x="1989734" y="2569464"/>
+            <a:ext cx="1581912" cy="201168"/>
           </a:xfrm>
           <a:prstGeom prst="rect">
             <a:avLst/>
@@ -20129,7 +20498,7 @@
                 <a:ea typeface="Calibri" pitchFamily="34" charset="-122"/>
                 <a:cs typeface="Calibri" pitchFamily="34" charset="-120"/>
               </a:rPr>
-              <a:t>under, up from below</a:t>
+              <a:t>together, with</a:t>
             </a:r>
             <a:endParaRPr lang="en-US" sz="850" dirty="0"/>
           </a:p>
@@ -20143,8 +20512,8 @@
         </p:nvSpPr>
         <p:spPr>
           <a:xfrm>
-            <a:off x="5803392" y="2258568"/>
-            <a:ext cx="1828800" cy="292608"/>
+            <a:off x="3659429" y="2258568"/>
+            <a:ext cx="1581912" cy="292608"/>
           </a:xfrm>
           <a:prstGeom prst="rect">
             <a:avLst>
@@ -20152,11 +20521,11 @@
             </a:avLst>
           </a:prstGeom>
           <a:solidFill>
-            <a:srgbClr val="FCE7F3"/>
+            <a:srgbClr val="CCFBF1"/>
           </a:solidFill>
           <a:ln w="19050">
             <a:solidFill>
-              <a:srgbClr val="DB2777"/>
+              <a:srgbClr val="0D9488"/>
             </a:solidFill>
             <a:prstDash val="solid"/>
           </a:ln>
@@ -20177,8 +20546,8 @@
         </p:nvSpPr>
         <p:spPr>
           <a:xfrm>
-            <a:off x="5803392" y="2258568"/>
-            <a:ext cx="1828800" cy="292608"/>
+            <a:off x="3659429" y="2258568"/>
+            <a:ext cx="1581912" cy="292608"/>
           </a:xfrm>
           <a:prstGeom prst="rect">
             <a:avLst/>
@@ -20196,13 +20565,13 @@
             <a:r>
               <a:rPr lang="en-US" sz="1300" b="1" dirty="0">
                 <a:solidFill>
-                  <a:srgbClr val="9D174D"/>
+                  <a:srgbClr val="0F766E"/>
                 </a:solidFill>
                 <a:latin typeface="Trebuchet MS" pitchFamily="34" charset="0"/>
                 <a:ea typeface="Trebuchet MS" pitchFamily="34" charset="-122"/>
                 <a:cs typeface="Trebuchet MS" pitchFamily="34" charset="-120"/>
               </a:rPr>
-              <a:t>pend</a:t>
+              <a:t>pens</a:t>
             </a:r>
             <a:endParaRPr lang="en-US" sz="1300" dirty="0"/>
           </a:p>
@@ -20216,8 +20585,8 @@
         </p:nvSpPr>
         <p:spPr>
           <a:xfrm>
-            <a:off x="5803392" y="2569464"/>
-            <a:ext cx="1828800" cy="201168"/>
+            <a:off x="3659429" y="2569464"/>
+            <a:ext cx="1581912" cy="201168"/>
           </a:xfrm>
           <a:prstGeom prst="rect">
             <a:avLst/>
@@ -20241,7 +20610,7 @@
                 <a:ea typeface="Calibri" pitchFamily="34" charset="-122"/>
                 <a:cs typeface="Calibri" pitchFamily="34" charset="-120"/>
               </a:rPr>
-              <a:t>to hang, weigh</a:t>
+              <a:t>to hang, weigh, pay</a:t>
             </a:r>
             <a:endParaRPr lang="en-US" sz="850" dirty="0"/>
           </a:p>
@@ -20250,6 +20619,308 @@
       <p:sp>
         <p:nvSpPr>
           <p:cNvPr id="22" name="Shape 20"/>
+          <p:cNvSpPr/>
+          <p:nvPr/>
+        </p:nvSpPr>
+        <p:spPr>
+          <a:xfrm>
+            <a:off x="5329123" y="2258568"/>
+            <a:ext cx="1581912" cy="292608"/>
+          </a:xfrm>
+          <a:prstGeom prst="rect">
+            <a:avLst>
+              <a:gd name="adj" fmla="val 25000"/>
+            </a:avLst>
+          </a:prstGeom>
+          <a:solidFill>
+            <a:srgbClr val="FCE7F3"/>
+          </a:solidFill>
+          <a:ln w="19050">
+            <a:solidFill>
+              <a:srgbClr val="DB2777"/>
+            </a:solidFill>
+            <a:prstDash val="solid"/>
+          </a:ln>
+          <a:effectLst>
+            <a:outerShdw sx="100000" sy="100000" kx="0" ky="0" algn="bl" rotWithShape="0" blurRad="101600" dist="38100" dir="8100000">
+              <a:srgbClr val="000000">
+                <a:alpha val="12000"/>
+              </a:srgbClr>
+            </a:outerShdw>
+          </a:effectLst>
+        </p:spPr>
+      </p:sp>
+      <p:sp>
+        <p:nvSpPr>
+          <p:cNvPr id="23" name="Text 21"/>
+          <p:cNvSpPr/>
+          <p:nvPr/>
+        </p:nvSpPr>
+        <p:spPr>
+          <a:xfrm>
+            <a:off x="5329123" y="2258568"/>
+            <a:ext cx="1581912" cy="292608"/>
+          </a:xfrm>
+          <a:prstGeom prst="rect">
+            <a:avLst/>
+          </a:prstGeom>
+          <a:noFill/>
+          <a:ln/>
+        </p:spPr>
+        <p:txBody>
+          <a:bodyPr wrap="square" lIns="0" tIns="0" rIns="0" bIns="0" rtlCol="0" anchor="ctr"/>
+          <a:lstStyle/>
+          <a:p>
+            <a:pPr algn="ctr" indent="0" marL="0">
+              <a:buNone/>
+            </a:pPr>
+            <a:r>
+              <a:rPr lang="en-US" sz="1300" b="1" dirty="0">
+                <a:solidFill>
+                  <a:srgbClr val="9D174D"/>
+                </a:solidFill>
+                <a:latin typeface="Trebuchet MS" pitchFamily="34" charset="0"/>
+                <a:ea typeface="Trebuchet MS" pitchFamily="34" charset="-122"/>
+                <a:cs typeface="Trebuchet MS" pitchFamily="34" charset="-120"/>
+              </a:rPr>
+              <a:t>a</a:t>
+            </a:r>
+            <a:endParaRPr lang="en-US" sz="1300" dirty="0"/>
+          </a:p>
+        </p:txBody>
+      </p:sp>
+      <p:sp>
+        <p:nvSpPr>
+          <p:cNvPr id="24" name="Text 22"/>
+          <p:cNvSpPr/>
+          <p:nvPr/>
+        </p:nvSpPr>
+        <p:spPr>
+          <a:xfrm>
+            <a:off x="5329123" y="2569464"/>
+            <a:ext cx="1581912" cy="201168"/>
+          </a:xfrm>
+          <a:prstGeom prst="rect">
+            <a:avLst/>
+          </a:prstGeom>
+          <a:noFill/>
+          <a:ln/>
+        </p:spPr>
+        <p:txBody>
+          <a:bodyPr wrap="square" lIns="0" tIns="0" rIns="0" bIns="0" rtlCol="0" anchor="t"/>
+          <a:lstStyle/>
+          <a:p>
+            <a:pPr algn="ctr" indent="0" marL="0">
+              <a:buNone/>
+            </a:pPr>
+            <a:r>
+              <a:rPr lang="en-US" sz="850" dirty="0">
+                <a:solidFill>
+                  <a:srgbClr val="475569"/>
+                </a:solidFill>
+                <a:latin typeface="Calibri" pitchFamily="34" charset="0"/>
+                <a:ea typeface="Calibri" pitchFamily="34" charset="-122"/>
+                <a:cs typeface="Calibri" pitchFamily="34" charset="-120"/>
+              </a:rPr>
+              <a:t>connecting vowel</a:t>
+            </a:r>
+            <a:endParaRPr lang="en-US" sz="850" dirty="0"/>
+          </a:p>
+        </p:txBody>
+      </p:sp>
+      <p:sp>
+        <p:nvSpPr>
+          <p:cNvPr id="25" name="Text 23"/>
+          <p:cNvSpPr/>
+          <p:nvPr/>
+        </p:nvSpPr>
+        <p:spPr>
+          <a:xfrm>
+            <a:off x="5329123" y="2752344"/>
+            <a:ext cx="1581912" cy="182880"/>
+          </a:xfrm>
+          <a:prstGeom prst="rect">
+            <a:avLst/>
+          </a:prstGeom>
+          <a:noFill/>
+          <a:ln/>
+        </p:spPr>
+        <p:txBody>
+          <a:bodyPr wrap="square" lIns="0" tIns="0" rIns="0" bIns="0" rtlCol="0" anchor="t"/>
+          <a:lstStyle/>
+          <a:p>
+            <a:pPr algn="ctr" indent="0" marL="0">
+              <a:buNone/>
+            </a:pPr>
+            <a:r>
+              <a:rPr lang="en-US" sz="700" i="1" dirty="0">
+                <a:solidFill>
+                  <a:srgbClr val="94A3B8"/>
+                </a:solidFill>
+                <a:latin typeface="Calibri" pitchFamily="34" charset="0"/>
+                <a:ea typeface="Calibri" pitchFamily="34" charset="-122"/>
+                <a:cs typeface="Calibri" pitchFamily="34" charset="-120"/>
+              </a:rPr>
+              <a:t>links base to suffix</a:t>
+            </a:r>
+            <a:endParaRPr lang="en-US" sz="700" dirty="0"/>
+          </a:p>
+        </p:txBody>
+      </p:sp>
+      <p:sp>
+        <p:nvSpPr>
+          <p:cNvPr id="26" name="Shape 24"/>
+          <p:cNvSpPr/>
+          <p:nvPr/>
+        </p:nvSpPr>
+        <p:spPr>
+          <a:xfrm>
+            <a:off x="6998818" y="2258568"/>
+            <a:ext cx="1581912" cy="292608"/>
+          </a:xfrm>
+          <a:prstGeom prst="rect">
+            <a:avLst>
+              <a:gd name="adj" fmla="val 25000"/>
+            </a:avLst>
+          </a:prstGeom>
+          <a:solidFill>
+            <a:srgbClr val="FCE7F3"/>
+          </a:solidFill>
+          <a:ln w="19050">
+            <a:solidFill>
+              <a:srgbClr val="DB2777"/>
+            </a:solidFill>
+            <a:prstDash val="solid"/>
+          </a:ln>
+          <a:effectLst>
+            <a:outerShdw sx="100000" sy="100000" kx="0" ky="0" algn="bl" rotWithShape="0" blurRad="101600" dist="38100" dir="8100000">
+              <a:srgbClr val="000000">
+                <a:alpha val="12000"/>
+              </a:srgbClr>
+            </a:outerShdw>
+          </a:effectLst>
+        </p:spPr>
+      </p:sp>
+      <p:sp>
+        <p:nvSpPr>
+          <p:cNvPr id="27" name="Text 25"/>
+          <p:cNvSpPr/>
+          <p:nvPr/>
+        </p:nvSpPr>
+        <p:spPr>
+          <a:xfrm>
+            <a:off x="6998818" y="2258568"/>
+            <a:ext cx="1581912" cy="292608"/>
+          </a:xfrm>
+          <a:prstGeom prst="rect">
+            <a:avLst/>
+          </a:prstGeom>
+          <a:noFill/>
+          <a:ln/>
+        </p:spPr>
+        <p:txBody>
+          <a:bodyPr wrap="square" lIns="0" tIns="0" rIns="0" bIns="0" rtlCol="0" anchor="ctr"/>
+          <a:lstStyle/>
+          <a:p>
+            <a:pPr algn="ctr" indent="0" marL="0">
+              <a:buNone/>
+            </a:pPr>
+            <a:r>
+              <a:rPr lang="en-US" sz="1300" b="1" dirty="0">
+                <a:solidFill>
+                  <a:srgbClr val="9D174D"/>
+                </a:solidFill>
+                <a:latin typeface="Trebuchet MS" pitchFamily="34" charset="0"/>
+                <a:ea typeface="Trebuchet MS" pitchFamily="34" charset="-122"/>
+                <a:cs typeface="Trebuchet MS" pitchFamily="34" charset="-120"/>
+              </a:rPr>
+              <a:t>tion</a:t>
+            </a:r>
+            <a:endParaRPr lang="en-US" sz="1300" dirty="0"/>
+          </a:p>
+        </p:txBody>
+      </p:sp>
+      <p:sp>
+        <p:nvSpPr>
+          <p:cNvPr id="28" name="Text 26"/>
+          <p:cNvSpPr/>
+          <p:nvPr/>
+        </p:nvSpPr>
+        <p:spPr>
+          <a:xfrm>
+            <a:off x="6998818" y="2569464"/>
+            <a:ext cx="1581912" cy="201168"/>
+          </a:xfrm>
+          <a:prstGeom prst="rect">
+            <a:avLst/>
+          </a:prstGeom>
+          <a:noFill/>
+          <a:ln/>
+        </p:spPr>
+        <p:txBody>
+          <a:bodyPr wrap="square" lIns="0" tIns="0" rIns="0" bIns="0" rtlCol="0" anchor="t"/>
+          <a:lstStyle/>
+          <a:p>
+            <a:pPr algn="ctr" indent="0" marL="0">
+              <a:buNone/>
+            </a:pPr>
+            <a:r>
+              <a:rPr lang="en-US" sz="850" dirty="0">
+                <a:solidFill>
+                  <a:srgbClr val="475569"/>
+                </a:solidFill>
+                <a:latin typeface="Calibri" pitchFamily="34" charset="0"/>
+                <a:ea typeface="Calibri" pitchFamily="34" charset="-122"/>
+                <a:cs typeface="Calibri" pitchFamily="34" charset="-120"/>
+              </a:rPr>
+              <a:t>act or result of</a:t>
+            </a:r>
+            <a:endParaRPr lang="en-US" sz="850" dirty="0"/>
+          </a:p>
+        </p:txBody>
+      </p:sp>
+      <p:sp>
+        <p:nvSpPr>
+          <p:cNvPr id="29" name="Text 27"/>
+          <p:cNvSpPr/>
+          <p:nvPr/>
+        </p:nvSpPr>
+        <p:spPr>
+          <a:xfrm>
+            <a:off x="6998818" y="2752344"/>
+            <a:ext cx="1581912" cy="182880"/>
+          </a:xfrm>
+          <a:prstGeom prst="rect">
+            <a:avLst/>
+          </a:prstGeom>
+          <a:noFill/>
+          <a:ln/>
+        </p:spPr>
+        <p:txBody>
+          <a:bodyPr wrap="square" lIns="0" tIns="0" rIns="0" bIns="0" rtlCol="0" anchor="t"/>
+          <a:lstStyle/>
+          <a:p>
+            <a:pPr algn="ctr" indent="0" marL="0">
+              <a:buNone/>
+            </a:pPr>
+            <a:r>
+              <a:rPr lang="en-US" sz="700" i="1" dirty="0">
+                <a:solidFill>
+                  <a:srgbClr val="94A3B8"/>
+                </a:solidFill>
+                <a:latin typeface="Calibri" pitchFamily="34" charset="0"/>
+                <a:ea typeface="Calibri" pitchFamily="34" charset="-122"/>
+                <a:cs typeface="Calibri" pitchFamily="34" charset="-120"/>
+              </a:rPr>
+              <a:t>ti → /sh/ before on</a:t>
+            </a:r>
+            <a:endParaRPr lang="en-US" sz="700" dirty="0"/>
+          </a:p>
+        </p:txBody>
+      </p:sp>
+      <p:sp>
+        <p:nvSpPr>
+          <p:cNvPr id="30" name="Shape 28"/>
           <p:cNvSpPr/>
           <p:nvPr/>
         </p:nvSpPr>
@@ -20276,7 +20947,7 @@
       </p:sp>
       <p:sp>
         <p:nvSpPr>
-          <p:cNvPr id="23" name="Text 21"/>
+          <p:cNvPr id="31" name="Text 29"/>
           <p:cNvSpPr/>
           <p:nvPr/>
         </p:nvSpPr>
@@ -20315,7 +20986,7 @@
       </p:sp>
       <p:sp>
         <p:nvSpPr>
-          <p:cNvPr id="24" name="Shape 22"/>
+          <p:cNvPr id="32" name="Shape 30"/>
           <p:cNvSpPr/>
           <p:nvPr/>
         </p:nvSpPr>
@@ -20342,7 +21013,7 @@
       </p:sp>
       <p:sp>
         <p:nvSpPr>
-          <p:cNvPr id="25" name="Text 23"/>
+          <p:cNvPr id="33" name="Text 31"/>
           <p:cNvSpPr/>
           <p:nvPr/>
         </p:nvSpPr>
@@ -20381,7 +21052,7 @@
       </p:sp>
       <p:sp>
         <p:nvSpPr>
-          <p:cNvPr id="26" name="Shape 24"/>
+          <p:cNvPr id="34" name="Shape 32"/>
           <p:cNvSpPr/>
           <p:nvPr/>
         </p:nvSpPr>
@@ -20408,7 +21079,7 @@
       </p:sp>
       <p:sp>
         <p:nvSpPr>
-          <p:cNvPr id="27" name="Text 25"/>
+          <p:cNvPr id="35" name="Text 33"/>
           <p:cNvSpPr/>
           <p:nvPr/>
         </p:nvSpPr>
@@ -20447,7 +21118,7 @@
       </p:sp>
       <p:sp>
         <p:nvSpPr>
-          <p:cNvPr id="28" name="Shape 26"/>
+          <p:cNvPr id="36" name="Shape 34"/>
           <p:cNvSpPr/>
           <p:nvPr/>
         </p:nvSpPr>
@@ -20474,7 +21145,7 @@
       </p:sp>
       <p:sp>
         <p:nvSpPr>
-          <p:cNvPr id="29" name="Text 27"/>
+          <p:cNvPr id="37" name="Text 35"/>
           <p:cNvSpPr/>
           <p:nvPr/>
         </p:nvSpPr>
@@ -20936,7 +21607,7 @@
                 <a:ea typeface="Trebuchet MS" pitchFamily="34" charset="-122"/>
                 <a:cs typeface="Trebuchet MS" pitchFamily="34" charset="-120"/>
               </a:rPr>
-              <a:t>suspend</a:t>
+              <a:t>compensation</a:t>
             </a:r>
             <a:endParaRPr lang="en-US" sz="2800" dirty="0"/>
           </a:p>
@@ -21016,8 +21687,8 @@
         </p:nvSpPr>
         <p:spPr>
           <a:xfrm>
-            <a:off x="2938272" y="2258568"/>
-            <a:ext cx="1828800" cy="292608"/>
+            <a:off x="1989734" y="2258568"/>
+            <a:ext cx="1581912" cy="292608"/>
           </a:xfrm>
           <a:prstGeom prst="rect">
             <a:avLst>
@@ -21050,8 +21721,8 @@
         </p:nvSpPr>
         <p:spPr>
           <a:xfrm>
-            <a:off x="2938272" y="2258568"/>
-            <a:ext cx="1828800" cy="292608"/>
+            <a:off x="1989734" y="2258568"/>
+            <a:ext cx="1581912" cy="292608"/>
           </a:xfrm>
           <a:prstGeom prst="rect">
             <a:avLst/>
@@ -21075,7 +21746,7 @@
                 <a:ea typeface="Trebuchet MS" pitchFamily="34" charset="-122"/>
                 <a:cs typeface="Trebuchet MS" pitchFamily="34" charset="-120"/>
               </a:rPr>
-              <a:t>sus</a:t>
+              <a:t>com</a:t>
             </a:r>
             <a:endParaRPr lang="en-US" sz="1300" dirty="0"/>
           </a:p>
@@ -21089,8 +21760,8 @@
         </p:nvSpPr>
         <p:spPr>
           <a:xfrm>
-            <a:off x="2938272" y="2569464"/>
-            <a:ext cx="1828800" cy="201168"/>
+            <a:off x="1989734" y="2569464"/>
+            <a:ext cx="1581912" cy="201168"/>
           </a:xfrm>
           <a:prstGeom prst="rect">
             <a:avLst/>
@@ -21114,7 +21785,7 @@
                 <a:ea typeface="Calibri" pitchFamily="34" charset="-122"/>
                 <a:cs typeface="Calibri" pitchFamily="34" charset="-120"/>
               </a:rPr>
-              <a:t>under, up from below</a:t>
+              <a:t>together, with</a:t>
             </a:r>
             <a:endParaRPr lang="en-US" sz="850" dirty="0"/>
           </a:p>
@@ -21128,8 +21799,8 @@
         </p:nvSpPr>
         <p:spPr>
           <a:xfrm>
-            <a:off x="5803392" y="2258568"/>
-            <a:ext cx="1828800" cy="292608"/>
+            <a:off x="3659429" y="2258568"/>
+            <a:ext cx="1581912" cy="292608"/>
           </a:xfrm>
           <a:prstGeom prst="rect">
             <a:avLst>
@@ -21137,11 +21808,11 @@
             </a:avLst>
           </a:prstGeom>
           <a:solidFill>
-            <a:srgbClr val="FCE7F3"/>
+            <a:srgbClr val="CCFBF1"/>
           </a:solidFill>
           <a:ln w="19050">
             <a:solidFill>
-              <a:srgbClr val="DB2777"/>
+              <a:srgbClr val="0D9488"/>
             </a:solidFill>
             <a:prstDash val="solid"/>
           </a:ln>
@@ -21162,8 +21833,8 @@
         </p:nvSpPr>
         <p:spPr>
           <a:xfrm>
-            <a:off x="5803392" y="2258568"/>
-            <a:ext cx="1828800" cy="292608"/>
+            <a:off x="3659429" y="2258568"/>
+            <a:ext cx="1581912" cy="292608"/>
           </a:xfrm>
           <a:prstGeom prst="rect">
             <a:avLst/>
@@ -21181,13 +21852,13 @@
             <a:r>
               <a:rPr lang="en-US" sz="1300" b="1" dirty="0">
                 <a:solidFill>
-                  <a:srgbClr val="9D174D"/>
+                  <a:srgbClr val="0F766E"/>
                 </a:solidFill>
                 <a:latin typeface="Trebuchet MS" pitchFamily="34" charset="0"/>
                 <a:ea typeface="Trebuchet MS" pitchFamily="34" charset="-122"/>
                 <a:cs typeface="Trebuchet MS" pitchFamily="34" charset="-120"/>
               </a:rPr>
-              <a:t>pend</a:t>
+              <a:t>pens</a:t>
             </a:r>
             <a:endParaRPr lang="en-US" sz="1300" dirty="0"/>
           </a:p>
@@ -21201,8 +21872,8 @@
         </p:nvSpPr>
         <p:spPr>
           <a:xfrm>
-            <a:off x="5803392" y="2569464"/>
-            <a:ext cx="1828800" cy="201168"/>
+            <a:off x="3659429" y="2569464"/>
+            <a:ext cx="1581912" cy="201168"/>
           </a:xfrm>
           <a:prstGeom prst="rect">
             <a:avLst/>
@@ -21226,7 +21897,7 @@
                 <a:ea typeface="Calibri" pitchFamily="34" charset="-122"/>
                 <a:cs typeface="Calibri" pitchFamily="34" charset="-120"/>
               </a:rPr>
-              <a:t>to hang, weigh</a:t>
+              <a:t>to hang, weigh, pay</a:t>
             </a:r>
             <a:endParaRPr lang="en-US" sz="850" dirty="0"/>
           </a:p>
@@ -21235,6 +21906,308 @@
       <p:sp>
         <p:nvSpPr>
           <p:cNvPr id="22" name="Shape 20"/>
+          <p:cNvSpPr/>
+          <p:nvPr/>
+        </p:nvSpPr>
+        <p:spPr>
+          <a:xfrm>
+            <a:off x="5329123" y="2258568"/>
+            <a:ext cx="1581912" cy="292608"/>
+          </a:xfrm>
+          <a:prstGeom prst="rect">
+            <a:avLst>
+              <a:gd name="adj" fmla="val 25000"/>
+            </a:avLst>
+          </a:prstGeom>
+          <a:solidFill>
+            <a:srgbClr val="FCE7F3"/>
+          </a:solidFill>
+          <a:ln w="19050">
+            <a:solidFill>
+              <a:srgbClr val="DB2777"/>
+            </a:solidFill>
+            <a:prstDash val="solid"/>
+          </a:ln>
+          <a:effectLst>
+            <a:outerShdw sx="100000" sy="100000" kx="0" ky="0" algn="bl" rotWithShape="0" blurRad="101600" dist="38100" dir="8100000">
+              <a:srgbClr val="000000">
+                <a:alpha val="12000"/>
+              </a:srgbClr>
+            </a:outerShdw>
+          </a:effectLst>
+        </p:spPr>
+      </p:sp>
+      <p:sp>
+        <p:nvSpPr>
+          <p:cNvPr id="23" name="Text 21"/>
+          <p:cNvSpPr/>
+          <p:nvPr/>
+        </p:nvSpPr>
+        <p:spPr>
+          <a:xfrm>
+            <a:off x="5329123" y="2258568"/>
+            <a:ext cx="1581912" cy="292608"/>
+          </a:xfrm>
+          <a:prstGeom prst="rect">
+            <a:avLst/>
+          </a:prstGeom>
+          <a:noFill/>
+          <a:ln/>
+        </p:spPr>
+        <p:txBody>
+          <a:bodyPr wrap="square" lIns="0" tIns="0" rIns="0" bIns="0" rtlCol="0" anchor="ctr"/>
+          <a:lstStyle/>
+          <a:p>
+            <a:pPr algn="ctr" indent="0" marL="0">
+              <a:buNone/>
+            </a:pPr>
+            <a:r>
+              <a:rPr lang="en-US" sz="1300" b="1" dirty="0">
+                <a:solidFill>
+                  <a:srgbClr val="9D174D"/>
+                </a:solidFill>
+                <a:latin typeface="Trebuchet MS" pitchFamily="34" charset="0"/>
+                <a:ea typeface="Trebuchet MS" pitchFamily="34" charset="-122"/>
+                <a:cs typeface="Trebuchet MS" pitchFamily="34" charset="-120"/>
+              </a:rPr>
+              <a:t>a</a:t>
+            </a:r>
+            <a:endParaRPr lang="en-US" sz="1300" dirty="0"/>
+          </a:p>
+        </p:txBody>
+      </p:sp>
+      <p:sp>
+        <p:nvSpPr>
+          <p:cNvPr id="24" name="Text 22"/>
+          <p:cNvSpPr/>
+          <p:nvPr/>
+        </p:nvSpPr>
+        <p:spPr>
+          <a:xfrm>
+            <a:off x="5329123" y="2569464"/>
+            <a:ext cx="1581912" cy="201168"/>
+          </a:xfrm>
+          <a:prstGeom prst="rect">
+            <a:avLst/>
+          </a:prstGeom>
+          <a:noFill/>
+          <a:ln/>
+        </p:spPr>
+        <p:txBody>
+          <a:bodyPr wrap="square" lIns="0" tIns="0" rIns="0" bIns="0" rtlCol="0" anchor="t"/>
+          <a:lstStyle/>
+          <a:p>
+            <a:pPr algn="ctr" indent="0" marL="0">
+              <a:buNone/>
+            </a:pPr>
+            <a:r>
+              <a:rPr lang="en-US" sz="850" dirty="0">
+                <a:solidFill>
+                  <a:srgbClr val="475569"/>
+                </a:solidFill>
+                <a:latin typeface="Calibri" pitchFamily="34" charset="0"/>
+                <a:ea typeface="Calibri" pitchFamily="34" charset="-122"/>
+                <a:cs typeface="Calibri" pitchFamily="34" charset="-120"/>
+              </a:rPr>
+              <a:t>connecting vowel</a:t>
+            </a:r>
+            <a:endParaRPr lang="en-US" sz="850" dirty="0"/>
+          </a:p>
+        </p:txBody>
+      </p:sp>
+      <p:sp>
+        <p:nvSpPr>
+          <p:cNvPr id="25" name="Text 23"/>
+          <p:cNvSpPr/>
+          <p:nvPr/>
+        </p:nvSpPr>
+        <p:spPr>
+          <a:xfrm>
+            <a:off x="5329123" y="2752344"/>
+            <a:ext cx="1581912" cy="182880"/>
+          </a:xfrm>
+          <a:prstGeom prst="rect">
+            <a:avLst/>
+          </a:prstGeom>
+          <a:noFill/>
+          <a:ln/>
+        </p:spPr>
+        <p:txBody>
+          <a:bodyPr wrap="square" lIns="0" tIns="0" rIns="0" bIns="0" rtlCol="0" anchor="t"/>
+          <a:lstStyle/>
+          <a:p>
+            <a:pPr algn="ctr" indent="0" marL="0">
+              <a:buNone/>
+            </a:pPr>
+            <a:r>
+              <a:rPr lang="en-US" sz="700" i="1" dirty="0">
+                <a:solidFill>
+                  <a:srgbClr val="94A3B8"/>
+                </a:solidFill>
+                <a:latin typeface="Calibri" pitchFamily="34" charset="0"/>
+                <a:ea typeface="Calibri" pitchFamily="34" charset="-122"/>
+                <a:cs typeface="Calibri" pitchFamily="34" charset="-120"/>
+              </a:rPr>
+              <a:t>links base to suffix</a:t>
+            </a:r>
+            <a:endParaRPr lang="en-US" sz="700" dirty="0"/>
+          </a:p>
+        </p:txBody>
+      </p:sp>
+      <p:sp>
+        <p:nvSpPr>
+          <p:cNvPr id="26" name="Shape 24"/>
+          <p:cNvSpPr/>
+          <p:nvPr/>
+        </p:nvSpPr>
+        <p:spPr>
+          <a:xfrm>
+            <a:off x="6998818" y="2258568"/>
+            <a:ext cx="1581912" cy="292608"/>
+          </a:xfrm>
+          <a:prstGeom prst="rect">
+            <a:avLst>
+              <a:gd name="adj" fmla="val 25000"/>
+            </a:avLst>
+          </a:prstGeom>
+          <a:solidFill>
+            <a:srgbClr val="FCE7F3"/>
+          </a:solidFill>
+          <a:ln w="19050">
+            <a:solidFill>
+              <a:srgbClr val="DB2777"/>
+            </a:solidFill>
+            <a:prstDash val="solid"/>
+          </a:ln>
+          <a:effectLst>
+            <a:outerShdw sx="100000" sy="100000" kx="0" ky="0" algn="bl" rotWithShape="0" blurRad="101600" dist="38100" dir="8100000">
+              <a:srgbClr val="000000">
+                <a:alpha val="12000"/>
+              </a:srgbClr>
+            </a:outerShdw>
+          </a:effectLst>
+        </p:spPr>
+      </p:sp>
+      <p:sp>
+        <p:nvSpPr>
+          <p:cNvPr id="27" name="Text 25"/>
+          <p:cNvSpPr/>
+          <p:nvPr/>
+        </p:nvSpPr>
+        <p:spPr>
+          <a:xfrm>
+            <a:off x="6998818" y="2258568"/>
+            <a:ext cx="1581912" cy="292608"/>
+          </a:xfrm>
+          <a:prstGeom prst="rect">
+            <a:avLst/>
+          </a:prstGeom>
+          <a:noFill/>
+          <a:ln/>
+        </p:spPr>
+        <p:txBody>
+          <a:bodyPr wrap="square" lIns="0" tIns="0" rIns="0" bIns="0" rtlCol="0" anchor="ctr"/>
+          <a:lstStyle/>
+          <a:p>
+            <a:pPr algn="ctr" indent="0" marL="0">
+              <a:buNone/>
+            </a:pPr>
+            <a:r>
+              <a:rPr lang="en-US" sz="1300" b="1" dirty="0">
+                <a:solidFill>
+                  <a:srgbClr val="9D174D"/>
+                </a:solidFill>
+                <a:latin typeface="Trebuchet MS" pitchFamily="34" charset="0"/>
+                <a:ea typeface="Trebuchet MS" pitchFamily="34" charset="-122"/>
+                <a:cs typeface="Trebuchet MS" pitchFamily="34" charset="-120"/>
+              </a:rPr>
+              <a:t>tion</a:t>
+            </a:r>
+            <a:endParaRPr lang="en-US" sz="1300" dirty="0"/>
+          </a:p>
+        </p:txBody>
+      </p:sp>
+      <p:sp>
+        <p:nvSpPr>
+          <p:cNvPr id="28" name="Text 26"/>
+          <p:cNvSpPr/>
+          <p:nvPr/>
+        </p:nvSpPr>
+        <p:spPr>
+          <a:xfrm>
+            <a:off x="6998818" y="2569464"/>
+            <a:ext cx="1581912" cy="201168"/>
+          </a:xfrm>
+          <a:prstGeom prst="rect">
+            <a:avLst/>
+          </a:prstGeom>
+          <a:noFill/>
+          <a:ln/>
+        </p:spPr>
+        <p:txBody>
+          <a:bodyPr wrap="square" lIns="0" tIns="0" rIns="0" bIns="0" rtlCol="0" anchor="t"/>
+          <a:lstStyle/>
+          <a:p>
+            <a:pPr algn="ctr" indent="0" marL="0">
+              <a:buNone/>
+            </a:pPr>
+            <a:r>
+              <a:rPr lang="en-US" sz="850" dirty="0">
+                <a:solidFill>
+                  <a:srgbClr val="475569"/>
+                </a:solidFill>
+                <a:latin typeface="Calibri" pitchFamily="34" charset="0"/>
+                <a:ea typeface="Calibri" pitchFamily="34" charset="-122"/>
+                <a:cs typeface="Calibri" pitchFamily="34" charset="-120"/>
+              </a:rPr>
+              <a:t>act or result of</a:t>
+            </a:r>
+            <a:endParaRPr lang="en-US" sz="850" dirty="0"/>
+          </a:p>
+        </p:txBody>
+      </p:sp>
+      <p:sp>
+        <p:nvSpPr>
+          <p:cNvPr id="29" name="Text 27"/>
+          <p:cNvSpPr/>
+          <p:nvPr/>
+        </p:nvSpPr>
+        <p:spPr>
+          <a:xfrm>
+            <a:off x="6998818" y="2752344"/>
+            <a:ext cx="1581912" cy="182880"/>
+          </a:xfrm>
+          <a:prstGeom prst="rect">
+            <a:avLst/>
+          </a:prstGeom>
+          <a:noFill/>
+          <a:ln/>
+        </p:spPr>
+        <p:txBody>
+          <a:bodyPr wrap="square" lIns="0" tIns="0" rIns="0" bIns="0" rtlCol="0" anchor="t"/>
+          <a:lstStyle/>
+          <a:p>
+            <a:pPr algn="ctr" indent="0" marL="0">
+              <a:buNone/>
+            </a:pPr>
+            <a:r>
+              <a:rPr lang="en-US" sz="700" i="1" dirty="0">
+                <a:solidFill>
+                  <a:srgbClr val="94A3B8"/>
+                </a:solidFill>
+                <a:latin typeface="Calibri" pitchFamily="34" charset="0"/>
+                <a:ea typeface="Calibri" pitchFamily="34" charset="-122"/>
+                <a:cs typeface="Calibri" pitchFamily="34" charset="-120"/>
+              </a:rPr>
+              <a:t>ti → /sh/ before on</a:t>
+            </a:r>
+            <a:endParaRPr lang="en-US" sz="700" dirty="0"/>
+          </a:p>
+        </p:txBody>
+      </p:sp>
+      <p:sp>
+        <p:nvSpPr>
+          <p:cNvPr id="30" name="Shape 28"/>
           <p:cNvSpPr/>
           <p:nvPr/>
         </p:nvSpPr>
@@ -21261,7 +22234,7 @@
       </p:sp>
       <p:sp>
         <p:nvSpPr>
-          <p:cNvPr id="23" name="Text 21"/>
+          <p:cNvPr id="31" name="Text 29"/>
           <p:cNvSpPr/>
           <p:nvPr/>
         </p:nvSpPr>
@@ -21300,7 +22273,7 @@
       </p:sp>
       <p:sp>
         <p:nvSpPr>
-          <p:cNvPr id="24" name="Shape 22"/>
+          <p:cNvPr id="32" name="Shape 30"/>
           <p:cNvSpPr/>
           <p:nvPr/>
         </p:nvSpPr>
@@ -21327,14 +22300,14 @@
       </p:sp>
       <p:sp>
         <p:nvSpPr>
-          <p:cNvPr id="25" name="Shape 23"/>
-          <p:cNvSpPr/>
-          <p:nvPr/>
-        </p:nvSpPr>
-        <p:spPr>
-          <a:xfrm>
-            <a:off x="2999232" y="3364992"/>
-            <a:ext cx="1645920" cy="475488"/>
+          <p:cNvPr id="33" name="Shape 31"/>
+          <p:cNvSpPr/>
+          <p:nvPr/>
+        </p:nvSpPr>
+        <p:spPr>
+          <a:xfrm>
+            <a:off x="1975104" y="3364992"/>
+            <a:ext cx="1554480" cy="475488"/>
           </a:xfrm>
           <a:prstGeom prst="rect">
             <a:avLst>
@@ -21354,14 +22327,14 @@
       </p:sp>
       <p:sp>
         <p:nvSpPr>
-          <p:cNvPr id="26" name="Text 24"/>
-          <p:cNvSpPr/>
-          <p:nvPr/>
-        </p:nvSpPr>
-        <p:spPr>
-          <a:xfrm>
-            <a:off x="2999232" y="3364992"/>
-            <a:ext cx="1645920" cy="475488"/>
+          <p:cNvPr id="34" name="Text 32"/>
+          <p:cNvSpPr/>
+          <p:nvPr/>
+        </p:nvSpPr>
+        <p:spPr>
+          <a:xfrm>
+            <a:off x="1975104" y="3364992"/>
+            <a:ext cx="1554480" cy="475488"/>
           </a:xfrm>
           <a:prstGeom prst="rect">
             <a:avLst/>
@@ -21385,7 +22358,7 @@
                 <a:ea typeface="Trebuchet MS" pitchFamily="34" charset="-122"/>
                 <a:cs typeface="Trebuchet MS" pitchFamily="34" charset="-120"/>
               </a:rPr>
-              <a:t>sus</a:t>
+              <a:t>com</a:t>
             </a:r>
             <a:endParaRPr lang="en-US" sz="1400" dirty="0"/>
           </a:p>
@@ -21393,14 +22366,14 @@
       </p:sp>
       <p:sp>
         <p:nvSpPr>
-          <p:cNvPr id="27" name="Text 25"/>
-          <p:cNvSpPr/>
-          <p:nvPr/>
-        </p:nvSpPr>
-        <p:spPr>
-          <a:xfrm>
-            <a:off x="4645152" y="3364992"/>
-            <a:ext cx="1097280" cy="475488"/>
+          <p:cNvPr id="35" name="Text 33"/>
+          <p:cNvSpPr/>
+          <p:nvPr/>
+        </p:nvSpPr>
+        <p:spPr>
+          <a:xfrm>
+            <a:off x="3529584" y="3364992"/>
+            <a:ext cx="73152" cy="475488"/>
           </a:xfrm>
           <a:prstGeom prst="rect">
             <a:avLst/>
@@ -21432,14 +22405,14 @@
       </p:sp>
       <p:sp>
         <p:nvSpPr>
-          <p:cNvPr id="28" name="Shape 26"/>
-          <p:cNvSpPr/>
-          <p:nvPr/>
-        </p:nvSpPr>
-        <p:spPr>
-          <a:xfrm>
-            <a:off x="5742432" y="3364992"/>
-            <a:ext cx="1645920" cy="475488"/>
+          <p:cNvPr id="36" name="Shape 34"/>
+          <p:cNvSpPr/>
+          <p:nvPr/>
+        </p:nvSpPr>
+        <p:spPr>
+          <a:xfrm>
+            <a:off x="3602736" y="3364992"/>
+            <a:ext cx="1554480" cy="475488"/>
           </a:xfrm>
           <a:prstGeom prst="rect">
             <a:avLst>
@@ -21459,14 +22432,14 @@
       </p:sp>
       <p:sp>
         <p:nvSpPr>
-          <p:cNvPr id="29" name="Text 27"/>
-          <p:cNvSpPr/>
-          <p:nvPr/>
-        </p:nvSpPr>
-        <p:spPr>
-          <a:xfrm>
-            <a:off x="5742432" y="3364992"/>
-            <a:ext cx="1645920" cy="475488"/>
+          <p:cNvPr id="37" name="Text 35"/>
+          <p:cNvSpPr/>
+          <p:nvPr/>
+        </p:nvSpPr>
+        <p:spPr>
+          <a:xfrm>
+            <a:off x="3602736" y="3364992"/>
+            <a:ext cx="1554480" cy="475488"/>
           </a:xfrm>
           <a:prstGeom prst="rect">
             <a:avLst/>
@@ -21490,7 +22463,7 @@
                 <a:ea typeface="Trebuchet MS" pitchFamily="34" charset="-122"/>
                 <a:cs typeface="Trebuchet MS" pitchFamily="34" charset="-120"/>
               </a:rPr>
-              <a:t>pend</a:t>
+              <a:t>pen</a:t>
             </a:r>
             <a:endParaRPr lang="en-US" sz="1400" dirty="0"/>
           </a:p>
@@ -21498,7 +22471,217 @@
       </p:sp>
       <p:sp>
         <p:nvSpPr>
-          <p:cNvPr id="30" name="Shape 28"/>
+          <p:cNvPr id="38" name="Text 36"/>
+          <p:cNvSpPr/>
+          <p:nvPr/>
+        </p:nvSpPr>
+        <p:spPr>
+          <a:xfrm>
+            <a:off x="5157216" y="3364992"/>
+            <a:ext cx="73152" cy="475488"/>
+          </a:xfrm>
+          <a:prstGeom prst="rect">
+            <a:avLst/>
+          </a:prstGeom>
+          <a:noFill/>
+          <a:ln/>
+        </p:spPr>
+        <p:txBody>
+          <a:bodyPr wrap="square" lIns="0" tIns="0" rIns="0" bIns="0" rtlCol="0" anchor="ctr"/>
+          <a:lstStyle/>
+          <a:p>
+            <a:pPr algn="ctr" indent="0" marL="0">
+              <a:buNone/>
+            </a:pPr>
+            <a:r>
+              <a:rPr lang="en-US" sz="1600" b="1" dirty="0">
+                <a:solidFill>
+                  <a:srgbClr val="0D9488"/>
+                </a:solidFill>
+                <a:latin typeface="Trebuchet MS" pitchFamily="34" charset="0"/>
+                <a:ea typeface="Trebuchet MS" pitchFamily="34" charset="-122"/>
+                <a:cs typeface="Trebuchet MS" pitchFamily="34" charset="-120"/>
+              </a:rPr>
+              <a:t>·</a:t>
+            </a:r>
+            <a:endParaRPr lang="en-US" sz="1600" dirty="0"/>
+          </a:p>
+        </p:txBody>
+      </p:sp>
+      <p:sp>
+        <p:nvSpPr>
+          <p:cNvPr id="39" name="Shape 37"/>
+          <p:cNvSpPr/>
+          <p:nvPr/>
+        </p:nvSpPr>
+        <p:spPr>
+          <a:xfrm>
+            <a:off x="5230368" y="3364992"/>
+            <a:ext cx="1554480" cy="475488"/>
+          </a:xfrm>
+          <a:prstGeom prst="rect">
+            <a:avLst>
+              <a:gd name="adj" fmla="val 9615"/>
+            </a:avLst>
+          </a:prstGeom>
+          <a:solidFill>
+            <a:srgbClr val="FFFFFF"/>
+          </a:solidFill>
+          <a:ln w="12700">
+            <a:solidFill>
+              <a:srgbClr val="0D9488"/>
+            </a:solidFill>
+            <a:prstDash val="solid"/>
+          </a:ln>
+        </p:spPr>
+      </p:sp>
+      <p:sp>
+        <p:nvSpPr>
+          <p:cNvPr id="40" name="Text 38"/>
+          <p:cNvSpPr/>
+          <p:nvPr/>
+        </p:nvSpPr>
+        <p:spPr>
+          <a:xfrm>
+            <a:off x="5230368" y="3364992"/>
+            <a:ext cx="1554480" cy="475488"/>
+          </a:xfrm>
+          <a:prstGeom prst="rect">
+            <a:avLst/>
+          </a:prstGeom>
+          <a:noFill/>
+          <a:ln/>
+        </p:spPr>
+        <p:txBody>
+          <a:bodyPr wrap="square" lIns="0" tIns="0" rIns="0" bIns="0" rtlCol="0" anchor="ctr"/>
+          <a:lstStyle/>
+          <a:p>
+            <a:pPr algn="ctr" indent="0" marL="0">
+              <a:buNone/>
+            </a:pPr>
+            <a:r>
+              <a:rPr lang="en-US" sz="1400" b="1" dirty="0">
+                <a:solidFill>
+                  <a:srgbClr val="0D9488"/>
+                </a:solidFill>
+                <a:latin typeface="Trebuchet MS" pitchFamily="34" charset="0"/>
+                <a:ea typeface="Trebuchet MS" pitchFamily="34" charset="-122"/>
+                <a:cs typeface="Trebuchet MS" pitchFamily="34" charset="-120"/>
+              </a:rPr>
+              <a:t>sa</a:t>
+            </a:r>
+            <a:endParaRPr lang="en-US" sz="1400" dirty="0"/>
+          </a:p>
+        </p:txBody>
+      </p:sp>
+      <p:sp>
+        <p:nvSpPr>
+          <p:cNvPr id="41" name="Text 39"/>
+          <p:cNvSpPr/>
+          <p:nvPr/>
+        </p:nvSpPr>
+        <p:spPr>
+          <a:xfrm>
+            <a:off x="6784848" y="3364992"/>
+            <a:ext cx="73152" cy="475488"/>
+          </a:xfrm>
+          <a:prstGeom prst="rect">
+            <a:avLst/>
+          </a:prstGeom>
+          <a:noFill/>
+          <a:ln/>
+        </p:spPr>
+        <p:txBody>
+          <a:bodyPr wrap="square" lIns="0" tIns="0" rIns="0" bIns="0" rtlCol="0" anchor="ctr"/>
+          <a:lstStyle/>
+          <a:p>
+            <a:pPr algn="ctr" indent="0" marL="0">
+              <a:buNone/>
+            </a:pPr>
+            <a:r>
+              <a:rPr lang="en-US" sz="1600" b="1" dirty="0">
+                <a:solidFill>
+                  <a:srgbClr val="0D9488"/>
+                </a:solidFill>
+                <a:latin typeface="Trebuchet MS" pitchFamily="34" charset="0"/>
+                <a:ea typeface="Trebuchet MS" pitchFamily="34" charset="-122"/>
+                <a:cs typeface="Trebuchet MS" pitchFamily="34" charset="-120"/>
+              </a:rPr>
+              <a:t>·</a:t>
+            </a:r>
+            <a:endParaRPr lang="en-US" sz="1600" dirty="0"/>
+          </a:p>
+        </p:txBody>
+      </p:sp>
+      <p:sp>
+        <p:nvSpPr>
+          <p:cNvPr id="42" name="Shape 40"/>
+          <p:cNvSpPr/>
+          <p:nvPr/>
+        </p:nvSpPr>
+        <p:spPr>
+          <a:xfrm>
+            <a:off x="6858000" y="3364992"/>
+            <a:ext cx="1554480" cy="475488"/>
+          </a:xfrm>
+          <a:prstGeom prst="rect">
+            <a:avLst>
+              <a:gd name="adj" fmla="val 9615"/>
+            </a:avLst>
+          </a:prstGeom>
+          <a:solidFill>
+            <a:srgbClr val="FFFFFF"/>
+          </a:solidFill>
+          <a:ln w="12700">
+            <a:solidFill>
+              <a:srgbClr val="0D9488"/>
+            </a:solidFill>
+            <a:prstDash val="solid"/>
+          </a:ln>
+        </p:spPr>
+      </p:sp>
+      <p:sp>
+        <p:nvSpPr>
+          <p:cNvPr id="43" name="Text 41"/>
+          <p:cNvSpPr/>
+          <p:nvPr/>
+        </p:nvSpPr>
+        <p:spPr>
+          <a:xfrm>
+            <a:off x="6858000" y="3364992"/>
+            <a:ext cx="1554480" cy="475488"/>
+          </a:xfrm>
+          <a:prstGeom prst="rect">
+            <a:avLst/>
+          </a:prstGeom>
+          <a:noFill/>
+          <a:ln/>
+        </p:spPr>
+        <p:txBody>
+          <a:bodyPr wrap="square" lIns="0" tIns="0" rIns="0" bIns="0" rtlCol="0" anchor="ctr"/>
+          <a:lstStyle/>
+          <a:p>
+            <a:pPr algn="ctr" indent="0" marL="0">
+              <a:buNone/>
+            </a:pPr>
+            <a:r>
+              <a:rPr lang="en-US" sz="1400" b="1" dirty="0">
+                <a:solidFill>
+                  <a:srgbClr val="0D9488"/>
+                </a:solidFill>
+                <a:latin typeface="Trebuchet MS" pitchFamily="34" charset="0"/>
+                <a:ea typeface="Trebuchet MS" pitchFamily="34" charset="-122"/>
+                <a:cs typeface="Trebuchet MS" pitchFamily="34" charset="-120"/>
+              </a:rPr>
+              <a:t>tion</a:t>
+            </a:r>
+            <a:endParaRPr lang="en-US" sz="1400" dirty="0"/>
+          </a:p>
+        </p:txBody>
+      </p:sp>
+      <p:sp>
+        <p:nvSpPr>
+          <p:cNvPr id="44" name="Shape 42"/>
           <p:cNvSpPr/>
           <p:nvPr/>
         </p:nvSpPr>
@@ -21525,7 +22708,7 @@
       </p:sp>
       <p:sp>
         <p:nvSpPr>
-          <p:cNvPr id="31" name="Text 29"/>
+          <p:cNvPr id="45" name="Text 43"/>
           <p:cNvSpPr/>
           <p:nvPr/>
         </p:nvSpPr>
@@ -21564,7 +22747,7 @@
       </p:sp>
       <p:sp>
         <p:nvSpPr>
-          <p:cNvPr id="32" name="Shape 30"/>
+          <p:cNvPr id="46" name="Shape 44"/>
           <p:cNvSpPr/>
           <p:nvPr/>
         </p:nvSpPr>
@@ -21591,7 +22774,7 @@
       </p:sp>
       <p:sp>
         <p:nvSpPr>
-          <p:cNvPr id="33" name="Text 31"/>
+          <p:cNvPr id="47" name="Text 45"/>
           <p:cNvSpPr/>
           <p:nvPr/>
         </p:nvSpPr>
@@ -22053,7 +23236,7 @@
                 <a:ea typeface="Trebuchet MS" pitchFamily="34" charset="-122"/>
                 <a:cs typeface="Trebuchet MS" pitchFamily="34" charset="-120"/>
               </a:rPr>
-              <a:t>suspend</a:t>
+              <a:t>compensation</a:t>
             </a:r>
             <a:endParaRPr lang="en-US" sz="2800" dirty="0"/>
           </a:p>
@@ -22133,8 +23316,8 @@
         </p:nvSpPr>
         <p:spPr>
           <a:xfrm>
-            <a:off x="2938272" y="2258568"/>
-            <a:ext cx="1828800" cy="292608"/>
+            <a:off x="1989734" y="2258568"/>
+            <a:ext cx="1581912" cy="292608"/>
           </a:xfrm>
           <a:prstGeom prst="rect">
             <a:avLst>
@@ -22167,8 +23350,8 @@
         </p:nvSpPr>
         <p:spPr>
           <a:xfrm>
-            <a:off x="2938272" y="2258568"/>
-            <a:ext cx="1828800" cy="292608"/>
+            <a:off x="1989734" y="2258568"/>
+            <a:ext cx="1581912" cy="292608"/>
           </a:xfrm>
           <a:prstGeom prst="rect">
             <a:avLst/>
@@ -22192,7 +23375,7 @@
                 <a:ea typeface="Trebuchet MS" pitchFamily="34" charset="-122"/>
                 <a:cs typeface="Trebuchet MS" pitchFamily="34" charset="-120"/>
               </a:rPr>
-              <a:t>sus</a:t>
+              <a:t>com</a:t>
             </a:r>
             <a:endParaRPr lang="en-US" sz="1300" dirty="0"/>
           </a:p>
@@ -22206,8 +23389,8 @@
         </p:nvSpPr>
         <p:spPr>
           <a:xfrm>
-            <a:off x="2938272" y="2569464"/>
-            <a:ext cx="1828800" cy="201168"/>
+            <a:off x="1989734" y="2569464"/>
+            <a:ext cx="1581912" cy="201168"/>
           </a:xfrm>
           <a:prstGeom prst="rect">
             <a:avLst/>
@@ -22231,7 +23414,7 @@
                 <a:ea typeface="Calibri" pitchFamily="34" charset="-122"/>
                 <a:cs typeface="Calibri" pitchFamily="34" charset="-120"/>
               </a:rPr>
-              <a:t>under, up from below</a:t>
+              <a:t>together, with</a:t>
             </a:r>
             <a:endParaRPr lang="en-US" sz="850" dirty="0"/>
           </a:p>
@@ -22245,8 +23428,8 @@
         </p:nvSpPr>
         <p:spPr>
           <a:xfrm>
-            <a:off x="5803392" y="2258568"/>
-            <a:ext cx="1828800" cy="292608"/>
+            <a:off x="3659429" y="2258568"/>
+            <a:ext cx="1581912" cy="292608"/>
           </a:xfrm>
           <a:prstGeom prst="rect">
             <a:avLst>
@@ -22254,11 +23437,11 @@
             </a:avLst>
           </a:prstGeom>
           <a:solidFill>
-            <a:srgbClr val="FCE7F3"/>
+            <a:srgbClr val="CCFBF1"/>
           </a:solidFill>
           <a:ln w="19050">
             <a:solidFill>
-              <a:srgbClr val="DB2777"/>
+              <a:srgbClr val="0D9488"/>
             </a:solidFill>
             <a:prstDash val="solid"/>
           </a:ln>
@@ -22279,8 +23462,8 @@
         </p:nvSpPr>
         <p:spPr>
           <a:xfrm>
-            <a:off x="5803392" y="2258568"/>
-            <a:ext cx="1828800" cy="292608"/>
+            <a:off x="3659429" y="2258568"/>
+            <a:ext cx="1581912" cy="292608"/>
           </a:xfrm>
           <a:prstGeom prst="rect">
             <a:avLst/>
@@ -22298,13 +23481,13 @@
             <a:r>
               <a:rPr lang="en-US" sz="1300" b="1" dirty="0">
                 <a:solidFill>
-                  <a:srgbClr val="9D174D"/>
+                  <a:srgbClr val="0F766E"/>
                 </a:solidFill>
                 <a:latin typeface="Trebuchet MS" pitchFamily="34" charset="0"/>
                 <a:ea typeface="Trebuchet MS" pitchFamily="34" charset="-122"/>
                 <a:cs typeface="Trebuchet MS" pitchFamily="34" charset="-120"/>
               </a:rPr>
-              <a:t>pend</a:t>
+              <a:t>pens</a:t>
             </a:r>
             <a:endParaRPr lang="en-US" sz="1300" dirty="0"/>
           </a:p>
@@ -22318,8 +23501,8 @@
         </p:nvSpPr>
         <p:spPr>
           <a:xfrm>
-            <a:off x="5803392" y="2569464"/>
-            <a:ext cx="1828800" cy="201168"/>
+            <a:off x="3659429" y="2569464"/>
+            <a:ext cx="1581912" cy="201168"/>
           </a:xfrm>
           <a:prstGeom prst="rect">
             <a:avLst/>
@@ -22343,7 +23526,7 @@
                 <a:ea typeface="Calibri" pitchFamily="34" charset="-122"/>
                 <a:cs typeface="Calibri" pitchFamily="34" charset="-120"/>
               </a:rPr>
-              <a:t>to hang, weigh</a:t>
+              <a:t>to hang, weigh, pay</a:t>
             </a:r>
             <a:endParaRPr lang="en-US" sz="850" dirty="0"/>
           </a:p>
@@ -22352,6 +23535,308 @@
       <p:sp>
         <p:nvSpPr>
           <p:cNvPr id="22" name="Shape 20"/>
+          <p:cNvSpPr/>
+          <p:nvPr/>
+        </p:nvSpPr>
+        <p:spPr>
+          <a:xfrm>
+            <a:off x="5329123" y="2258568"/>
+            <a:ext cx="1581912" cy="292608"/>
+          </a:xfrm>
+          <a:prstGeom prst="rect">
+            <a:avLst>
+              <a:gd name="adj" fmla="val 25000"/>
+            </a:avLst>
+          </a:prstGeom>
+          <a:solidFill>
+            <a:srgbClr val="FCE7F3"/>
+          </a:solidFill>
+          <a:ln w="19050">
+            <a:solidFill>
+              <a:srgbClr val="DB2777"/>
+            </a:solidFill>
+            <a:prstDash val="solid"/>
+          </a:ln>
+          <a:effectLst>
+            <a:outerShdw sx="100000" sy="100000" kx="0" ky="0" algn="bl" rotWithShape="0" blurRad="101600" dist="38100" dir="8100000">
+              <a:srgbClr val="000000">
+                <a:alpha val="12000"/>
+              </a:srgbClr>
+            </a:outerShdw>
+          </a:effectLst>
+        </p:spPr>
+      </p:sp>
+      <p:sp>
+        <p:nvSpPr>
+          <p:cNvPr id="23" name="Text 21"/>
+          <p:cNvSpPr/>
+          <p:nvPr/>
+        </p:nvSpPr>
+        <p:spPr>
+          <a:xfrm>
+            <a:off x="5329123" y="2258568"/>
+            <a:ext cx="1581912" cy="292608"/>
+          </a:xfrm>
+          <a:prstGeom prst="rect">
+            <a:avLst/>
+          </a:prstGeom>
+          <a:noFill/>
+          <a:ln/>
+        </p:spPr>
+        <p:txBody>
+          <a:bodyPr wrap="square" lIns="0" tIns="0" rIns="0" bIns="0" rtlCol="0" anchor="ctr"/>
+          <a:lstStyle/>
+          <a:p>
+            <a:pPr algn="ctr" indent="0" marL="0">
+              <a:buNone/>
+            </a:pPr>
+            <a:r>
+              <a:rPr lang="en-US" sz="1300" b="1" dirty="0">
+                <a:solidFill>
+                  <a:srgbClr val="9D174D"/>
+                </a:solidFill>
+                <a:latin typeface="Trebuchet MS" pitchFamily="34" charset="0"/>
+                <a:ea typeface="Trebuchet MS" pitchFamily="34" charset="-122"/>
+                <a:cs typeface="Trebuchet MS" pitchFamily="34" charset="-120"/>
+              </a:rPr>
+              <a:t>a</a:t>
+            </a:r>
+            <a:endParaRPr lang="en-US" sz="1300" dirty="0"/>
+          </a:p>
+        </p:txBody>
+      </p:sp>
+      <p:sp>
+        <p:nvSpPr>
+          <p:cNvPr id="24" name="Text 22"/>
+          <p:cNvSpPr/>
+          <p:nvPr/>
+        </p:nvSpPr>
+        <p:spPr>
+          <a:xfrm>
+            <a:off x="5329123" y="2569464"/>
+            <a:ext cx="1581912" cy="201168"/>
+          </a:xfrm>
+          <a:prstGeom prst="rect">
+            <a:avLst/>
+          </a:prstGeom>
+          <a:noFill/>
+          <a:ln/>
+        </p:spPr>
+        <p:txBody>
+          <a:bodyPr wrap="square" lIns="0" tIns="0" rIns="0" bIns="0" rtlCol="0" anchor="t"/>
+          <a:lstStyle/>
+          <a:p>
+            <a:pPr algn="ctr" indent="0" marL="0">
+              <a:buNone/>
+            </a:pPr>
+            <a:r>
+              <a:rPr lang="en-US" sz="850" dirty="0">
+                <a:solidFill>
+                  <a:srgbClr val="475569"/>
+                </a:solidFill>
+                <a:latin typeface="Calibri" pitchFamily="34" charset="0"/>
+                <a:ea typeface="Calibri" pitchFamily="34" charset="-122"/>
+                <a:cs typeface="Calibri" pitchFamily="34" charset="-120"/>
+              </a:rPr>
+              <a:t>connecting vowel</a:t>
+            </a:r>
+            <a:endParaRPr lang="en-US" sz="850" dirty="0"/>
+          </a:p>
+        </p:txBody>
+      </p:sp>
+      <p:sp>
+        <p:nvSpPr>
+          <p:cNvPr id="25" name="Text 23"/>
+          <p:cNvSpPr/>
+          <p:nvPr/>
+        </p:nvSpPr>
+        <p:spPr>
+          <a:xfrm>
+            <a:off x="5329123" y="2752344"/>
+            <a:ext cx="1581912" cy="182880"/>
+          </a:xfrm>
+          <a:prstGeom prst="rect">
+            <a:avLst/>
+          </a:prstGeom>
+          <a:noFill/>
+          <a:ln/>
+        </p:spPr>
+        <p:txBody>
+          <a:bodyPr wrap="square" lIns="0" tIns="0" rIns="0" bIns="0" rtlCol="0" anchor="t"/>
+          <a:lstStyle/>
+          <a:p>
+            <a:pPr algn="ctr" indent="0" marL="0">
+              <a:buNone/>
+            </a:pPr>
+            <a:r>
+              <a:rPr lang="en-US" sz="700" i="1" dirty="0">
+                <a:solidFill>
+                  <a:srgbClr val="94A3B8"/>
+                </a:solidFill>
+                <a:latin typeface="Calibri" pitchFamily="34" charset="0"/>
+                <a:ea typeface="Calibri" pitchFamily="34" charset="-122"/>
+                <a:cs typeface="Calibri" pitchFamily="34" charset="-120"/>
+              </a:rPr>
+              <a:t>links base to suffix</a:t>
+            </a:r>
+            <a:endParaRPr lang="en-US" sz="700" dirty="0"/>
+          </a:p>
+        </p:txBody>
+      </p:sp>
+      <p:sp>
+        <p:nvSpPr>
+          <p:cNvPr id="26" name="Shape 24"/>
+          <p:cNvSpPr/>
+          <p:nvPr/>
+        </p:nvSpPr>
+        <p:spPr>
+          <a:xfrm>
+            <a:off x="6998818" y="2258568"/>
+            <a:ext cx="1581912" cy="292608"/>
+          </a:xfrm>
+          <a:prstGeom prst="rect">
+            <a:avLst>
+              <a:gd name="adj" fmla="val 25000"/>
+            </a:avLst>
+          </a:prstGeom>
+          <a:solidFill>
+            <a:srgbClr val="FCE7F3"/>
+          </a:solidFill>
+          <a:ln w="19050">
+            <a:solidFill>
+              <a:srgbClr val="DB2777"/>
+            </a:solidFill>
+            <a:prstDash val="solid"/>
+          </a:ln>
+          <a:effectLst>
+            <a:outerShdw sx="100000" sy="100000" kx="0" ky="0" algn="bl" rotWithShape="0" blurRad="101600" dist="38100" dir="8100000">
+              <a:srgbClr val="000000">
+                <a:alpha val="12000"/>
+              </a:srgbClr>
+            </a:outerShdw>
+          </a:effectLst>
+        </p:spPr>
+      </p:sp>
+      <p:sp>
+        <p:nvSpPr>
+          <p:cNvPr id="27" name="Text 25"/>
+          <p:cNvSpPr/>
+          <p:nvPr/>
+        </p:nvSpPr>
+        <p:spPr>
+          <a:xfrm>
+            <a:off x="6998818" y="2258568"/>
+            <a:ext cx="1581912" cy="292608"/>
+          </a:xfrm>
+          <a:prstGeom prst="rect">
+            <a:avLst/>
+          </a:prstGeom>
+          <a:noFill/>
+          <a:ln/>
+        </p:spPr>
+        <p:txBody>
+          <a:bodyPr wrap="square" lIns="0" tIns="0" rIns="0" bIns="0" rtlCol="0" anchor="ctr"/>
+          <a:lstStyle/>
+          <a:p>
+            <a:pPr algn="ctr" indent="0" marL="0">
+              <a:buNone/>
+            </a:pPr>
+            <a:r>
+              <a:rPr lang="en-US" sz="1300" b="1" dirty="0">
+                <a:solidFill>
+                  <a:srgbClr val="9D174D"/>
+                </a:solidFill>
+                <a:latin typeface="Trebuchet MS" pitchFamily="34" charset="0"/>
+                <a:ea typeface="Trebuchet MS" pitchFamily="34" charset="-122"/>
+                <a:cs typeface="Trebuchet MS" pitchFamily="34" charset="-120"/>
+              </a:rPr>
+              <a:t>tion</a:t>
+            </a:r>
+            <a:endParaRPr lang="en-US" sz="1300" dirty="0"/>
+          </a:p>
+        </p:txBody>
+      </p:sp>
+      <p:sp>
+        <p:nvSpPr>
+          <p:cNvPr id="28" name="Text 26"/>
+          <p:cNvSpPr/>
+          <p:nvPr/>
+        </p:nvSpPr>
+        <p:spPr>
+          <a:xfrm>
+            <a:off x="6998818" y="2569464"/>
+            <a:ext cx="1581912" cy="201168"/>
+          </a:xfrm>
+          <a:prstGeom prst="rect">
+            <a:avLst/>
+          </a:prstGeom>
+          <a:noFill/>
+          <a:ln/>
+        </p:spPr>
+        <p:txBody>
+          <a:bodyPr wrap="square" lIns="0" tIns="0" rIns="0" bIns="0" rtlCol="0" anchor="t"/>
+          <a:lstStyle/>
+          <a:p>
+            <a:pPr algn="ctr" indent="0" marL="0">
+              <a:buNone/>
+            </a:pPr>
+            <a:r>
+              <a:rPr lang="en-US" sz="850" dirty="0">
+                <a:solidFill>
+                  <a:srgbClr val="475569"/>
+                </a:solidFill>
+                <a:latin typeface="Calibri" pitchFamily="34" charset="0"/>
+                <a:ea typeface="Calibri" pitchFamily="34" charset="-122"/>
+                <a:cs typeface="Calibri" pitchFamily="34" charset="-120"/>
+              </a:rPr>
+              <a:t>act or result of</a:t>
+            </a:r>
+            <a:endParaRPr lang="en-US" sz="850" dirty="0"/>
+          </a:p>
+        </p:txBody>
+      </p:sp>
+      <p:sp>
+        <p:nvSpPr>
+          <p:cNvPr id="29" name="Text 27"/>
+          <p:cNvSpPr/>
+          <p:nvPr/>
+        </p:nvSpPr>
+        <p:spPr>
+          <a:xfrm>
+            <a:off x="6998818" y="2752344"/>
+            <a:ext cx="1581912" cy="182880"/>
+          </a:xfrm>
+          <a:prstGeom prst="rect">
+            <a:avLst/>
+          </a:prstGeom>
+          <a:noFill/>
+          <a:ln/>
+        </p:spPr>
+        <p:txBody>
+          <a:bodyPr wrap="square" lIns="0" tIns="0" rIns="0" bIns="0" rtlCol="0" anchor="t"/>
+          <a:lstStyle/>
+          <a:p>
+            <a:pPr algn="ctr" indent="0" marL="0">
+              <a:buNone/>
+            </a:pPr>
+            <a:r>
+              <a:rPr lang="en-US" sz="700" i="1" dirty="0">
+                <a:solidFill>
+                  <a:srgbClr val="94A3B8"/>
+                </a:solidFill>
+                <a:latin typeface="Calibri" pitchFamily="34" charset="0"/>
+                <a:ea typeface="Calibri" pitchFamily="34" charset="-122"/>
+                <a:cs typeface="Calibri" pitchFamily="34" charset="-120"/>
+              </a:rPr>
+              <a:t>ti → /sh/ before on</a:t>
+            </a:r>
+            <a:endParaRPr lang="en-US" sz="700" dirty="0"/>
+          </a:p>
+        </p:txBody>
+      </p:sp>
+      <p:sp>
+        <p:nvSpPr>
+          <p:cNvPr id="30" name="Shape 28"/>
           <p:cNvSpPr/>
           <p:nvPr/>
         </p:nvSpPr>
@@ -22378,7 +23863,7 @@
       </p:sp>
       <p:sp>
         <p:nvSpPr>
-          <p:cNvPr id="23" name="Text 21"/>
+          <p:cNvPr id="31" name="Text 29"/>
           <p:cNvSpPr/>
           <p:nvPr/>
         </p:nvSpPr>
@@ -22417,7 +23902,7 @@
       </p:sp>
       <p:sp>
         <p:nvSpPr>
-          <p:cNvPr id="24" name="Shape 22"/>
+          <p:cNvPr id="32" name="Shape 30"/>
           <p:cNvSpPr/>
           <p:nvPr/>
         </p:nvSpPr>
@@ -22444,14 +23929,14 @@
       </p:sp>
       <p:sp>
         <p:nvSpPr>
-          <p:cNvPr id="25" name="Shape 23"/>
-          <p:cNvSpPr/>
-          <p:nvPr/>
-        </p:nvSpPr>
-        <p:spPr>
-          <a:xfrm>
-            <a:off x="2999232" y="3364992"/>
-            <a:ext cx="1645920" cy="475488"/>
+          <p:cNvPr id="33" name="Shape 31"/>
+          <p:cNvSpPr/>
+          <p:nvPr/>
+        </p:nvSpPr>
+        <p:spPr>
+          <a:xfrm>
+            <a:off x="1975104" y="3364992"/>
+            <a:ext cx="1554480" cy="475488"/>
           </a:xfrm>
           <a:prstGeom prst="rect">
             <a:avLst>
@@ -22471,14 +23956,14 @@
       </p:sp>
       <p:sp>
         <p:nvSpPr>
-          <p:cNvPr id="26" name="Text 24"/>
-          <p:cNvSpPr/>
-          <p:nvPr/>
-        </p:nvSpPr>
-        <p:spPr>
-          <a:xfrm>
-            <a:off x="2999232" y="3364992"/>
-            <a:ext cx="1645920" cy="475488"/>
+          <p:cNvPr id="34" name="Text 32"/>
+          <p:cNvSpPr/>
+          <p:nvPr/>
+        </p:nvSpPr>
+        <p:spPr>
+          <a:xfrm>
+            <a:off x="1975104" y="3364992"/>
+            <a:ext cx="1554480" cy="475488"/>
           </a:xfrm>
           <a:prstGeom prst="rect">
             <a:avLst/>
@@ -22502,7 +23987,7 @@
                 <a:ea typeface="Trebuchet MS" pitchFamily="34" charset="-122"/>
                 <a:cs typeface="Trebuchet MS" pitchFamily="34" charset="-120"/>
               </a:rPr>
-              <a:t>sus</a:t>
+              <a:t>com</a:t>
             </a:r>
             <a:endParaRPr lang="en-US" sz="1400" dirty="0"/>
           </a:p>
@@ -22510,14 +23995,14 @@
       </p:sp>
       <p:sp>
         <p:nvSpPr>
-          <p:cNvPr id="27" name="Text 25"/>
-          <p:cNvSpPr/>
-          <p:nvPr/>
-        </p:nvSpPr>
-        <p:spPr>
-          <a:xfrm>
-            <a:off x="4645152" y="3364992"/>
-            <a:ext cx="1097280" cy="475488"/>
+          <p:cNvPr id="35" name="Text 33"/>
+          <p:cNvSpPr/>
+          <p:nvPr/>
+        </p:nvSpPr>
+        <p:spPr>
+          <a:xfrm>
+            <a:off x="3529584" y="3364992"/>
+            <a:ext cx="73152" cy="475488"/>
           </a:xfrm>
           <a:prstGeom prst="rect">
             <a:avLst/>
@@ -22549,14 +24034,14 @@
       </p:sp>
       <p:sp>
         <p:nvSpPr>
-          <p:cNvPr id="28" name="Shape 26"/>
-          <p:cNvSpPr/>
-          <p:nvPr/>
-        </p:nvSpPr>
-        <p:spPr>
-          <a:xfrm>
-            <a:off x="5742432" y="3364992"/>
-            <a:ext cx="1645920" cy="475488"/>
+          <p:cNvPr id="36" name="Shape 34"/>
+          <p:cNvSpPr/>
+          <p:nvPr/>
+        </p:nvSpPr>
+        <p:spPr>
+          <a:xfrm>
+            <a:off x="3602736" y="3364992"/>
+            <a:ext cx="1554480" cy="475488"/>
           </a:xfrm>
           <a:prstGeom prst="rect">
             <a:avLst>
@@ -22576,14 +24061,14 @@
       </p:sp>
       <p:sp>
         <p:nvSpPr>
-          <p:cNvPr id="29" name="Text 27"/>
-          <p:cNvSpPr/>
-          <p:nvPr/>
-        </p:nvSpPr>
-        <p:spPr>
-          <a:xfrm>
-            <a:off x="5742432" y="3364992"/>
-            <a:ext cx="1645920" cy="475488"/>
+          <p:cNvPr id="37" name="Text 35"/>
+          <p:cNvSpPr/>
+          <p:nvPr/>
+        </p:nvSpPr>
+        <p:spPr>
+          <a:xfrm>
+            <a:off x="3602736" y="3364992"/>
+            <a:ext cx="1554480" cy="475488"/>
           </a:xfrm>
           <a:prstGeom prst="rect">
             <a:avLst/>
@@ -22607,7 +24092,7 @@
                 <a:ea typeface="Trebuchet MS" pitchFamily="34" charset="-122"/>
                 <a:cs typeface="Trebuchet MS" pitchFamily="34" charset="-120"/>
               </a:rPr>
-              <a:t>pend</a:t>
+              <a:t>pen</a:t>
             </a:r>
             <a:endParaRPr lang="en-US" sz="1400" dirty="0"/>
           </a:p>
@@ -22615,7 +24100,217 @@
       </p:sp>
       <p:sp>
         <p:nvSpPr>
-          <p:cNvPr id="30" name="Shape 28"/>
+          <p:cNvPr id="38" name="Text 36"/>
+          <p:cNvSpPr/>
+          <p:nvPr/>
+        </p:nvSpPr>
+        <p:spPr>
+          <a:xfrm>
+            <a:off x="5157216" y="3364992"/>
+            <a:ext cx="73152" cy="475488"/>
+          </a:xfrm>
+          <a:prstGeom prst="rect">
+            <a:avLst/>
+          </a:prstGeom>
+          <a:noFill/>
+          <a:ln/>
+        </p:spPr>
+        <p:txBody>
+          <a:bodyPr wrap="square" lIns="0" tIns="0" rIns="0" bIns="0" rtlCol="0" anchor="ctr"/>
+          <a:lstStyle/>
+          <a:p>
+            <a:pPr algn="ctr" indent="0" marL="0">
+              <a:buNone/>
+            </a:pPr>
+            <a:r>
+              <a:rPr lang="en-US" sz="1600" b="1" dirty="0">
+                <a:solidFill>
+                  <a:srgbClr val="0D9488"/>
+                </a:solidFill>
+                <a:latin typeface="Trebuchet MS" pitchFamily="34" charset="0"/>
+                <a:ea typeface="Trebuchet MS" pitchFamily="34" charset="-122"/>
+                <a:cs typeface="Trebuchet MS" pitchFamily="34" charset="-120"/>
+              </a:rPr>
+              <a:t>·</a:t>
+            </a:r>
+            <a:endParaRPr lang="en-US" sz="1600" dirty="0"/>
+          </a:p>
+        </p:txBody>
+      </p:sp>
+      <p:sp>
+        <p:nvSpPr>
+          <p:cNvPr id="39" name="Shape 37"/>
+          <p:cNvSpPr/>
+          <p:nvPr/>
+        </p:nvSpPr>
+        <p:spPr>
+          <a:xfrm>
+            <a:off x="5230368" y="3364992"/>
+            <a:ext cx="1554480" cy="475488"/>
+          </a:xfrm>
+          <a:prstGeom prst="rect">
+            <a:avLst>
+              <a:gd name="adj" fmla="val 9615"/>
+            </a:avLst>
+          </a:prstGeom>
+          <a:solidFill>
+            <a:srgbClr val="FFFFFF"/>
+          </a:solidFill>
+          <a:ln w="12700">
+            <a:solidFill>
+              <a:srgbClr val="0D9488"/>
+            </a:solidFill>
+            <a:prstDash val="solid"/>
+          </a:ln>
+        </p:spPr>
+      </p:sp>
+      <p:sp>
+        <p:nvSpPr>
+          <p:cNvPr id="40" name="Text 38"/>
+          <p:cNvSpPr/>
+          <p:nvPr/>
+        </p:nvSpPr>
+        <p:spPr>
+          <a:xfrm>
+            <a:off x="5230368" y="3364992"/>
+            <a:ext cx="1554480" cy="475488"/>
+          </a:xfrm>
+          <a:prstGeom prst="rect">
+            <a:avLst/>
+          </a:prstGeom>
+          <a:noFill/>
+          <a:ln/>
+        </p:spPr>
+        <p:txBody>
+          <a:bodyPr wrap="square" lIns="0" tIns="0" rIns="0" bIns="0" rtlCol="0" anchor="ctr"/>
+          <a:lstStyle/>
+          <a:p>
+            <a:pPr algn="ctr" indent="0" marL="0">
+              <a:buNone/>
+            </a:pPr>
+            <a:r>
+              <a:rPr lang="en-US" sz="1400" b="1" dirty="0">
+                <a:solidFill>
+                  <a:srgbClr val="0D9488"/>
+                </a:solidFill>
+                <a:latin typeface="Trebuchet MS" pitchFamily="34" charset="0"/>
+                <a:ea typeface="Trebuchet MS" pitchFamily="34" charset="-122"/>
+                <a:cs typeface="Trebuchet MS" pitchFamily="34" charset="-120"/>
+              </a:rPr>
+              <a:t>sa</a:t>
+            </a:r>
+            <a:endParaRPr lang="en-US" sz="1400" dirty="0"/>
+          </a:p>
+        </p:txBody>
+      </p:sp>
+      <p:sp>
+        <p:nvSpPr>
+          <p:cNvPr id="41" name="Text 39"/>
+          <p:cNvSpPr/>
+          <p:nvPr/>
+        </p:nvSpPr>
+        <p:spPr>
+          <a:xfrm>
+            <a:off x="6784848" y="3364992"/>
+            <a:ext cx="73152" cy="475488"/>
+          </a:xfrm>
+          <a:prstGeom prst="rect">
+            <a:avLst/>
+          </a:prstGeom>
+          <a:noFill/>
+          <a:ln/>
+        </p:spPr>
+        <p:txBody>
+          <a:bodyPr wrap="square" lIns="0" tIns="0" rIns="0" bIns="0" rtlCol="0" anchor="ctr"/>
+          <a:lstStyle/>
+          <a:p>
+            <a:pPr algn="ctr" indent="0" marL="0">
+              <a:buNone/>
+            </a:pPr>
+            <a:r>
+              <a:rPr lang="en-US" sz="1600" b="1" dirty="0">
+                <a:solidFill>
+                  <a:srgbClr val="0D9488"/>
+                </a:solidFill>
+                <a:latin typeface="Trebuchet MS" pitchFamily="34" charset="0"/>
+                <a:ea typeface="Trebuchet MS" pitchFamily="34" charset="-122"/>
+                <a:cs typeface="Trebuchet MS" pitchFamily="34" charset="-120"/>
+              </a:rPr>
+              <a:t>·</a:t>
+            </a:r>
+            <a:endParaRPr lang="en-US" sz="1600" dirty="0"/>
+          </a:p>
+        </p:txBody>
+      </p:sp>
+      <p:sp>
+        <p:nvSpPr>
+          <p:cNvPr id="42" name="Shape 40"/>
+          <p:cNvSpPr/>
+          <p:nvPr/>
+        </p:nvSpPr>
+        <p:spPr>
+          <a:xfrm>
+            <a:off x="6858000" y="3364992"/>
+            <a:ext cx="1554480" cy="475488"/>
+          </a:xfrm>
+          <a:prstGeom prst="rect">
+            <a:avLst>
+              <a:gd name="adj" fmla="val 9615"/>
+            </a:avLst>
+          </a:prstGeom>
+          <a:solidFill>
+            <a:srgbClr val="FFFFFF"/>
+          </a:solidFill>
+          <a:ln w="12700">
+            <a:solidFill>
+              <a:srgbClr val="0D9488"/>
+            </a:solidFill>
+            <a:prstDash val="solid"/>
+          </a:ln>
+        </p:spPr>
+      </p:sp>
+      <p:sp>
+        <p:nvSpPr>
+          <p:cNvPr id="43" name="Text 41"/>
+          <p:cNvSpPr/>
+          <p:nvPr/>
+        </p:nvSpPr>
+        <p:spPr>
+          <a:xfrm>
+            <a:off x="6858000" y="3364992"/>
+            <a:ext cx="1554480" cy="475488"/>
+          </a:xfrm>
+          <a:prstGeom prst="rect">
+            <a:avLst/>
+          </a:prstGeom>
+          <a:noFill/>
+          <a:ln/>
+        </p:spPr>
+        <p:txBody>
+          <a:bodyPr wrap="square" lIns="0" tIns="0" rIns="0" bIns="0" rtlCol="0" anchor="ctr"/>
+          <a:lstStyle/>
+          <a:p>
+            <a:pPr algn="ctr" indent="0" marL="0">
+              <a:buNone/>
+            </a:pPr>
+            <a:r>
+              <a:rPr lang="en-US" sz="1400" b="1" dirty="0">
+                <a:solidFill>
+                  <a:srgbClr val="0D9488"/>
+                </a:solidFill>
+                <a:latin typeface="Trebuchet MS" pitchFamily="34" charset="0"/>
+                <a:ea typeface="Trebuchet MS" pitchFamily="34" charset="-122"/>
+                <a:cs typeface="Trebuchet MS" pitchFamily="34" charset="-120"/>
+              </a:rPr>
+              <a:t>tion</a:t>
+            </a:r>
+            <a:endParaRPr lang="en-US" sz="1400" dirty="0"/>
+          </a:p>
+        </p:txBody>
+      </p:sp>
+      <p:sp>
+        <p:nvSpPr>
+          <p:cNvPr id="44" name="Shape 42"/>
           <p:cNvSpPr/>
           <p:nvPr/>
         </p:nvSpPr>
@@ -22642,7 +24337,7 @@
       </p:sp>
       <p:sp>
         <p:nvSpPr>
-          <p:cNvPr id="31" name="Text 29"/>
+          <p:cNvPr id="45" name="Text 43"/>
           <p:cNvSpPr/>
           <p:nvPr/>
         </p:nvSpPr>
@@ -22681,18 +24376,18 @@
       </p:sp>
       <p:sp>
         <p:nvSpPr>
-          <p:cNvPr id="32" name="Shape 30"/>
+          <p:cNvPr id="46" name="Shape 44"/>
           <p:cNvSpPr/>
           <p:nvPr/>
         </p:nvSpPr>
         <p:spPr>
           <a:xfrm>
             <a:off x="1874520" y="4096512"/>
-            <a:ext cx="6903720" cy="658368"/>
+            <a:ext cx="6903720" cy="804672"/>
           </a:xfrm>
           <a:prstGeom prst="rect">
             <a:avLst>
-              <a:gd name="adj" fmla="val 8333"/>
+              <a:gd name="adj" fmla="val 6818"/>
             </a:avLst>
           </a:prstGeom>
           <a:solidFill>
@@ -22708,18 +24403,18 @@
       </p:sp>
       <p:sp>
         <p:nvSpPr>
-          <p:cNvPr id="33" name="Shape 31"/>
-          <p:cNvSpPr/>
-          <p:nvPr/>
-        </p:nvSpPr>
-        <p:spPr>
-          <a:xfrm>
-            <a:off x="2124837" y="4169664"/>
-            <a:ext cx="685800" cy="475488"/>
+          <p:cNvPr id="47" name="Shape 45"/>
+          <p:cNvSpPr/>
+          <p:nvPr/>
+        </p:nvSpPr>
+        <p:spPr>
+          <a:xfrm>
+            <a:off x="1952244" y="4169664"/>
+            <a:ext cx="543652" cy="384048"/>
           </a:xfrm>
           <a:prstGeom prst="rect">
             <a:avLst>
-              <a:gd name="adj" fmla="val 7692"/>
+              <a:gd name="adj" fmla="val 9524"/>
             </a:avLst>
           </a:prstGeom>
           <a:solidFill>
@@ -22735,14 +24430,14 @@
       </p:sp>
       <p:sp>
         <p:nvSpPr>
-          <p:cNvPr id="34" name="Text 32"/>
-          <p:cNvSpPr/>
-          <p:nvPr/>
-        </p:nvSpPr>
-        <p:spPr>
-          <a:xfrm>
-            <a:off x="2124837" y="4169664"/>
-            <a:ext cx="685800" cy="475488"/>
+          <p:cNvPr id="48" name="Text 46"/>
+          <p:cNvSpPr/>
+          <p:nvPr/>
+        </p:nvSpPr>
+        <p:spPr>
+          <a:xfrm>
+            <a:off x="1952244" y="4169664"/>
+            <a:ext cx="543652" cy="384048"/>
           </a:xfrm>
           <a:prstGeom prst="rect">
             <a:avLst/>
@@ -22766,7 +24461,7 @@
                 <a:ea typeface="Trebuchet MS" pitchFamily="34" charset="-122"/>
                 <a:cs typeface="Trebuchet MS" pitchFamily="34" charset="-120"/>
               </a:rPr>
-              <a:t>s</a:t>
+              <a:t>c</a:t>
             </a:r>
             <a:endParaRPr lang="en-US" sz="900" dirty="0"/>
           </a:p>
@@ -22774,18 +24469,18 @@
       </p:sp>
       <p:sp>
         <p:nvSpPr>
-          <p:cNvPr id="35" name="Shape 33"/>
-          <p:cNvSpPr/>
-          <p:nvPr/>
-        </p:nvSpPr>
-        <p:spPr>
-          <a:xfrm>
-            <a:off x="3033522" y="4169664"/>
-            <a:ext cx="685800" cy="475488"/>
+          <p:cNvPr id="49" name="Shape 47"/>
+          <p:cNvSpPr/>
+          <p:nvPr/>
+        </p:nvSpPr>
+        <p:spPr>
+          <a:xfrm>
+            <a:off x="2546188" y="4169664"/>
+            <a:ext cx="543652" cy="384048"/>
           </a:xfrm>
           <a:prstGeom prst="rect">
             <a:avLst>
-              <a:gd name="adj" fmla="val 7692"/>
+              <a:gd name="adj" fmla="val 9524"/>
             </a:avLst>
           </a:prstGeom>
           <a:solidFill>
@@ -22801,14 +24496,14 @@
       </p:sp>
       <p:sp>
         <p:nvSpPr>
-          <p:cNvPr id="36" name="Text 34"/>
-          <p:cNvSpPr/>
-          <p:nvPr/>
-        </p:nvSpPr>
-        <p:spPr>
-          <a:xfrm>
-            <a:off x="3033522" y="4169664"/>
-            <a:ext cx="685800" cy="475488"/>
+          <p:cNvPr id="50" name="Text 48"/>
+          <p:cNvSpPr/>
+          <p:nvPr/>
+        </p:nvSpPr>
+        <p:spPr>
+          <a:xfrm>
+            <a:off x="2546188" y="4169664"/>
+            <a:ext cx="543652" cy="384048"/>
           </a:xfrm>
           <a:prstGeom prst="rect">
             <a:avLst/>
@@ -22832,7 +24527,7 @@
                 <a:ea typeface="Trebuchet MS" pitchFamily="34" charset="-122"/>
                 <a:cs typeface="Trebuchet MS" pitchFamily="34" charset="-120"/>
               </a:rPr>
-              <a:t>u</a:t>
+              <a:t>o</a:t>
             </a:r>
             <a:endParaRPr lang="en-US" sz="900" dirty="0"/>
           </a:p>
@@ -22840,18 +24535,18 @@
       </p:sp>
       <p:sp>
         <p:nvSpPr>
-          <p:cNvPr id="37" name="Shape 35"/>
-          <p:cNvSpPr/>
-          <p:nvPr/>
-        </p:nvSpPr>
-        <p:spPr>
-          <a:xfrm>
-            <a:off x="3942207" y="4169664"/>
-            <a:ext cx="685800" cy="475488"/>
+          <p:cNvPr id="51" name="Shape 49"/>
+          <p:cNvSpPr/>
+          <p:nvPr/>
+        </p:nvSpPr>
+        <p:spPr>
+          <a:xfrm>
+            <a:off x="3140133" y="4169664"/>
+            <a:ext cx="543652" cy="384048"/>
           </a:xfrm>
           <a:prstGeom prst="rect">
             <a:avLst>
-              <a:gd name="adj" fmla="val 7692"/>
+              <a:gd name="adj" fmla="val 9524"/>
             </a:avLst>
           </a:prstGeom>
           <a:solidFill>
@@ -22867,14 +24562,14 @@
       </p:sp>
       <p:sp>
         <p:nvSpPr>
-          <p:cNvPr id="38" name="Text 36"/>
-          <p:cNvSpPr/>
-          <p:nvPr/>
-        </p:nvSpPr>
-        <p:spPr>
-          <a:xfrm>
-            <a:off x="3942207" y="4169664"/>
-            <a:ext cx="685800" cy="475488"/>
+          <p:cNvPr id="52" name="Text 50"/>
+          <p:cNvSpPr/>
+          <p:nvPr/>
+        </p:nvSpPr>
+        <p:spPr>
+          <a:xfrm>
+            <a:off x="3140133" y="4169664"/>
+            <a:ext cx="543652" cy="384048"/>
           </a:xfrm>
           <a:prstGeom prst="rect">
             <a:avLst/>
@@ -22898,7 +24593,7 @@
                 <a:ea typeface="Trebuchet MS" pitchFamily="34" charset="-122"/>
                 <a:cs typeface="Trebuchet MS" pitchFamily="34" charset="-120"/>
               </a:rPr>
-              <a:t>s</a:t>
+              <a:t>m</a:t>
             </a:r>
             <a:endParaRPr lang="en-US" sz="900" dirty="0"/>
           </a:p>
@@ -22906,18 +24601,18 @@
       </p:sp>
       <p:sp>
         <p:nvSpPr>
-          <p:cNvPr id="39" name="Shape 37"/>
-          <p:cNvSpPr/>
-          <p:nvPr/>
-        </p:nvSpPr>
-        <p:spPr>
-          <a:xfrm>
-            <a:off x="4850892" y="4169664"/>
-            <a:ext cx="685800" cy="475488"/>
+          <p:cNvPr id="53" name="Shape 51"/>
+          <p:cNvSpPr/>
+          <p:nvPr/>
+        </p:nvSpPr>
+        <p:spPr>
+          <a:xfrm>
+            <a:off x="3734077" y="4169664"/>
+            <a:ext cx="543652" cy="384048"/>
           </a:xfrm>
           <a:prstGeom prst="rect">
             <a:avLst>
-              <a:gd name="adj" fmla="val 7692"/>
+              <a:gd name="adj" fmla="val 9524"/>
             </a:avLst>
           </a:prstGeom>
           <a:solidFill>
@@ -22933,14 +24628,14 @@
       </p:sp>
       <p:sp>
         <p:nvSpPr>
-          <p:cNvPr id="40" name="Text 38"/>
-          <p:cNvSpPr/>
-          <p:nvPr/>
-        </p:nvSpPr>
-        <p:spPr>
-          <a:xfrm>
-            <a:off x="4850892" y="4169664"/>
-            <a:ext cx="685800" cy="475488"/>
+          <p:cNvPr id="54" name="Text 52"/>
+          <p:cNvSpPr/>
+          <p:nvPr/>
+        </p:nvSpPr>
+        <p:spPr>
+          <a:xfrm>
+            <a:off x="3734077" y="4169664"/>
+            <a:ext cx="543652" cy="384048"/>
           </a:xfrm>
           <a:prstGeom prst="rect">
             <a:avLst/>
@@ -22972,18 +24667,18 @@
       </p:sp>
       <p:sp>
         <p:nvSpPr>
-          <p:cNvPr id="41" name="Shape 39"/>
-          <p:cNvSpPr/>
-          <p:nvPr/>
-        </p:nvSpPr>
-        <p:spPr>
-          <a:xfrm>
-            <a:off x="5759577" y="4169664"/>
-            <a:ext cx="685800" cy="475488"/>
+          <p:cNvPr id="55" name="Shape 53"/>
+          <p:cNvSpPr/>
+          <p:nvPr/>
+        </p:nvSpPr>
+        <p:spPr>
+          <a:xfrm>
+            <a:off x="4328021" y="4169664"/>
+            <a:ext cx="543652" cy="384048"/>
           </a:xfrm>
           <a:prstGeom prst="rect">
             <a:avLst>
-              <a:gd name="adj" fmla="val 7692"/>
+              <a:gd name="adj" fmla="val 9524"/>
             </a:avLst>
           </a:prstGeom>
           <a:solidFill>
@@ -22999,14 +24694,14 @@
       </p:sp>
       <p:sp>
         <p:nvSpPr>
-          <p:cNvPr id="42" name="Text 40"/>
-          <p:cNvSpPr/>
-          <p:nvPr/>
-        </p:nvSpPr>
-        <p:spPr>
-          <a:xfrm>
-            <a:off x="5759577" y="4169664"/>
-            <a:ext cx="685800" cy="475488"/>
+          <p:cNvPr id="56" name="Text 54"/>
+          <p:cNvSpPr/>
+          <p:nvPr/>
+        </p:nvSpPr>
+        <p:spPr>
+          <a:xfrm>
+            <a:off x="4328021" y="4169664"/>
+            <a:ext cx="543652" cy="384048"/>
           </a:xfrm>
           <a:prstGeom prst="rect">
             <a:avLst/>
@@ -23038,18 +24733,18 @@
       </p:sp>
       <p:sp>
         <p:nvSpPr>
-          <p:cNvPr id="43" name="Shape 41"/>
-          <p:cNvSpPr/>
-          <p:nvPr/>
-        </p:nvSpPr>
-        <p:spPr>
-          <a:xfrm>
-            <a:off x="6668262" y="4169664"/>
-            <a:ext cx="685800" cy="475488"/>
+          <p:cNvPr id="57" name="Shape 55"/>
+          <p:cNvSpPr/>
+          <p:nvPr/>
+        </p:nvSpPr>
+        <p:spPr>
+          <a:xfrm>
+            <a:off x="4921966" y="4169664"/>
+            <a:ext cx="543652" cy="384048"/>
           </a:xfrm>
           <a:prstGeom prst="rect">
             <a:avLst>
-              <a:gd name="adj" fmla="val 7692"/>
+              <a:gd name="adj" fmla="val 9524"/>
             </a:avLst>
           </a:prstGeom>
           <a:solidFill>
@@ -23065,14 +24760,14 @@
       </p:sp>
       <p:sp>
         <p:nvSpPr>
-          <p:cNvPr id="44" name="Text 42"/>
-          <p:cNvSpPr/>
-          <p:nvPr/>
-        </p:nvSpPr>
-        <p:spPr>
-          <a:xfrm>
-            <a:off x="6668262" y="4169664"/>
-            <a:ext cx="685800" cy="475488"/>
+          <p:cNvPr id="58" name="Text 56"/>
+          <p:cNvSpPr/>
+          <p:nvPr/>
+        </p:nvSpPr>
+        <p:spPr>
+          <a:xfrm>
+            <a:off x="4921966" y="4169664"/>
+            <a:ext cx="543652" cy="384048"/>
           </a:xfrm>
           <a:prstGeom prst="rect">
             <a:avLst/>
@@ -23104,18 +24799,18 @@
       </p:sp>
       <p:sp>
         <p:nvSpPr>
-          <p:cNvPr id="45" name="Shape 43"/>
-          <p:cNvSpPr/>
-          <p:nvPr/>
-        </p:nvSpPr>
-        <p:spPr>
-          <a:xfrm>
-            <a:off x="7576947" y="4169664"/>
-            <a:ext cx="685800" cy="475488"/>
+          <p:cNvPr id="59" name="Shape 57"/>
+          <p:cNvSpPr/>
+          <p:nvPr/>
+        </p:nvSpPr>
+        <p:spPr>
+          <a:xfrm>
+            <a:off x="5515910" y="4169664"/>
+            <a:ext cx="543652" cy="384048"/>
           </a:xfrm>
           <a:prstGeom prst="rect">
             <a:avLst>
-              <a:gd name="adj" fmla="val 7692"/>
+              <a:gd name="adj" fmla="val 9524"/>
             </a:avLst>
           </a:prstGeom>
           <a:solidFill>
@@ -23131,14 +24826,14 @@
       </p:sp>
       <p:sp>
         <p:nvSpPr>
-          <p:cNvPr id="46" name="Text 44"/>
-          <p:cNvSpPr/>
-          <p:nvPr/>
-        </p:nvSpPr>
-        <p:spPr>
-          <a:xfrm>
-            <a:off x="7576947" y="4169664"/>
-            <a:ext cx="685800" cy="475488"/>
+          <p:cNvPr id="60" name="Text 58"/>
+          <p:cNvSpPr/>
+          <p:nvPr/>
+        </p:nvSpPr>
+        <p:spPr>
+          <a:xfrm>
+            <a:off x="5515910" y="4169664"/>
+            <a:ext cx="543652" cy="384048"/>
           </a:xfrm>
           <a:prstGeom prst="rect">
             <a:avLst/>
@@ -23162,7 +24857,310 @@
                 <a:ea typeface="Trebuchet MS" pitchFamily="34" charset="-122"/>
                 <a:cs typeface="Trebuchet MS" pitchFamily="34" charset="-120"/>
               </a:rPr>
-              <a:t>d</a:t>
+              <a:t>s</a:t>
+            </a:r>
+            <a:endParaRPr lang="en-US" sz="900" dirty="0"/>
+          </a:p>
+        </p:txBody>
+      </p:sp>
+      <p:sp>
+        <p:nvSpPr>
+          <p:cNvPr id="61" name="Shape 59"/>
+          <p:cNvSpPr/>
+          <p:nvPr/>
+        </p:nvSpPr>
+        <p:spPr>
+          <a:xfrm>
+            <a:off x="6109855" y="4169664"/>
+            <a:ext cx="543652" cy="384048"/>
+          </a:xfrm>
+          <a:prstGeom prst="rect">
+            <a:avLst>
+              <a:gd name="adj" fmla="val 9524"/>
+            </a:avLst>
+          </a:prstGeom>
+          <a:solidFill>
+            <a:srgbClr val="FFFFFF"/>
+          </a:solidFill>
+          <a:ln w="12700">
+            <a:solidFill>
+              <a:srgbClr val="DB2777"/>
+            </a:solidFill>
+            <a:prstDash val="solid"/>
+          </a:ln>
+        </p:spPr>
+      </p:sp>
+      <p:sp>
+        <p:nvSpPr>
+          <p:cNvPr id="62" name="Text 60"/>
+          <p:cNvSpPr/>
+          <p:nvPr/>
+        </p:nvSpPr>
+        <p:spPr>
+          <a:xfrm>
+            <a:off x="6109855" y="4169664"/>
+            <a:ext cx="543652" cy="384048"/>
+          </a:xfrm>
+          <a:prstGeom prst="rect">
+            <a:avLst/>
+          </a:prstGeom>
+          <a:noFill/>
+          <a:ln/>
+        </p:spPr>
+        <p:txBody>
+          <a:bodyPr wrap="square" lIns="0" tIns="0" rIns="0" bIns="0" rtlCol="0" anchor="ctr"/>
+          <a:lstStyle/>
+          <a:p>
+            <a:pPr algn="ctr" indent="0" marL="0">
+              <a:buNone/>
+            </a:pPr>
+            <a:r>
+              <a:rPr lang="en-US" sz="900" b="1" dirty="0">
+                <a:solidFill>
+                  <a:srgbClr val="9D174D"/>
+                </a:solidFill>
+                <a:latin typeface="Trebuchet MS" pitchFamily="34" charset="0"/>
+                <a:ea typeface="Trebuchet MS" pitchFamily="34" charset="-122"/>
+                <a:cs typeface="Trebuchet MS" pitchFamily="34" charset="-120"/>
+              </a:rPr>
+              <a:t>a</a:t>
+            </a:r>
+            <a:endParaRPr lang="en-US" sz="900" dirty="0"/>
+          </a:p>
+        </p:txBody>
+      </p:sp>
+      <p:sp>
+        <p:nvSpPr>
+          <p:cNvPr id="63" name="Shape 61"/>
+          <p:cNvSpPr/>
+          <p:nvPr/>
+        </p:nvSpPr>
+        <p:spPr>
+          <a:xfrm>
+            <a:off x="6703799" y="4169664"/>
+            <a:ext cx="543652" cy="384048"/>
+          </a:xfrm>
+          <a:prstGeom prst="rect">
+            <a:avLst>
+              <a:gd name="adj" fmla="val 9524"/>
+            </a:avLst>
+          </a:prstGeom>
+          <a:solidFill>
+            <a:srgbClr val="FFFFFF"/>
+          </a:solidFill>
+          <a:ln w="12700">
+            <a:solidFill>
+              <a:srgbClr val="DB2777"/>
+            </a:solidFill>
+            <a:prstDash val="solid"/>
+          </a:ln>
+        </p:spPr>
+      </p:sp>
+      <p:sp>
+        <p:nvSpPr>
+          <p:cNvPr id="64" name="Text 62"/>
+          <p:cNvSpPr/>
+          <p:nvPr/>
+        </p:nvSpPr>
+        <p:spPr>
+          <a:xfrm>
+            <a:off x="6703799" y="4169664"/>
+            <a:ext cx="543652" cy="384048"/>
+          </a:xfrm>
+          <a:prstGeom prst="rect">
+            <a:avLst/>
+          </a:prstGeom>
+          <a:noFill/>
+          <a:ln/>
+        </p:spPr>
+        <p:txBody>
+          <a:bodyPr wrap="square" lIns="0" tIns="0" rIns="0" bIns="0" rtlCol="0" anchor="ctr"/>
+          <a:lstStyle/>
+          <a:p>
+            <a:pPr algn="ctr" indent="0" marL="0">
+              <a:buNone/>
+            </a:pPr>
+            <a:r>
+              <a:rPr lang="en-US" sz="900" b="1" dirty="0">
+                <a:solidFill>
+                  <a:srgbClr val="9D174D"/>
+                </a:solidFill>
+                <a:latin typeface="Trebuchet MS" pitchFamily="34" charset="0"/>
+                <a:ea typeface="Trebuchet MS" pitchFamily="34" charset="-122"/>
+                <a:cs typeface="Trebuchet MS" pitchFamily="34" charset="-120"/>
+              </a:rPr>
+              <a:t>t</a:t>
+            </a:r>
+            <a:endParaRPr lang="en-US" sz="900" dirty="0"/>
+          </a:p>
+        </p:txBody>
+      </p:sp>
+      <p:sp>
+        <p:nvSpPr>
+          <p:cNvPr id="65" name="Text 63"/>
+          <p:cNvSpPr/>
+          <p:nvPr/>
+        </p:nvSpPr>
+        <p:spPr>
+          <a:xfrm>
+            <a:off x="6703799" y="4572000"/>
+            <a:ext cx="543652" cy="219456"/>
+          </a:xfrm>
+          <a:prstGeom prst="rect">
+            <a:avLst/>
+          </a:prstGeom>
+          <a:noFill/>
+          <a:ln/>
+        </p:spPr>
+        <p:txBody>
+          <a:bodyPr wrap="square" lIns="0" tIns="0" rIns="0" bIns="0" rtlCol="0" anchor="t"/>
+          <a:lstStyle/>
+          <a:p>
+            <a:pPr algn="ctr" indent="0" marL="0">
+              <a:buNone/>
+            </a:pPr>
+            <a:r>
+              <a:rPr lang="en-US" sz="750" i="1" dirty="0">
+                <a:solidFill>
+                  <a:srgbClr val="94A3B8"/>
+                </a:solidFill>
+                <a:latin typeface="Calibri" pitchFamily="34" charset="0"/>
+                <a:ea typeface="Calibri" pitchFamily="34" charset="-122"/>
+                <a:cs typeface="Calibri" pitchFamily="34" charset="-120"/>
+              </a:rPr>
+              <a:t>/sh/</a:t>
+            </a:r>
+            <a:endParaRPr lang="en-US" sz="750" dirty="0"/>
+          </a:p>
+        </p:txBody>
+      </p:sp>
+      <p:sp>
+        <p:nvSpPr>
+          <p:cNvPr id="66" name="Shape 64"/>
+          <p:cNvSpPr/>
+          <p:nvPr/>
+        </p:nvSpPr>
+        <p:spPr>
+          <a:xfrm>
+            <a:off x="7297743" y="4169664"/>
+            <a:ext cx="543652" cy="384048"/>
+          </a:xfrm>
+          <a:prstGeom prst="rect">
+            <a:avLst>
+              <a:gd name="adj" fmla="val 9524"/>
+            </a:avLst>
+          </a:prstGeom>
+          <a:solidFill>
+            <a:srgbClr val="FFFFFF"/>
+          </a:solidFill>
+          <a:ln w="12700">
+            <a:solidFill>
+              <a:srgbClr val="DB2777"/>
+            </a:solidFill>
+            <a:prstDash val="solid"/>
+          </a:ln>
+        </p:spPr>
+      </p:sp>
+      <p:sp>
+        <p:nvSpPr>
+          <p:cNvPr id="67" name="Text 65"/>
+          <p:cNvSpPr/>
+          <p:nvPr/>
+        </p:nvSpPr>
+        <p:spPr>
+          <a:xfrm>
+            <a:off x="7297743" y="4169664"/>
+            <a:ext cx="543652" cy="384048"/>
+          </a:xfrm>
+          <a:prstGeom prst="rect">
+            <a:avLst/>
+          </a:prstGeom>
+          <a:noFill/>
+          <a:ln/>
+        </p:spPr>
+        <p:txBody>
+          <a:bodyPr wrap="square" lIns="0" tIns="0" rIns="0" bIns="0" rtlCol="0" anchor="ctr"/>
+          <a:lstStyle/>
+          <a:p>
+            <a:pPr algn="ctr" indent="0" marL="0">
+              <a:buNone/>
+            </a:pPr>
+            <a:r>
+              <a:rPr lang="en-US" sz="900" b="1" dirty="0">
+                <a:solidFill>
+                  <a:srgbClr val="9D174D"/>
+                </a:solidFill>
+                <a:latin typeface="Trebuchet MS" pitchFamily="34" charset="0"/>
+                <a:ea typeface="Trebuchet MS" pitchFamily="34" charset="-122"/>
+                <a:cs typeface="Trebuchet MS" pitchFamily="34" charset="-120"/>
+              </a:rPr>
+              <a:t>io</a:t>
+            </a:r>
+            <a:endParaRPr lang="en-US" sz="900" dirty="0"/>
+          </a:p>
+        </p:txBody>
+      </p:sp>
+      <p:sp>
+        <p:nvSpPr>
+          <p:cNvPr id="68" name="Shape 66"/>
+          <p:cNvSpPr/>
+          <p:nvPr/>
+        </p:nvSpPr>
+        <p:spPr>
+          <a:xfrm>
+            <a:off x="7891688" y="4169664"/>
+            <a:ext cx="543652" cy="384048"/>
+          </a:xfrm>
+          <a:prstGeom prst="rect">
+            <a:avLst>
+              <a:gd name="adj" fmla="val 9524"/>
+            </a:avLst>
+          </a:prstGeom>
+          <a:solidFill>
+            <a:srgbClr val="FFFFFF"/>
+          </a:solidFill>
+          <a:ln w="12700">
+            <a:solidFill>
+              <a:srgbClr val="DB2777"/>
+            </a:solidFill>
+            <a:prstDash val="solid"/>
+          </a:ln>
+        </p:spPr>
+      </p:sp>
+      <p:sp>
+        <p:nvSpPr>
+          <p:cNvPr id="69" name="Text 67"/>
+          <p:cNvSpPr/>
+          <p:nvPr/>
+        </p:nvSpPr>
+        <p:spPr>
+          <a:xfrm>
+            <a:off x="7891688" y="4169664"/>
+            <a:ext cx="543652" cy="384048"/>
+          </a:xfrm>
+          <a:prstGeom prst="rect">
+            <a:avLst/>
+          </a:prstGeom>
+          <a:noFill/>
+          <a:ln/>
+        </p:spPr>
+        <p:txBody>
+          <a:bodyPr wrap="square" lIns="0" tIns="0" rIns="0" bIns="0" rtlCol="0" anchor="ctr"/>
+          <a:lstStyle/>
+          <a:p>
+            <a:pPr algn="ctr" indent="0" marL="0">
+              <a:buNone/>
+            </a:pPr>
+            <a:r>
+              <a:rPr lang="en-US" sz="900" b="1" dirty="0">
+                <a:solidFill>
+                  <a:srgbClr val="9D174D"/>
+                </a:solidFill>
+                <a:latin typeface="Trebuchet MS" pitchFamily="34" charset="0"/>
+                <a:ea typeface="Trebuchet MS" pitchFamily="34" charset="-122"/>
+                <a:cs typeface="Trebuchet MS" pitchFamily="34" charset="-120"/>
+              </a:rPr>
+              <a:t>n</a:t>
             </a:r>
             <a:endParaRPr lang="en-US" sz="900" dirty="0"/>
           </a:p>
@@ -24822,7 +26820,7 @@
                 <a:ea typeface="Calibri" pitchFamily="34" charset="-122"/>
                 <a:cs typeface="Calibri" pitchFamily="34" charset="-120"/>
               </a:rPr>
-              <a:t>to weigh, pay</a:t>
+              <a:t>to hang, weigh, pay</a:t>
             </a:r>
             <a:endParaRPr lang="en-US" sz="850" dirty="0"/>
           </a:p>
@@ -26750,7 +28748,7 @@
                 <a:ea typeface="Calibri" pitchFamily="34" charset="-122"/>
                 <a:cs typeface="Calibri" pitchFamily="34" charset="-120"/>
               </a:rPr>
-              <a:t>to weigh, pay</a:t>
+              <a:t>to hang, weigh, pay</a:t>
             </a:r>
             <a:endParaRPr lang="en-US" sz="850" dirty="0"/>
           </a:p>
@@ -28196,7 +30194,7 @@
                 <a:ea typeface="Calibri" pitchFamily="34" charset="-122"/>
                 <a:cs typeface="Calibri" pitchFamily="34" charset="-120"/>
               </a:rPr>
-              <a:t>to weigh, pay</a:t>
+              <a:t>to hang, weigh, pay</a:t>
             </a:r>
             <a:endParaRPr lang="en-US" sz="850" dirty="0"/>
           </a:p>
@@ -28976,46 +30974,7 @@
       </p:sp>
       <p:sp>
         <p:nvSpPr>
-          <p:cNvPr id="48" name="Text 46"/>
-          <p:cNvSpPr/>
-          <p:nvPr/>
-        </p:nvSpPr>
-        <p:spPr>
-          <a:xfrm>
-            <a:off x="3403397" y="4572000"/>
-            <a:ext cx="676656" cy="219456"/>
-          </a:xfrm>
-          <a:prstGeom prst="rect">
-            <a:avLst/>
-          </a:prstGeom>
-          <a:noFill/>
-          <a:ln/>
-        </p:spPr>
-        <p:txBody>
-          <a:bodyPr wrap="square" lIns="0" tIns="0" rIns="0" bIns="0" rtlCol="0" anchor="t"/>
-          <a:lstStyle/>
-          <a:p>
-            <a:pPr algn="ctr" indent="0" marL="0">
-              <a:buNone/>
-            </a:pPr>
-            <a:r>
-              <a:rPr lang="en-US" sz="750" i="1" dirty="0">
-                <a:solidFill>
-                  <a:srgbClr val="94A3B8"/>
-                </a:solidFill>
-                <a:latin typeface="Calibri" pitchFamily="34" charset="0"/>
-                <a:ea typeface="Calibri" pitchFamily="34" charset="-122"/>
-                <a:cs typeface="Calibri" pitchFamily="34" charset="-120"/>
-              </a:rPr>
-              <a:t>/k/</a:t>
-            </a:r>
-            <a:endParaRPr lang="en-US" sz="750" dirty="0"/>
-          </a:p>
-        </p:txBody>
-      </p:sp>
-      <p:sp>
-        <p:nvSpPr>
-          <p:cNvPr id="49" name="Shape 47"/>
+          <p:cNvPr id="48" name="Shape 46"/>
           <p:cNvSpPr/>
           <p:nvPr/>
         </p:nvSpPr>
@@ -29042,7 +31001,7 @@
       </p:sp>
       <p:sp>
         <p:nvSpPr>
-          <p:cNvPr id="50" name="Text 48"/>
+          <p:cNvPr id="49" name="Text 47"/>
           <p:cNvSpPr/>
           <p:nvPr/>
         </p:nvSpPr>
@@ -29081,7 +31040,7 @@
       </p:sp>
       <p:sp>
         <p:nvSpPr>
-          <p:cNvPr id="51" name="Shape 49"/>
+          <p:cNvPr id="50" name="Shape 48"/>
           <p:cNvSpPr/>
           <p:nvPr/>
         </p:nvSpPr>
@@ -29108,7 +31067,7 @@
       </p:sp>
       <p:sp>
         <p:nvSpPr>
-          <p:cNvPr id="52" name="Text 50"/>
+          <p:cNvPr id="51" name="Text 49"/>
           <p:cNvSpPr/>
           <p:nvPr/>
         </p:nvSpPr>
@@ -29147,7 +31106,7 @@
       </p:sp>
       <p:sp>
         <p:nvSpPr>
-          <p:cNvPr id="53" name="Shape 51"/>
+          <p:cNvPr id="52" name="Shape 50"/>
           <p:cNvSpPr/>
           <p:nvPr/>
         </p:nvSpPr>
@@ -29174,7 +31133,7 @@
       </p:sp>
       <p:sp>
         <p:nvSpPr>
-          <p:cNvPr id="54" name="Text 52"/>
+          <p:cNvPr id="53" name="Text 51"/>
           <p:cNvSpPr/>
           <p:nvPr/>
         </p:nvSpPr>
@@ -29213,7 +31172,7 @@
       </p:sp>
       <p:sp>
         <p:nvSpPr>
-          <p:cNvPr id="55" name="Shape 53"/>
+          <p:cNvPr id="54" name="Shape 52"/>
           <p:cNvSpPr/>
           <p:nvPr/>
         </p:nvSpPr>
@@ -29240,7 +31199,7 @@
       </p:sp>
       <p:sp>
         <p:nvSpPr>
-          <p:cNvPr id="56" name="Text 54"/>
+          <p:cNvPr id="55" name="Text 53"/>
           <p:cNvSpPr/>
           <p:nvPr/>
         </p:nvSpPr>
@@ -29279,7 +31238,7 @@
       </p:sp>
       <p:sp>
         <p:nvSpPr>
-          <p:cNvPr id="57" name="Shape 55"/>
+          <p:cNvPr id="56" name="Shape 54"/>
           <p:cNvSpPr/>
           <p:nvPr/>
         </p:nvSpPr>
@@ -29306,7 +31265,7 @@
       </p:sp>
       <p:sp>
         <p:nvSpPr>
-          <p:cNvPr id="58" name="Text 56"/>
+          <p:cNvPr id="57" name="Text 55"/>
           <p:cNvSpPr/>
           <p:nvPr/>
         </p:nvSpPr>
@@ -29345,7 +31304,7 @@
       </p:sp>
       <p:sp>
         <p:nvSpPr>
-          <p:cNvPr id="59" name="Shape 57"/>
+          <p:cNvPr id="58" name="Shape 56"/>
           <p:cNvSpPr/>
           <p:nvPr/>
         </p:nvSpPr>
@@ -29372,7 +31331,7 @@
       </p:sp>
       <p:sp>
         <p:nvSpPr>
-          <p:cNvPr id="60" name="Text 58"/>
+          <p:cNvPr id="59" name="Text 57"/>
           <p:cNvSpPr/>
           <p:nvPr/>
         </p:nvSpPr>
@@ -29411,7 +31370,7 @@
       </p:sp>
       <p:sp>
         <p:nvSpPr>
-          <p:cNvPr id="61" name="Text 59"/>
+          <p:cNvPr id="60" name="Text 58"/>
           <p:cNvSpPr/>
           <p:nvPr/>
         </p:nvSpPr>
@@ -29873,7 +31832,7 @@
                 <a:ea typeface="Trebuchet MS" pitchFamily="34" charset="-122"/>
                 <a:cs typeface="Trebuchet MS" pitchFamily="34" charset="-120"/>
               </a:rPr>
-              <a:t>expenses</a:t>
+              <a:t>suspense</a:t>
             </a:r>
             <a:endParaRPr lang="en-US" sz="2800" dirty="0"/>
           </a:p>
@@ -30700,7 +32659,7 @@
                 <a:ea typeface="Trebuchet MS" pitchFamily="34" charset="-122"/>
                 <a:cs typeface="Trebuchet MS" pitchFamily="34" charset="-120"/>
               </a:rPr>
-              <a:t>expenses</a:t>
+              <a:t>suspense</a:t>
             </a:r>
             <a:endParaRPr lang="en-US" sz="2800" dirty="0"/>
           </a:p>
@@ -30839,7 +32798,7 @@
                 <a:ea typeface="Trebuchet MS" pitchFamily="34" charset="-122"/>
                 <a:cs typeface="Trebuchet MS" pitchFamily="34" charset="-120"/>
               </a:rPr>
-              <a:t>ex</a:t>
+              <a:t>sus</a:t>
             </a:r>
             <a:endParaRPr lang="en-US" sz="1300" dirty="0"/>
           </a:p>
@@ -30878,7 +32837,7 @@
                 <a:ea typeface="Calibri" pitchFamily="34" charset="-122"/>
                 <a:cs typeface="Calibri" pitchFamily="34" charset="-120"/>
               </a:rPr>
-              <a:t>out</a:t>
+              <a:t>under, up from below</a:t>
             </a:r>
             <a:endParaRPr lang="en-US" sz="850" dirty="0"/>
           </a:p>
@@ -30886,7 +32845,46 @@
       </p:sp>
       <p:sp>
         <p:nvSpPr>
-          <p:cNvPr id="19" name="Shape 17"/>
+          <p:cNvPr id="19" name="Text 17"/>
+          <p:cNvSpPr/>
+          <p:nvPr/>
+        </p:nvSpPr>
+        <p:spPr>
+          <a:xfrm>
+            <a:off x="2221992" y="2752344"/>
+            <a:ext cx="1828800" cy="182880"/>
+          </a:xfrm>
+          <a:prstGeom prst="rect">
+            <a:avLst/>
+          </a:prstGeom>
+          <a:noFill/>
+          <a:ln/>
+        </p:spPr>
+        <p:txBody>
+          <a:bodyPr wrap="square" lIns="0" tIns="0" rIns="0" bIns="0" rtlCol="0" anchor="t"/>
+          <a:lstStyle/>
+          <a:p>
+            <a:pPr algn="ctr" indent="0" marL="0">
+              <a:buNone/>
+            </a:pPr>
+            <a:r>
+              <a:rPr lang="en-US" sz="700" i="1" dirty="0">
+                <a:solidFill>
+                  <a:srgbClr val="94A3B8"/>
+                </a:solidFill>
+                <a:latin typeface="Calibri" pitchFamily="34" charset="0"/>
+                <a:ea typeface="Calibri" pitchFamily="34" charset="-122"/>
+                <a:cs typeface="Calibri" pitchFamily="34" charset="-120"/>
+              </a:rPr>
+              <a:t>sub → sus before 'p'</a:t>
+            </a:r>
+            <a:endParaRPr lang="en-US" sz="700" dirty="0"/>
+          </a:p>
+        </p:txBody>
+      </p:sp>
+      <p:sp>
+        <p:nvSpPr>
+          <p:cNvPr id="20" name="Shape 18"/>
           <p:cNvSpPr/>
           <p:nvPr/>
         </p:nvSpPr>
@@ -30920,7 +32918,7 @@
       </p:sp>
       <p:sp>
         <p:nvSpPr>
-          <p:cNvPr id="20" name="Text 18"/>
+          <p:cNvPr id="21" name="Text 19"/>
           <p:cNvSpPr/>
           <p:nvPr/>
         </p:nvSpPr>
@@ -30959,7 +32957,7 @@
       </p:sp>
       <p:sp>
         <p:nvSpPr>
-          <p:cNvPr id="21" name="Text 19"/>
+          <p:cNvPr id="22" name="Text 20"/>
           <p:cNvSpPr/>
           <p:nvPr/>
         </p:nvSpPr>
@@ -30990,7 +32988,7 @@
                 <a:ea typeface="Calibri" pitchFamily="34" charset="-122"/>
                 <a:cs typeface="Calibri" pitchFamily="34" charset="-120"/>
               </a:rPr>
-              <a:t>to weigh, pay</a:t>
+              <a:t>to hang, weigh, pay</a:t>
             </a:r>
             <a:endParaRPr lang="en-US" sz="850" dirty="0"/>
           </a:p>
@@ -30998,7 +32996,7 @@
       </p:sp>
       <p:sp>
         <p:nvSpPr>
-          <p:cNvPr id="22" name="Shape 20"/>
+          <p:cNvPr id="23" name="Shape 21"/>
           <p:cNvSpPr/>
           <p:nvPr/>
         </p:nvSpPr>
@@ -31032,7 +33030,7 @@
       </p:sp>
       <p:sp>
         <p:nvSpPr>
-          <p:cNvPr id="23" name="Text 21"/>
+          <p:cNvPr id="24" name="Text 22"/>
           <p:cNvSpPr/>
           <p:nvPr/>
         </p:nvSpPr>
@@ -31063,7 +33061,7 @@
                 <a:ea typeface="Trebuchet MS" pitchFamily="34" charset="-122"/>
                 <a:cs typeface="Trebuchet MS" pitchFamily="34" charset="-120"/>
               </a:rPr>
-              <a:t>es</a:t>
+              <a:t>e</a:t>
             </a:r>
             <a:endParaRPr lang="en-US" sz="1300" dirty="0"/>
           </a:p>
@@ -31071,7 +33069,7 @@
       </p:sp>
       <p:sp>
         <p:nvSpPr>
-          <p:cNvPr id="24" name="Text 22"/>
+          <p:cNvPr id="25" name="Text 23"/>
           <p:cNvSpPr/>
           <p:nvPr/>
         </p:nvSpPr>
@@ -31102,7 +33100,7 @@
                 <a:ea typeface="Calibri" pitchFamily="34" charset="-122"/>
                 <a:cs typeface="Calibri" pitchFamily="34" charset="-120"/>
               </a:rPr>
-              <a:t>plural</a:t>
+              <a:t>noun-forming ending</a:t>
             </a:r>
             <a:endParaRPr lang="en-US" sz="850" dirty="0"/>
           </a:p>
@@ -31110,7 +33108,7 @@
       </p:sp>
       <p:sp>
         <p:nvSpPr>
-          <p:cNvPr id="25" name="Shape 23"/>
+          <p:cNvPr id="26" name="Shape 24"/>
           <p:cNvSpPr/>
           <p:nvPr/>
         </p:nvSpPr>
@@ -31137,7 +33135,7 @@
       </p:sp>
       <p:sp>
         <p:nvSpPr>
-          <p:cNvPr id="26" name="Text 24"/>
+          <p:cNvPr id="27" name="Text 25"/>
           <p:cNvSpPr/>
           <p:nvPr/>
         </p:nvSpPr>
@@ -31176,7 +33174,7 @@
       </p:sp>
       <p:sp>
         <p:nvSpPr>
-          <p:cNvPr id="27" name="Shape 25"/>
+          <p:cNvPr id="28" name="Shape 26"/>
           <p:cNvSpPr/>
           <p:nvPr/>
         </p:nvSpPr>
@@ -31203,7 +33201,7 @@
       </p:sp>
       <p:sp>
         <p:nvSpPr>
-          <p:cNvPr id="28" name="Text 26"/>
+          <p:cNvPr id="29" name="Text 27"/>
           <p:cNvSpPr/>
           <p:nvPr/>
         </p:nvSpPr>
@@ -31242,7 +33240,7 @@
       </p:sp>
       <p:sp>
         <p:nvSpPr>
-          <p:cNvPr id="29" name="Shape 27"/>
+          <p:cNvPr id="30" name="Shape 28"/>
           <p:cNvSpPr/>
           <p:nvPr/>
         </p:nvSpPr>
@@ -31269,7 +33267,7 @@
       </p:sp>
       <p:sp>
         <p:nvSpPr>
-          <p:cNvPr id="30" name="Text 28"/>
+          <p:cNvPr id="31" name="Text 29"/>
           <p:cNvSpPr/>
           <p:nvPr/>
         </p:nvSpPr>
@@ -31308,7 +33306,7 @@
       </p:sp>
       <p:sp>
         <p:nvSpPr>
-          <p:cNvPr id="31" name="Shape 29"/>
+          <p:cNvPr id="32" name="Shape 30"/>
           <p:cNvSpPr/>
           <p:nvPr/>
         </p:nvSpPr>
@@ -31335,7 +33333,7 @@
       </p:sp>
       <p:sp>
         <p:nvSpPr>
-          <p:cNvPr id="32" name="Text 30"/>
+          <p:cNvPr id="33" name="Text 31"/>
           <p:cNvSpPr/>
           <p:nvPr/>
         </p:nvSpPr>
@@ -31797,7 +33795,7 @@
                 <a:ea typeface="Trebuchet MS" pitchFamily="34" charset="-122"/>
                 <a:cs typeface="Trebuchet MS" pitchFamily="34" charset="-120"/>
               </a:rPr>
-              <a:t>expenses</a:t>
+              <a:t>suspense</a:t>
             </a:r>
             <a:endParaRPr lang="en-US" sz="2800" dirty="0"/>
           </a:p>
@@ -31936,7 +33934,7 @@
                 <a:ea typeface="Trebuchet MS" pitchFamily="34" charset="-122"/>
                 <a:cs typeface="Trebuchet MS" pitchFamily="34" charset="-120"/>
               </a:rPr>
-              <a:t>ex</a:t>
+              <a:t>sus</a:t>
             </a:r>
             <a:endParaRPr lang="en-US" sz="1300" dirty="0"/>
           </a:p>
@@ -31975,7 +33973,7 @@
                 <a:ea typeface="Calibri" pitchFamily="34" charset="-122"/>
                 <a:cs typeface="Calibri" pitchFamily="34" charset="-120"/>
               </a:rPr>
-              <a:t>out</a:t>
+              <a:t>under, up from below</a:t>
             </a:r>
             <a:endParaRPr lang="en-US" sz="850" dirty="0"/>
           </a:p>
@@ -31983,7 +33981,46 @@
       </p:sp>
       <p:sp>
         <p:nvSpPr>
-          <p:cNvPr id="19" name="Shape 17"/>
+          <p:cNvPr id="19" name="Text 17"/>
+          <p:cNvSpPr/>
+          <p:nvPr/>
+        </p:nvSpPr>
+        <p:spPr>
+          <a:xfrm>
+            <a:off x="2221992" y="2752344"/>
+            <a:ext cx="1828800" cy="182880"/>
+          </a:xfrm>
+          <a:prstGeom prst="rect">
+            <a:avLst/>
+          </a:prstGeom>
+          <a:noFill/>
+          <a:ln/>
+        </p:spPr>
+        <p:txBody>
+          <a:bodyPr wrap="square" lIns="0" tIns="0" rIns="0" bIns="0" rtlCol="0" anchor="t"/>
+          <a:lstStyle/>
+          <a:p>
+            <a:pPr algn="ctr" indent="0" marL="0">
+              <a:buNone/>
+            </a:pPr>
+            <a:r>
+              <a:rPr lang="en-US" sz="700" i="1" dirty="0">
+                <a:solidFill>
+                  <a:srgbClr val="94A3B8"/>
+                </a:solidFill>
+                <a:latin typeface="Calibri" pitchFamily="34" charset="0"/>
+                <a:ea typeface="Calibri" pitchFamily="34" charset="-122"/>
+                <a:cs typeface="Calibri" pitchFamily="34" charset="-120"/>
+              </a:rPr>
+              <a:t>sub → sus before 'p'</a:t>
+            </a:r>
+            <a:endParaRPr lang="en-US" sz="700" dirty="0"/>
+          </a:p>
+        </p:txBody>
+      </p:sp>
+      <p:sp>
+        <p:nvSpPr>
+          <p:cNvPr id="20" name="Shape 18"/>
           <p:cNvSpPr/>
           <p:nvPr/>
         </p:nvSpPr>
@@ -32017,7 +34054,7 @@
       </p:sp>
       <p:sp>
         <p:nvSpPr>
-          <p:cNvPr id="20" name="Text 18"/>
+          <p:cNvPr id="21" name="Text 19"/>
           <p:cNvSpPr/>
           <p:nvPr/>
         </p:nvSpPr>
@@ -32056,7 +34093,7 @@
       </p:sp>
       <p:sp>
         <p:nvSpPr>
-          <p:cNvPr id="21" name="Text 19"/>
+          <p:cNvPr id="22" name="Text 20"/>
           <p:cNvSpPr/>
           <p:nvPr/>
         </p:nvSpPr>
@@ -32087,7 +34124,7 @@
                 <a:ea typeface="Calibri" pitchFamily="34" charset="-122"/>
                 <a:cs typeface="Calibri" pitchFamily="34" charset="-120"/>
               </a:rPr>
-              <a:t>to weigh, pay</a:t>
+              <a:t>to hang, weigh, pay</a:t>
             </a:r>
             <a:endParaRPr lang="en-US" sz="850" dirty="0"/>
           </a:p>
@@ -32095,7 +34132,7 @@
       </p:sp>
       <p:sp>
         <p:nvSpPr>
-          <p:cNvPr id="22" name="Shape 20"/>
+          <p:cNvPr id="23" name="Shape 21"/>
           <p:cNvSpPr/>
           <p:nvPr/>
         </p:nvSpPr>
@@ -32129,7 +34166,7 @@
       </p:sp>
       <p:sp>
         <p:nvSpPr>
-          <p:cNvPr id="23" name="Text 21"/>
+          <p:cNvPr id="24" name="Text 22"/>
           <p:cNvSpPr/>
           <p:nvPr/>
         </p:nvSpPr>
@@ -32160,7 +34197,7 @@
                 <a:ea typeface="Trebuchet MS" pitchFamily="34" charset="-122"/>
                 <a:cs typeface="Trebuchet MS" pitchFamily="34" charset="-120"/>
               </a:rPr>
-              <a:t>es</a:t>
+              <a:t>e</a:t>
             </a:r>
             <a:endParaRPr lang="en-US" sz="1300" dirty="0"/>
           </a:p>
@@ -32168,7 +34205,7 @@
       </p:sp>
       <p:sp>
         <p:nvSpPr>
-          <p:cNvPr id="24" name="Text 22"/>
+          <p:cNvPr id="25" name="Text 23"/>
           <p:cNvSpPr/>
           <p:nvPr/>
         </p:nvSpPr>
@@ -32199,7 +34236,7 @@
                 <a:ea typeface="Calibri" pitchFamily="34" charset="-122"/>
                 <a:cs typeface="Calibri" pitchFamily="34" charset="-120"/>
               </a:rPr>
-              <a:t>plural</a:t>
+              <a:t>noun-forming ending</a:t>
             </a:r>
             <a:endParaRPr lang="en-US" sz="850" dirty="0"/>
           </a:p>
@@ -32207,7 +34244,7 @@
       </p:sp>
       <p:sp>
         <p:nvSpPr>
-          <p:cNvPr id="25" name="Shape 23"/>
+          <p:cNvPr id="26" name="Shape 24"/>
           <p:cNvSpPr/>
           <p:nvPr/>
         </p:nvSpPr>
@@ -32234,7 +34271,7 @@
       </p:sp>
       <p:sp>
         <p:nvSpPr>
-          <p:cNvPr id="26" name="Text 24"/>
+          <p:cNvPr id="27" name="Text 25"/>
           <p:cNvSpPr/>
           <p:nvPr/>
         </p:nvSpPr>
@@ -32273,7 +34310,7 @@
       </p:sp>
       <p:sp>
         <p:nvSpPr>
-          <p:cNvPr id="27" name="Shape 25"/>
+          <p:cNvPr id="28" name="Shape 26"/>
           <p:cNvSpPr/>
           <p:nvPr/>
         </p:nvSpPr>
@@ -32300,13 +34337,13 @@
       </p:sp>
       <p:sp>
         <p:nvSpPr>
-          <p:cNvPr id="28" name="Shape 26"/>
-          <p:cNvSpPr/>
-          <p:nvPr/>
-        </p:nvSpPr>
-        <p:spPr>
-          <a:xfrm>
-            <a:off x="2313432" y="3364992"/>
+          <p:cNvPr id="29" name="Shape 27"/>
+          <p:cNvSpPr/>
+          <p:nvPr/>
+        </p:nvSpPr>
+        <p:spPr>
+          <a:xfrm>
+            <a:off x="2999232" y="3364992"/>
             <a:ext cx="1645920" cy="475488"/>
           </a:xfrm>
           <a:prstGeom prst="rect">
@@ -32327,13 +34364,13 @@
       </p:sp>
       <p:sp>
         <p:nvSpPr>
-          <p:cNvPr id="29" name="Text 27"/>
-          <p:cNvSpPr/>
-          <p:nvPr/>
-        </p:nvSpPr>
-        <p:spPr>
-          <a:xfrm>
-            <a:off x="2313432" y="3364992"/>
+          <p:cNvPr id="30" name="Text 28"/>
+          <p:cNvSpPr/>
+          <p:nvPr/>
+        </p:nvSpPr>
+        <p:spPr>
+          <a:xfrm>
+            <a:off x="2999232" y="3364992"/>
             <a:ext cx="1645920" cy="475488"/>
           </a:xfrm>
           <a:prstGeom prst="rect">
@@ -32358,7 +34395,7 @@
                 <a:ea typeface="Trebuchet MS" pitchFamily="34" charset="-122"/>
                 <a:cs typeface="Trebuchet MS" pitchFamily="34" charset="-120"/>
               </a:rPr>
-              <a:t>ex</a:t>
+              <a:t>sus</a:t>
             </a:r>
             <a:endParaRPr lang="en-US" sz="1400" dirty="0"/>
           </a:p>
@@ -32366,14 +34403,14 @@
       </p:sp>
       <p:sp>
         <p:nvSpPr>
-          <p:cNvPr id="30" name="Text 28"/>
-          <p:cNvSpPr/>
-          <p:nvPr/>
-        </p:nvSpPr>
-        <p:spPr>
-          <a:xfrm>
-            <a:off x="3959352" y="3364992"/>
-            <a:ext cx="411480" cy="475488"/>
+          <p:cNvPr id="31" name="Text 29"/>
+          <p:cNvSpPr/>
+          <p:nvPr/>
+        </p:nvSpPr>
+        <p:spPr>
+          <a:xfrm>
+            <a:off x="4645152" y="3364992"/>
+            <a:ext cx="1097280" cy="475488"/>
           </a:xfrm>
           <a:prstGeom prst="rect">
             <a:avLst/>
@@ -32405,13 +34442,13 @@
       </p:sp>
       <p:sp>
         <p:nvSpPr>
-          <p:cNvPr id="31" name="Shape 29"/>
-          <p:cNvSpPr/>
-          <p:nvPr/>
-        </p:nvSpPr>
-        <p:spPr>
-          <a:xfrm>
-            <a:off x="4370832" y="3364992"/>
+          <p:cNvPr id="32" name="Shape 30"/>
+          <p:cNvSpPr/>
+          <p:nvPr/>
+        </p:nvSpPr>
+        <p:spPr>
+          <a:xfrm>
+            <a:off x="5742432" y="3364992"/>
             <a:ext cx="1645920" cy="475488"/>
           </a:xfrm>
           <a:prstGeom prst="rect">
@@ -32432,13 +34469,13 @@
       </p:sp>
       <p:sp>
         <p:nvSpPr>
-          <p:cNvPr id="32" name="Text 30"/>
-          <p:cNvSpPr/>
-          <p:nvPr/>
-        </p:nvSpPr>
-        <p:spPr>
-          <a:xfrm>
-            <a:off x="4370832" y="3364992"/>
+          <p:cNvPr id="33" name="Text 31"/>
+          <p:cNvSpPr/>
+          <p:nvPr/>
+        </p:nvSpPr>
+        <p:spPr>
+          <a:xfrm>
+            <a:off x="5742432" y="3364992"/>
             <a:ext cx="1645920" cy="475488"/>
           </a:xfrm>
           <a:prstGeom prst="rect">
@@ -32463,7 +34500,7 @@
                 <a:ea typeface="Trebuchet MS" pitchFamily="34" charset="-122"/>
                 <a:cs typeface="Trebuchet MS" pitchFamily="34" charset="-120"/>
               </a:rPr>
-              <a:t>pen</a:t>
+              <a:t>pense</a:t>
             </a:r>
             <a:endParaRPr lang="en-US" sz="1400" dirty="0"/>
           </a:p>
@@ -32471,106 +34508,67 @@
       </p:sp>
       <p:sp>
         <p:nvSpPr>
-          <p:cNvPr id="33" name="Text 31"/>
-          <p:cNvSpPr/>
-          <p:nvPr/>
-        </p:nvSpPr>
-        <p:spPr>
-          <a:xfrm>
-            <a:off x="6016752" y="3364992"/>
-            <a:ext cx="411480" cy="475488"/>
-          </a:xfrm>
-          <a:prstGeom prst="rect">
-            <a:avLst/>
-          </a:prstGeom>
-          <a:noFill/>
-          <a:ln/>
-        </p:spPr>
-        <p:txBody>
-          <a:bodyPr wrap="square" lIns="0" tIns="0" rIns="0" bIns="0" rtlCol="0" anchor="ctr"/>
-          <a:lstStyle/>
-          <a:p>
-            <a:pPr algn="ctr" indent="0" marL="0">
-              <a:buNone/>
-            </a:pPr>
-            <a:r>
-              <a:rPr lang="en-US" sz="1600" b="1" dirty="0">
-                <a:solidFill>
-                  <a:srgbClr val="0D9488"/>
+          <p:cNvPr id="34" name="Shape 32"/>
+          <p:cNvSpPr/>
+          <p:nvPr/>
+        </p:nvSpPr>
+        <p:spPr>
+          <a:xfrm>
+            <a:off x="365760" y="4096512"/>
+            <a:ext cx="1371600" cy="804672"/>
+          </a:xfrm>
+          <a:prstGeom prst="rect">
+            <a:avLst>
+              <a:gd name="adj" fmla="val 6818"/>
+            </a:avLst>
+          </a:prstGeom>
+          <a:solidFill>
+            <a:srgbClr val="E2E8F0"/>
+          </a:solidFill>
+          <a:ln w="12700">
+            <a:solidFill>
+              <a:srgbClr val="E2E8F0"/>
+            </a:solidFill>
+            <a:prstDash val="solid"/>
+          </a:ln>
+        </p:spPr>
+      </p:sp>
+      <p:sp>
+        <p:nvSpPr>
+          <p:cNvPr id="35" name="Text 33"/>
+          <p:cNvSpPr/>
+          <p:nvPr/>
+        </p:nvSpPr>
+        <p:spPr>
+          <a:xfrm>
+            <a:off x="365760" y="4096512"/>
+            <a:ext cx="1371600" cy="804672"/>
+          </a:xfrm>
+          <a:prstGeom prst="rect">
+            <a:avLst/>
+          </a:prstGeom>
+          <a:noFill/>
+          <a:ln/>
+        </p:spPr>
+        <p:txBody>
+          <a:bodyPr wrap="square" lIns="0" tIns="0" rIns="0" bIns="0" rtlCol="0" anchor="ctr"/>
+          <a:lstStyle/>
+          <a:p>
+            <a:pPr algn="ctr" indent="0" marL="0">
+              <a:buNone/>
+            </a:pPr>
+            <a:r>
+              <a:rPr lang="en-US" sz="1100" b="1" dirty="0">
+                <a:solidFill>
+                  <a:srgbClr val="475569"/>
                 </a:solidFill>
                 <a:latin typeface="Trebuchet MS" pitchFamily="34" charset="0"/>
                 <a:ea typeface="Trebuchet MS" pitchFamily="34" charset="-122"/>
                 <a:cs typeface="Trebuchet MS" pitchFamily="34" charset="-120"/>
               </a:rPr>
-              <a:t>·</a:t>
-            </a:r>
-            <a:endParaRPr lang="en-US" sz="1600" dirty="0"/>
-          </a:p>
-        </p:txBody>
-      </p:sp>
-      <p:sp>
-        <p:nvSpPr>
-          <p:cNvPr id="34" name="Shape 32"/>
-          <p:cNvSpPr/>
-          <p:nvPr/>
-        </p:nvSpPr>
-        <p:spPr>
-          <a:xfrm>
-            <a:off x="6428232" y="3364992"/>
-            <a:ext cx="1645920" cy="475488"/>
-          </a:xfrm>
-          <a:prstGeom prst="rect">
-            <a:avLst>
-              <a:gd name="adj" fmla="val 9615"/>
-            </a:avLst>
-          </a:prstGeom>
-          <a:solidFill>
-            <a:srgbClr val="FFFFFF"/>
-          </a:solidFill>
-          <a:ln w="12700">
-            <a:solidFill>
-              <a:srgbClr val="0D9488"/>
-            </a:solidFill>
-            <a:prstDash val="solid"/>
-          </a:ln>
-        </p:spPr>
-      </p:sp>
-      <p:sp>
-        <p:nvSpPr>
-          <p:cNvPr id="35" name="Text 33"/>
-          <p:cNvSpPr/>
-          <p:nvPr/>
-        </p:nvSpPr>
-        <p:spPr>
-          <a:xfrm>
-            <a:off x="6428232" y="3364992"/>
-            <a:ext cx="1645920" cy="475488"/>
-          </a:xfrm>
-          <a:prstGeom prst="rect">
-            <a:avLst/>
-          </a:prstGeom>
-          <a:noFill/>
-          <a:ln/>
-        </p:spPr>
-        <p:txBody>
-          <a:bodyPr wrap="square" lIns="0" tIns="0" rIns="0" bIns="0" rtlCol="0" anchor="ctr"/>
-          <a:lstStyle/>
-          <a:p>
-            <a:pPr algn="ctr" indent="0" marL="0">
-              <a:buNone/>
-            </a:pPr>
-            <a:r>
-              <a:rPr lang="en-US" sz="1400" b="1" dirty="0">
-                <a:solidFill>
-                  <a:srgbClr val="0D9488"/>
-                </a:solidFill>
-                <a:latin typeface="Trebuchet MS" pitchFamily="34" charset="0"/>
-                <a:ea typeface="Trebuchet MS" pitchFamily="34" charset="-122"/>
-                <a:cs typeface="Trebuchet MS" pitchFamily="34" charset="-120"/>
-              </a:rPr>
-              <a:t>ses</a:t>
-            </a:r>
-            <a:endParaRPr lang="en-US" sz="1400" dirty="0"/>
+              <a:t>Phonemes</a:t>
+            </a:r>
+            <a:endParaRPr lang="en-US" sz="1100" dirty="0"/>
           </a:p>
         </p:txBody>
       </p:sp>
@@ -32582,8 +34580,8 @@
         </p:nvSpPr>
         <p:spPr>
           <a:xfrm>
-            <a:off x="365760" y="4096512"/>
-            <a:ext cx="1371600" cy="804672"/>
+            <a:off x="1874520" y="4096512"/>
+            <a:ext cx="6903720" cy="804672"/>
           </a:xfrm>
           <a:prstGeom prst="rect">
             <a:avLst>
@@ -32591,85 +34589,19 @@
             </a:avLst>
           </a:prstGeom>
           <a:solidFill>
-            <a:srgbClr val="E2E8F0"/>
+            <a:srgbClr val="F8FAFC"/>
           </a:solidFill>
           <a:ln w="12700">
             <a:solidFill>
               <a:srgbClr val="E2E8F0"/>
             </a:solidFill>
-            <a:prstDash val="solid"/>
+            <a:prstDash val="dash"/>
           </a:ln>
         </p:spPr>
       </p:sp>
       <p:sp>
         <p:nvSpPr>
           <p:cNvPr id="37" name="Text 35"/>
-          <p:cNvSpPr/>
-          <p:nvPr/>
-        </p:nvSpPr>
-        <p:spPr>
-          <a:xfrm>
-            <a:off x="365760" y="4096512"/>
-            <a:ext cx="1371600" cy="804672"/>
-          </a:xfrm>
-          <a:prstGeom prst="rect">
-            <a:avLst/>
-          </a:prstGeom>
-          <a:noFill/>
-          <a:ln/>
-        </p:spPr>
-        <p:txBody>
-          <a:bodyPr wrap="square" lIns="0" tIns="0" rIns="0" bIns="0" rtlCol="0" anchor="ctr"/>
-          <a:lstStyle/>
-          <a:p>
-            <a:pPr algn="ctr" indent="0" marL="0">
-              <a:buNone/>
-            </a:pPr>
-            <a:r>
-              <a:rPr lang="en-US" sz="1100" b="1" dirty="0">
-                <a:solidFill>
-                  <a:srgbClr val="475569"/>
-                </a:solidFill>
-                <a:latin typeface="Trebuchet MS" pitchFamily="34" charset="0"/>
-                <a:ea typeface="Trebuchet MS" pitchFamily="34" charset="-122"/>
-                <a:cs typeface="Trebuchet MS" pitchFamily="34" charset="-120"/>
-              </a:rPr>
-              <a:t>Phonemes</a:t>
-            </a:r>
-            <a:endParaRPr lang="en-US" sz="1100" dirty="0"/>
-          </a:p>
-        </p:txBody>
-      </p:sp>
-      <p:sp>
-        <p:nvSpPr>
-          <p:cNvPr id="38" name="Shape 36"/>
-          <p:cNvSpPr/>
-          <p:nvPr/>
-        </p:nvSpPr>
-        <p:spPr>
-          <a:xfrm>
-            <a:off x="1874520" y="4096512"/>
-            <a:ext cx="6903720" cy="804672"/>
-          </a:xfrm>
-          <a:prstGeom prst="rect">
-            <a:avLst>
-              <a:gd name="adj" fmla="val 6818"/>
-            </a:avLst>
-          </a:prstGeom>
-          <a:solidFill>
-            <a:srgbClr val="F8FAFC"/>
-          </a:solidFill>
-          <a:ln w="12700">
-            <a:solidFill>
-              <a:srgbClr val="E2E8F0"/>
-            </a:solidFill>
-            <a:prstDash val="dash"/>
-          </a:ln>
-        </p:spPr>
-      </p:sp>
-      <p:sp>
-        <p:nvSpPr>
-          <p:cNvPr id="39" name="Text 37"/>
           <p:cNvSpPr/>
           <p:nvPr/>
         </p:nvSpPr>
@@ -33131,7 +35063,7 @@
                 <a:ea typeface="Trebuchet MS" pitchFamily="34" charset="-122"/>
                 <a:cs typeface="Trebuchet MS" pitchFamily="34" charset="-120"/>
               </a:rPr>
-              <a:t>expenses</a:t>
+              <a:t>suspense</a:t>
             </a:r>
             <a:endParaRPr lang="en-US" sz="2800" dirty="0"/>
           </a:p>
@@ -33270,7 +35202,7 @@
                 <a:ea typeface="Trebuchet MS" pitchFamily="34" charset="-122"/>
                 <a:cs typeface="Trebuchet MS" pitchFamily="34" charset="-120"/>
               </a:rPr>
-              <a:t>ex</a:t>
+              <a:t>sus</a:t>
             </a:r>
             <a:endParaRPr lang="en-US" sz="1300" dirty="0"/>
           </a:p>
@@ -33309,7 +35241,7 @@
                 <a:ea typeface="Calibri" pitchFamily="34" charset="-122"/>
                 <a:cs typeface="Calibri" pitchFamily="34" charset="-120"/>
               </a:rPr>
-              <a:t>out</a:t>
+              <a:t>under, up from below</a:t>
             </a:r>
             <a:endParaRPr lang="en-US" sz="850" dirty="0"/>
           </a:p>
@@ -33317,7 +35249,46 @@
       </p:sp>
       <p:sp>
         <p:nvSpPr>
-          <p:cNvPr id="19" name="Shape 17"/>
+          <p:cNvPr id="19" name="Text 17"/>
+          <p:cNvSpPr/>
+          <p:nvPr/>
+        </p:nvSpPr>
+        <p:spPr>
+          <a:xfrm>
+            <a:off x="2221992" y="2752344"/>
+            <a:ext cx="1828800" cy="182880"/>
+          </a:xfrm>
+          <a:prstGeom prst="rect">
+            <a:avLst/>
+          </a:prstGeom>
+          <a:noFill/>
+          <a:ln/>
+        </p:spPr>
+        <p:txBody>
+          <a:bodyPr wrap="square" lIns="0" tIns="0" rIns="0" bIns="0" rtlCol="0" anchor="t"/>
+          <a:lstStyle/>
+          <a:p>
+            <a:pPr algn="ctr" indent="0" marL="0">
+              <a:buNone/>
+            </a:pPr>
+            <a:r>
+              <a:rPr lang="en-US" sz="700" i="1" dirty="0">
+                <a:solidFill>
+                  <a:srgbClr val="94A3B8"/>
+                </a:solidFill>
+                <a:latin typeface="Calibri" pitchFamily="34" charset="0"/>
+                <a:ea typeface="Calibri" pitchFamily="34" charset="-122"/>
+                <a:cs typeface="Calibri" pitchFamily="34" charset="-120"/>
+              </a:rPr>
+              <a:t>sub → sus before 'p'</a:t>
+            </a:r>
+            <a:endParaRPr lang="en-US" sz="700" dirty="0"/>
+          </a:p>
+        </p:txBody>
+      </p:sp>
+      <p:sp>
+        <p:nvSpPr>
+          <p:cNvPr id="20" name="Shape 18"/>
           <p:cNvSpPr/>
           <p:nvPr/>
         </p:nvSpPr>
@@ -33351,7 +35322,7 @@
       </p:sp>
       <p:sp>
         <p:nvSpPr>
-          <p:cNvPr id="20" name="Text 18"/>
+          <p:cNvPr id="21" name="Text 19"/>
           <p:cNvSpPr/>
           <p:nvPr/>
         </p:nvSpPr>
@@ -33390,7 +35361,7 @@
       </p:sp>
       <p:sp>
         <p:nvSpPr>
-          <p:cNvPr id="21" name="Text 19"/>
+          <p:cNvPr id="22" name="Text 20"/>
           <p:cNvSpPr/>
           <p:nvPr/>
         </p:nvSpPr>
@@ -33421,7 +35392,7 @@
                 <a:ea typeface="Calibri" pitchFamily="34" charset="-122"/>
                 <a:cs typeface="Calibri" pitchFamily="34" charset="-120"/>
               </a:rPr>
-              <a:t>to weigh, pay</a:t>
+              <a:t>to hang, weigh, pay</a:t>
             </a:r>
             <a:endParaRPr lang="en-US" sz="850" dirty="0"/>
           </a:p>
@@ -33429,7 +35400,7 @@
       </p:sp>
       <p:sp>
         <p:nvSpPr>
-          <p:cNvPr id="22" name="Shape 20"/>
+          <p:cNvPr id="23" name="Shape 21"/>
           <p:cNvSpPr/>
           <p:nvPr/>
         </p:nvSpPr>
@@ -33463,7 +35434,7 @@
       </p:sp>
       <p:sp>
         <p:nvSpPr>
-          <p:cNvPr id="23" name="Text 21"/>
+          <p:cNvPr id="24" name="Text 22"/>
           <p:cNvSpPr/>
           <p:nvPr/>
         </p:nvSpPr>
@@ -33494,7 +35465,7 @@
                 <a:ea typeface="Trebuchet MS" pitchFamily="34" charset="-122"/>
                 <a:cs typeface="Trebuchet MS" pitchFamily="34" charset="-120"/>
               </a:rPr>
-              <a:t>es</a:t>
+              <a:t>e</a:t>
             </a:r>
             <a:endParaRPr lang="en-US" sz="1300" dirty="0"/>
           </a:p>
@@ -33502,7 +35473,7 @@
       </p:sp>
       <p:sp>
         <p:nvSpPr>
-          <p:cNvPr id="24" name="Text 22"/>
+          <p:cNvPr id="25" name="Text 23"/>
           <p:cNvSpPr/>
           <p:nvPr/>
         </p:nvSpPr>
@@ -33533,7 +35504,7 @@
                 <a:ea typeface="Calibri" pitchFamily="34" charset="-122"/>
                 <a:cs typeface="Calibri" pitchFamily="34" charset="-120"/>
               </a:rPr>
-              <a:t>plural</a:t>
+              <a:t>noun-forming ending</a:t>
             </a:r>
             <a:endParaRPr lang="en-US" sz="850" dirty="0"/>
           </a:p>
@@ -33541,7 +35512,7 @@
       </p:sp>
       <p:sp>
         <p:nvSpPr>
-          <p:cNvPr id="25" name="Shape 23"/>
+          <p:cNvPr id="26" name="Shape 24"/>
           <p:cNvSpPr/>
           <p:nvPr/>
         </p:nvSpPr>
@@ -33568,7 +35539,7 @@
       </p:sp>
       <p:sp>
         <p:nvSpPr>
-          <p:cNvPr id="26" name="Text 24"/>
+          <p:cNvPr id="27" name="Text 25"/>
           <p:cNvSpPr/>
           <p:nvPr/>
         </p:nvSpPr>
@@ -33607,7 +35578,7 @@
       </p:sp>
       <p:sp>
         <p:nvSpPr>
-          <p:cNvPr id="27" name="Shape 25"/>
+          <p:cNvPr id="28" name="Shape 26"/>
           <p:cNvSpPr/>
           <p:nvPr/>
         </p:nvSpPr>
@@ -33634,13 +35605,13 @@
       </p:sp>
       <p:sp>
         <p:nvSpPr>
-          <p:cNvPr id="28" name="Shape 26"/>
-          <p:cNvSpPr/>
-          <p:nvPr/>
-        </p:nvSpPr>
-        <p:spPr>
-          <a:xfrm>
-            <a:off x="2313432" y="3364992"/>
+          <p:cNvPr id="29" name="Shape 27"/>
+          <p:cNvSpPr/>
+          <p:nvPr/>
+        </p:nvSpPr>
+        <p:spPr>
+          <a:xfrm>
+            <a:off x="2999232" y="3364992"/>
             <a:ext cx="1645920" cy="475488"/>
           </a:xfrm>
           <a:prstGeom prst="rect">
@@ -33661,13 +35632,13 @@
       </p:sp>
       <p:sp>
         <p:nvSpPr>
-          <p:cNvPr id="29" name="Text 27"/>
-          <p:cNvSpPr/>
-          <p:nvPr/>
-        </p:nvSpPr>
-        <p:spPr>
-          <a:xfrm>
-            <a:off x="2313432" y="3364992"/>
+          <p:cNvPr id="30" name="Text 28"/>
+          <p:cNvSpPr/>
+          <p:nvPr/>
+        </p:nvSpPr>
+        <p:spPr>
+          <a:xfrm>
+            <a:off x="2999232" y="3364992"/>
             <a:ext cx="1645920" cy="475488"/>
           </a:xfrm>
           <a:prstGeom prst="rect">
@@ -33692,7 +35663,7 @@
                 <a:ea typeface="Trebuchet MS" pitchFamily="34" charset="-122"/>
                 <a:cs typeface="Trebuchet MS" pitchFamily="34" charset="-120"/>
               </a:rPr>
-              <a:t>ex</a:t>
+              <a:t>sus</a:t>
             </a:r>
             <a:endParaRPr lang="en-US" sz="1400" dirty="0"/>
           </a:p>
@@ -33700,14 +35671,14 @@
       </p:sp>
       <p:sp>
         <p:nvSpPr>
-          <p:cNvPr id="30" name="Text 28"/>
-          <p:cNvSpPr/>
-          <p:nvPr/>
-        </p:nvSpPr>
-        <p:spPr>
-          <a:xfrm>
-            <a:off x="3959352" y="3364992"/>
-            <a:ext cx="411480" cy="475488"/>
+          <p:cNvPr id="31" name="Text 29"/>
+          <p:cNvSpPr/>
+          <p:nvPr/>
+        </p:nvSpPr>
+        <p:spPr>
+          <a:xfrm>
+            <a:off x="4645152" y="3364992"/>
+            <a:ext cx="1097280" cy="475488"/>
           </a:xfrm>
           <a:prstGeom prst="rect">
             <a:avLst/>
@@ -33739,13 +35710,13 @@
       </p:sp>
       <p:sp>
         <p:nvSpPr>
-          <p:cNvPr id="31" name="Shape 29"/>
-          <p:cNvSpPr/>
-          <p:nvPr/>
-        </p:nvSpPr>
-        <p:spPr>
-          <a:xfrm>
-            <a:off x="4370832" y="3364992"/>
+          <p:cNvPr id="32" name="Shape 30"/>
+          <p:cNvSpPr/>
+          <p:nvPr/>
+        </p:nvSpPr>
+        <p:spPr>
+          <a:xfrm>
+            <a:off x="5742432" y="3364992"/>
             <a:ext cx="1645920" cy="475488"/>
           </a:xfrm>
           <a:prstGeom prst="rect">
@@ -33766,13 +35737,13 @@
       </p:sp>
       <p:sp>
         <p:nvSpPr>
-          <p:cNvPr id="32" name="Text 30"/>
-          <p:cNvSpPr/>
-          <p:nvPr/>
-        </p:nvSpPr>
-        <p:spPr>
-          <a:xfrm>
-            <a:off x="4370832" y="3364992"/>
+          <p:cNvPr id="33" name="Text 31"/>
+          <p:cNvSpPr/>
+          <p:nvPr/>
+        </p:nvSpPr>
+        <p:spPr>
+          <a:xfrm>
+            <a:off x="5742432" y="3364992"/>
             <a:ext cx="1645920" cy="475488"/>
           </a:xfrm>
           <a:prstGeom prst="rect">
@@ -33797,7 +35768,7 @@
                 <a:ea typeface="Trebuchet MS" pitchFamily="34" charset="-122"/>
                 <a:cs typeface="Trebuchet MS" pitchFamily="34" charset="-120"/>
               </a:rPr>
-              <a:t>pen</a:t>
+              <a:t>pense</a:t>
             </a:r>
             <a:endParaRPr lang="en-US" sz="1400" dirty="0"/>
           </a:p>
@@ -33805,193 +35776,247 @@
       </p:sp>
       <p:sp>
         <p:nvSpPr>
-          <p:cNvPr id="33" name="Text 31"/>
-          <p:cNvSpPr/>
-          <p:nvPr/>
-        </p:nvSpPr>
-        <p:spPr>
-          <a:xfrm>
-            <a:off x="6016752" y="3364992"/>
-            <a:ext cx="411480" cy="475488"/>
-          </a:xfrm>
-          <a:prstGeom prst="rect">
-            <a:avLst/>
-          </a:prstGeom>
-          <a:noFill/>
-          <a:ln/>
-        </p:spPr>
-        <p:txBody>
-          <a:bodyPr wrap="square" lIns="0" tIns="0" rIns="0" bIns="0" rtlCol="0" anchor="ctr"/>
-          <a:lstStyle/>
-          <a:p>
-            <a:pPr algn="ctr" indent="0" marL="0">
-              <a:buNone/>
-            </a:pPr>
-            <a:r>
-              <a:rPr lang="en-US" sz="1600" b="1" dirty="0">
-                <a:solidFill>
-                  <a:srgbClr val="0D9488"/>
+          <p:cNvPr id="34" name="Shape 32"/>
+          <p:cNvSpPr/>
+          <p:nvPr/>
+        </p:nvSpPr>
+        <p:spPr>
+          <a:xfrm>
+            <a:off x="365760" y="4096512"/>
+            <a:ext cx="1371600" cy="804672"/>
+          </a:xfrm>
+          <a:prstGeom prst="rect">
+            <a:avLst>
+              <a:gd name="adj" fmla="val 6818"/>
+            </a:avLst>
+          </a:prstGeom>
+          <a:solidFill>
+            <a:srgbClr val="E2E8F0"/>
+          </a:solidFill>
+          <a:ln w="12700">
+            <a:solidFill>
+              <a:srgbClr val="E2E8F0"/>
+            </a:solidFill>
+            <a:prstDash val="solid"/>
+          </a:ln>
+        </p:spPr>
+      </p:sp>
+      <p:sp>
+        <p:nvSpPr>
+          <p:cNvPr id="35" name="Text 33"/>
+          <p:cNvSpPr/>
+          <p:nvPr/>
+        </p:nvSpPr>
+        <p:spPr>
+          <a:xfrm>
+            <a:off x="365760" y="4096512"/>
+            <a:ext cx="1371600" cy="804672"/>
+          </a:xfrm>
+          <a:prstGeom prst="rect">
+            <a:avLst/>
+          </a:prstGeom>
+          <a:noFill/>
+          <a:ln/>
+        </p:spPr>
+        <p:txBody>
+          <a:bodyPr wrap="square" lIns="0" tIns="0" rIns="0" bIns="0" rtlCol="0" anchor="ctr"/>
+          <a:lstStyle/>
+          <a:p>
+            <a:pPr algn="ctr" indent="0" marL="0">
+              <a:buNone/>
+            </a:pPr>
+            <a:r>
+              <a:rPr lang="en-US" sz="1100" b="1" dirty="0">
+                <a:solidFill>
+                  <a:srgbClr val="475569"/>
                 </a:solidFill>
                 <a:latin typeface="Trebuchet MS" pitchFamily="34" charset="0"/>
                 <a:ea typeface="Trebuchet MS" pitchFamily="34" charset="-122"/>
                 <a:cs typeface="Trebuchet MS" pitchFamily="34" charset="-120"/>
               </a:rPr>
-              <a:t>·</a:t>
-            </a:r>
-            <a:endParaRPr lang="en-US" sz="1600" dirty="0"/>
-          </a:p>
-        </p:txBody>
-      </p:sp>
-      <p:sp>
-        <p:nvSpPr>
-          <p:cNvPr id="34" name="Shape 32"/>
-          <p:cNvSpPr/>
-          <p:nvPr/>
-        </p:nvSpPr>
-        <p:spPr>
-          <a:xfrm>
-            <a:off x="6428232" y="3364992"/>
-            <a:ext cx="1645920" cy="475488"/>
+              <a:t>Phonemes</a:t>
+            </a:r>
+            <a:endParaRPr lang="en-US" sz="1100" dirty="0"/>
+          </a:p>
+        </p:txBody>
+      </p:sp>
+      <p:sp>
+        <p:nvSpPr>
+          <p:cNvPr id="36" name="Shape 34"/>
+          <p:cNvSpPr/>
+          <p:nvPr/>
+        </p:nvSpPr>
+        <p:spPr>
+          <a:xfrm>
+            <a:off x="1874520" y="4096512"/>
+            <a:ext cx="6903720" cy="804672"/>
           </a:xfrm>
           <a:prstGeom prst="rect">
             <a:avLst>
-              <a:gd name="adj" fmla="val 9615"/>
+              <a:gd name="adj" fmla="val 6818"/>
             </a:avLst>
           </a:prstGeom>
           <a:solidFill>
+            <a:srgbClr val="FCE7F3"/>
+          </a:solidFill>
+          <a:ln w="12700">
+            <a:solidFill>
+              <a:srgbClr val="DB2777"/>
+            </a:solidFill>
+            <a:prstDash val="solid"/>
+          </a:ln>
+        </p:spPr>
+      </p:sp>
+      <p:sp>
+        <p:nvSpPr>
+          <p:cNvPr id="37" name="Shape 35"/>
+          <p:cNvSpPr/>
+          <p:nvPr/>
+        </p:nvSpPr>
+        <p:spPr>
+          <a:xfrm>
+            <a:off x="2124837" y="4169664"/>
+            <a:ext cx="685800" cy="384048"/>
+          </a:xfrm>
+          <a:prstGeom prst="rect">
+            <a:avLst>
+              <a:gd name="adj" fmla="val 9524"/>
+            </a:avLst>
+          </a:prstGeom>
+          <a:solidFill>
             <a:srgbClr val="FFFFFF"/>
           </a:solidFill>
           <a:ln w="12700">
             <a:solidFill>
-              <a:srgbClr val="0D9488"/>
-            </a:solidFill>
-            <a:prstDash val="solid"/>
-          </a:ln>
-        </p:spPr>
-      </p:sp>
-      <p:sp>
-        <p:nvSpPr>
-          <p:cNvPr id="35" name="Text 33"/>
-          <p:cNvSpPr/>
-          <p:nvPr/>
-        </p:nvSpPr>
-        <p:spPr>
-          <a:xfrm>
-            <a:off x="6428232" y="3364992"/>
-            <a:ext cx="1645920" cy="475488"/>
-          </a:xfrm>
-          <a:prstGeom prst="rect">
-            <a:avLst/>
-          </a:prstGeom>
-          <a:noFill/>
-          <a:ln/>
-        </p:spPr>
-        <p:txBody>
-          <a:bodyPr wrap="square" lIns="0" tIns="0" rIns="0" bIns="0" rtlCol="0" anchor="ctr"/>
-          <a:lstStyle/>
-          <a:p>
-            <a:pPr algn="ctr" indent="0" marL="0">
-              <a:buNone/>
-            </a:pPr>
-            <a:r>
-              <a:rPr lang="en-US" sz="1400" b="1" dirty="0">
-                <a:solidFill>
-                  <a:srgbClr val="0D9488"/>
+              <a:srgbClr val="DB2777"/>
+            </a:solidFill>
+            <a:prstDash val="solid"/>
+          </a:ln>
+        </p:spPr>
+      </p:sp>
+      <p:sp>
+        <p:nvSpPr>
+          <p:cNvPr id="38" name="Text 36"/>
+          <p:cNvSpPr/>
+          <p:nvPr/>
+        </p:nvSpPr>
+        <p:spPr>
+          <a:xfrm>
+            <a:off x="2124837" y="4169664"/>
+            <a:ext cx="685800" cy="384048"/>
+          </a:xfrm>
+          <a:prstGeom prst="rect">
+            <a:avLst/>
+          </a:prstGeom>
+          <a:noFill/>
+          <a:ln/>
+        </p:spPr>
+        <p:txBody>
+          <a:bodyPr wrap="square" lIns="0" tIns="0" rIns="0" bIns="0" rtlCol="0" anchor="ctr"/>
+          <a:lstStyle/>
+          <a:p>
+            <a:pPr algn="ctr" indent="0" marL="0">
+              <a:buNone/>
+            </a:pPr>
+            <a:r>
+              <a:rPr lang="en-US" sz="900" b="1" dirty="0">
+                <a:solidFill>
+                  <a:srgbClr val="9D174D"/>
                 </a:solidFill>
                 <a:latin typeface="Trebuchet MS" pitchFamily="34" charset="0"/>
                 <a:ea typeface="Trebuchet MS" pitchFamily="34" charset="-122"/>
                 <a:cs typeface="Trebuchet MS" pitchFamily="34" charset="-120"/>
               </a:rPr>
-              <a:t>ses</a:t>
-            </a:r>
-            <a:endParaRPr lang="en-US" sz="1400" dirty="0"/>
-          </a:p>
-        </p:txBody>
-      </p:sp>
-      <p:sp>
-        <p:nvSpPr>
-          <p:cNvPr id="36" name="Shape 34"/>
-          <p:cNvSpPr/>
-          <p:nvPr/>
-        </p:nvSpPr>
-        <p:spPr>
-          <a:xfrm>
-            <a:off x="365760" y="4096512"/>
-            <a:ext cx="1371600" cy="804672"/>
+              <a:t>s</a:t>
+            </a:r>
+            <a:endParaRPr lang="en-US" sz="900" dirty="0"/>
+          </a:p>
+        </p:txBody>
+      </p:sp>
+      <p:sp>
+        <p:nvSpPr>
+          <p:cNvPr id="39" name="Shape 37"/>
+          <p:cNvSpPr/>
+          <p:nvPr/>
+        </p:nvSpPr>
+        <p:spPr>
+          <a:xfrm>
+            <a:off x="3033522" y="4169664"/>
+            <a:ext cx="685800" cy="384048"/>
           </a:xfrm>
           <a:prstGeom prst="rect">
             <a:avLst>
-              <a:gd name="adj" fmla="val 6818"/>
+              <a:gd name="adj" fmla="val 9524"/>
             </a:avLst>
           </a:prstGeom>
           <a:solidFill>
-            <a:srgbClr val="E2E8F0"/>
-          </a:solidFill>
-          <a:ln w="12700">
-            <a:solidFill>
-              <a:srgbClr val="E2E8F0"/>
-            </a:solidFill>
-            <a:prstDash val="solid"/>
-          </a:ln>
-        </p:spPr>
-      </p:sp>
-      <p:sp>
-        <p:nvSpPr>
-          <p:cNvPr id="37" name="Text 35"/>
-          <p:cNvSpPr/>
-          <p:nvPr/>
-        </p:nvSpPr>
-        <p:spPr>
-          <a:xfrm>
-            <a:off x="365760" y="4096512"/>
-            <a:ext cx="1371600" cy="804672"/>
-          </a:xfrm>
-          <a:prstGeom prst="rect">
-            <a:avLst/>
-          </a:prstGeom>
-          <a:noFill/>
-          <a:ln/>
-        </p:spPr>
-        <p:txBody>
-          <a:bodyPr wrap="square" lIns="0" tIns="0" rIns="0" bIns="0" rtlCol="0" anchor="ctr"/>
-          <a:lstStyle/>
-          <a:p>
-            <a:pPr algn="ctr" indent="0" marL="0">
-              <a:buNone/>
-            </a:pPr>
-            <a:r>
-              <a:rPr lang="en-US" sz="1100" b="1" dirty="0">
-                <a:solidFill>
-                  <a:srgbClr val="475569"/>
+            <a:srgbClr val="FFFFFF"/>
+          </a:solidFill>
+          <a:ln w="12700">
+            <a:solidFill>
+              <a:srgbClr val="DB2777"/>
+            </a:solidFill>
+            <a:prstDash val="solid"/>
+          </a:ln>
+        </p:spPr>
+      </p:sp>
+      <p:sp>
+        <p:nvSpPr>
+          <p:cNvPr id="40" name="Text 38"/>
+          <p:cNvSpPr/>
+          <p:nvPr/>
+        </p:nvSpPr>
+        <p:spPr>
+          <a:xfrm>
+            <a:off x="3033522" y="4169664"/>
+            <a:ext cx="685800" cy="384048"/>
+          </a:xfrm>
+          <a:prstGeom prst="rect">
+            <a:avLst/>
+          </a:prstGeom>
+          <a:noFill/>
+          <a:ln/>
+        </p:spPr>
+        <p:txBody>
+          <a:bodyPr wrap="square" lIns="0" tIns="0" rIns="0" bIns="0" rtlCol="0" anchor="ctr"/>
+          <a:lstStyle/>
+          <a:p>
+            <a:pPr algn="ctr" indent="0" marL="0">
+              <a:buNone/>
+            </a:pPr>
+            <a:r>
+              <a:rPr lang="en-US" sz="900" b="1" dirty="0">
+                <a:solidFill>
+                  <a:srgbClr val="9D174D"/>
                 </a:solidFill>
                 <a:latin typeface="Trebuchet MS" pitchFamily="34" charset="0"/>
                 <a:ea typeface="Trebuchet MS" pitchFamily="34" charset="-122"/>
                 <a:cs typeface="Trebuchet MS" pitchFamily="34" charset="-120"/>
               </a:rPr>
-              <a:t>Phonemes</a:t>
-            </a:r>
-            <a:endParaRPr lang="en-US" sz="1100" dirty="0"/>
-          </a:p>
-        </p:txBody>
-      </p:sp>
-      <p:sp>
-        <p:nvSpPr>
-          <p:cNvPr id="38" name="Shape 36"/>
-          <p:cNvSpPr/>
-          <p:nvPr/>
-        </p:nvSpPr>
-        <p:spPr>
-          <a:xfrm>
-            <a:off x="1874520" y="4096512"/>
-            <a:ext cx="6903720" cy="658368"/>
+              <a:t>u</a:t>
+            </a:r>
+            <a:endParaRPr lang="en-US" sz="900" dirty="0"/>
+          </a:p>
+        </p:txBody>
+      </p:sp>
+      <p:sp>
+        <p:nvSpPr>
+          <p:cNvPr id="41" name="Shape 39"/>
+          <p:cNvSpPr/>
+          <p:nvPr/>
+        </p:nvSpPr>
+        <p:spPr>
+          <a:xfrm>
+            <a:off x="3942207" y="4169664"/>
+            <a:ext cx="685800" cy="384048"/>
           </a:xfrm>
           <a:prstGeom prst="rect">
             <a:avLst>
-              <a:gd name="adj" fmla="val 8333"/>
+              <a:gd name="adj" fmla="val 9524"/>
             </a:avLst>
           </a:prstGeom>
           <a:solidFill>
-            <a:srgbClr val="FCE7F3"/>
+            <a:srgbClr val="FFFFFF"/>
           </a:solidFill>
           <a:ln w="12700">
             <a:solidFill>
@@ -34003,41 +36028,14 @@
       </p:sp>
       <p:sp>
         <p:nvSpPr>
-          <p:cNvPr id="39" name="Shape 37"/>
-          <p:cNvSpPr/>
-          <p:nvPr/>
-        </p:nvSpPr>
-        <p:spPr>
-          <a:xfrm>
-            <a:off x="2023872" y="4169664"/>
-            <a:ext cx="685800" cy="475488"/>
-          </a:xfrm>
-          <a:prstGeom prst="rect">
-            <a:avLst>
-              <a:gd name="adj" fmla="val 7692"/>
-            </a:avLst>
-          </a:prstGeom>
-          <a:solidFill>
-            <a:srgbClr val="FFFFFF"/>
-          </a:solidFill>
-          <a:ln w="12700">
-            <a:solidFill>
-              <a:srgbClr val="DB2777"/>
-            </a:solidFill>
-            <a:prstDash val="solid"/>
-          </a:ln>
-        </p:spPr>
-      </p:sp>
-      <p:sp>
-        <p:nvSpPr>
-          <p:cNvPr id="40" name="Text 38"/>
-          <p:cNvSpPr/>
-          <p:nvPr/>
-        </p:nvSpPr>
-        <p:spPr>
-          <a:xfrm>
-            <a:off x="2023872" y="4169664"/>
-            <a:ext cx="685800" cy="475488"/>
+          <p:cNvPr id="42" name="Text 40"/>
+          <p:cNvSpPr/>
+          <p:nvPr/>
+        </p:nvSpPr>
+        <p:spPr>
+          <a:xfrm>
+            <a:off x="3942207" y="4169664"/>
+            <a:ext cx="685800" cy="384048"/>
           </a:xfrm>
           <a:prstGeom prst="rect">
             <a:avLst/>
@@ -34061,7 +36059,7 @@
                 <a:ea typeface="Trebuchet MS" pitchFamily="34" charset="-122"/>
                 <a:cs typeface="Trebuchet MS" pitchFamily="34" charset="-120"/>
               </a:rPr>
-              <a:t>e</a:t>
+              <a:t>s</a:t>
             </a:r>
             <a:endParaRPr lang="en-US" sz="900" dirty="0"/>
           </a:p>
@@ -34069,18 +36067,18 @@
       </p:sp>
       <p:sp>
         <p:nvSpPr>
-          <p:cNvPr id="41" name="Shape 39"/>
-          <p:cNvSpPr/>
-          <p:nvPr/>
-        </p:nvSpPr>
-        <p:spPr>
-          <a:xfrm>
-            <a:off x="2831592" y="4169664"/>
-            <a:ext cx="685800" cy="475488"/>
+          <p:cNvPr id="43" name="Shape 41"/>
+          <p:cNvSpPr/>
+          <p:nvPr/>
+        </p:nvSpPr>
+        <p:spPr>
+          <a:xfrm>
+            <a:off x="4850892" y="4169664"/>
+            <a:ext cx="685800" cy="384048"/>
           </a:xfrm>
           <a:prstGeom prst="rect">
             <a:avLst>
-              <a:gd name="adj" fmla="val 7692"/>
+              <a:gd name="adj" fmla="val 9524"/>
             </a:avLst>
           </a:prstGeom>
           <a:solidFill>
@@ -34096,14 +36094,14 @@
       </p:sp>
       <p:sp>
         <p:nvSpPr>
-          <p:cNvPr id="42" name="Text 40"/>
-          <p:cNvSpPr/>
-          <p:nvPr/>
-        </p:nvSpPr>
-        <p:spPr>
-          <a:xfrm>
-            <a:off x="2831592" y="4169664"/>
-            <a:ext cx="685800" cy="475488"/>
+          <p:cNvPr id="44" name="Text 42"/>
+          <p:cNvSpPr/>
+          <p:nvPr/>
+        </p:nvSpPr>
+        <p:spPr>
+          <a:xfrm>
+            <a:off x="4850892" y="4169664"/>
+            <a:ext cx="685800" cy="384048"/>
           </a:xfrm>
           <a:prstGeom prst="rect">
             <a:avLst/>
@@ -34127,7 +36125,7 @@
                 <a:ea typeface="Trebuchet MS" pitchFamily="34" charset="-122"/>
                 <a:cs typeface="Trebuchet MS" pitchFamily="34" charset="-120"/>
               </a:rPr>
-              <a:t>x</a:t>
+              <a:t>p</a:t>
             </a:r>
             <a:endParaRPr lang="en-US" sz="900" dirty="0"/>
           </a:p>
@@ -34135,18 +36133,18 @@
       </p:sp>
       <p:sp>
         <p:nvSpPr>
-          <p:cNvPr id="43" name="Shape 41"/>
-          <p:cNvSpPr/>
-          <p:nvPr/>
-        </p:nvSpPr>
-        <p:spPr>
-          <a:xfrm>
-            <a:off x="3639312" y="4169664"/>
-            <a:ext cx="685800" cy="475488"/>
+          <p:cNvPr id="45" name="Shape 43"/>
+          <p:cNvSpPr/>
+          <p:nvPr/>
+        </p:nvSpPr>
+        <p:spPr>
+          <a:xfrm>
+            <a:off x="5759577" y="4169664"/>
+            <a:ext cx="685800" cy="384048"/>
           </a:xfrm>
           <a:prstGeom prst="rect">
             <a:avLst>
-              <a:gd name="adj" fmla="val 7692"/>
+              <a:gd name="adj" fmla="val 9524"/>
             </a:avLst>
           </a:prstGeom>
           <a:solidFill>
@@ -34162,14 +36160,14 @@
       </p:sp>
       <p:sp>
         <p:nvSpPr>
-          <p:cNvPr id="44" name="Text 42"/>
-          <p:cNvSpPr/>
-          <p:nvPr/>
-        </p:nvSpPr>
-        <p:spPr>
-          <a:xfrm>
-            <a:off x="3639312" y="4169664"/>
-            <a:ext cx="685800" cy="475488"/>
+          <p:cNvPr id="46" name="Text 44"/>
+          <p:cNvSpPr/>
+          <p:nvPr/>
+        </p:nvSpPr>
+        <p:spPr>
+          <a:xfrm>
+            <a:off x="5759577" y="4169664"/>
+            <a:ext cx="685800" cy="384048"/>
           </a:xfrm>
           <a:prstGeom prst="rect">
             <a:avLst/>
@@ -34193,7 +36191,7 @@
                 <a:ea typeface="Trebuchet MS" pitchFamily="34" charset="-122"/>
                 <a:cs typeface="Trebuchet MS" pitchFamily="34" charset="-120"/>
               </a:rPr>
-              <a:t>p</a:t>
+              <a:t>e</a:t>
             </a:r>
             <a:endParaRPr lang="en-US" sz="900" dirty="0"/>
           </a:p>
@@ -34201,18 +36199,18 @@
       </p:sp>
       <p:sp>
         <p:nvSpPr>
-          <p:cNvPr id="45" name="Shape 43"/>
-          <p:cNvSpPr/>
-          <p:nvPr/>
-        </p:nvSpPr>
-        <p:spPr>
-          <a:xfrm>
-            <a:off x="4447032" y="4169664"/>
-            <a:ext cx="685800" cy="475488"/>
+          <p:cNvPr id="47" name="Shape 45"/>
+          <p:cNvSpPr/>
+          <p:nvPr/>
+        </p:nvSpPr>
+        <p:spPr>
+          <a:xfrm>
+            <a:off x="6668262" y="4169664"/>
+            <a:ext cx="685800" cy="384048"/>
           </a:xfrm>
           <a:prstGeom prst="rect">
             <a:avLst>
-              <a:gd name="adj" fmla="val 7692"/>
+              <a:gd name="adj" fmla="val 9524"/>
             </a:avLst>
           </a:prstGeom>
           <a:solidFill>
@@ -34228,14 +36226,14 @@
       </p:sp>
       <p:sp>
         <p:nvSpPr>
-          <p:cNvPr id="46" name="Text 44"/>
-          <p:cNvSpPr/>
-          <p:nvPr/>
-        </p:nvSpPr>
-        <p:spPr>
-          <a:xfrm>
-            <a:off x="4447032" y="4169664"/>
-            <a:ext cx="685800" cy="475488"/>
+          <p:cNvPr id="48" name="Text 46"/>
+          <p:cNvSpPr/>
+          <p:nvPr/>
+        </p:nvSpPr>
+        <p:spPr>
+          <a:xfrm>
+            <a:off x="6668262" y="4169664"/>
+            <a:ext cx="685800" cy="384048"/>
           </a:xfrm>
           <a:prstGeom prst="rect">
             <a:avLst/>
@@ -34259,7 +36257,7 @@
                 <a:ea typeface="Trebuchet MS" pitchFamily="34" charset="-122"/>
                 <a:cs typeface="Trebuchet MS" pitchFamily="34" charset="-120"/>
               </a:rPr>
-              <a:t>e</a:t>
+              <a:t>n</a:t>
             </a:r>
             <a:endParaRPr lang="en-US" sz="900" dirty="0"/>
           </a:p>
@@ -34267,18 +36265,18 @@
       </p:sp>
       <p:sp>
         <p:nvSpPr>
-          <p:cNvPr id="47" name="Shape 45"/>
-          <p:cNvSpPr/>
-          <p:nvPr/>
-        </p:nvSpPr>
-        <p:spPr>
-          <a:xfrm>
-            <a:off x="5254752" y="4169664"/>
-            <a:ext cx="685800" cy="475488"/>
+          <p:cNvPr id="49" name="Shape 47"/>
+          <p:cNvSpPr/>
+          <p:nvPr/>
+        </p:nvSpPr>
+        <p:spPr>
+          <a:xfrm>
+            <a:off x="7576947" y="4169664"/>
+            <a:ext cx="685800" cy="384048"/>
           </a:xfrm>
           <a:prstGeom prst="rect">
             <a:avLst>
-              <a:gd name="adj" fmla="val 7692"/>
+              <a:gd name="adj" fmla="val 9524"/>
             </a:avLst>
           </a:prstGeom>
           <a:solidFill>
@@ -34294,14 +36292,14 @@
       </p:sp>
       <p:sp>
         <p:nvSpPr>
-          <p:cNvPr id="48" name="Text 46"/>
-          <p:cNvSpPr/>
-          <p:nvPr/>
-        </p:nvSpPr>
-        <p:spPr>
-          <a:xfrm>
-            <a:off x="5254752" y="4169664"/>
-            <a:ext cx="685800" cy="475488"/>
+          <p:cNvPr id="50" name="Text 48"/>
+          <p:cNvSpPr/>
+          <p:nvPr/>
+        </p:nvSpPr>
+        <p:spPr>
+          <a:xfrm>
+            <a:off x="7576947" y="4169664"/>
+            <a:ext cx="685800" cy="384048"/>
           </a:xfrm>
           <a:prstGeom prst="rect">
             <a:avLst/>
@@ -34325,7 +36323,7 @@
                 <a:ea typeface="Trebuchet MS" pitchFamily="34" charset="-122"/>
                 <a:cs typeface="Trebuchet MS" pitchFamily="34" charset="-120"/>
               </a:rPr>
-              <a:t>n</a:t>
+              <a:t>se</a:t>
             </a:r>
             <a:endParaRPr lang="en-US" sz="900" dirty="0"/>
           </a:p>
@@ -34333,199 +36331,40 @@
       </p:sp>
       <p:sp>
         <p:nvSpPr>
-          <p:cNvPr id="49" name="Shape 47"/>
-          <p:cNvSpPr/>
-          <p:nvPr/>
-        </p:nvSpPr>
-        <p:spPr>
-          <a:xfrm>
-            <a:off x="6062472" y="4169664"/>
-            <a:ext cx="685800" cy="475488"/>
-          </a:xfrm>
-          <a:prstGeom prst="rect">
-            <a:avLst>
-              <a:gd name="adj" fmla="val 7692"/>
-            </a:avLst>
-          </a:prstGeom>
-          <a:solidFill>
-            <a:srgbClr val="FFFFFF"/>
-          </a:solidFill>
-          <a:ln w="12700">
-            <a:solidFill>
-              <a:srgbClr val="DB2777"/>
-            </a:solidFill>
-            <a:prstDash val="solid"/>
-          </a:ln>
-        </p:spPr>
-      </p:sp>
-      <p:sp>
-        <p:nvSpPr>
-          <p:cNvPr id="50" name="Text 48"/>
-          <p:cNvSpPr/>
-          <p:nvPr/>
-        </p:nvSpPr>
-        <p:spPr>
-          <a:xfrm>
-            <a:off x="6062472" y="4169664"/>
-            <a:ext cx="685800" cy="475488"/>
-          </a:xfrm>
-          <a:prstGeom prst="rect">
-            <a:avLst/>
-          </a:prstGeom>
-          <a:noFill/>
-          <a:ln/>
-        </p:spPr>
-        <p:txBody>
-          <a:bodyPr wrap="square" lIns="0" tIns="0" rIns="0" bIns="0" rtlCol="0" anchor="ctr"/>
-          <a:lstStyle/>
-          <a:p>
-            <a:pPr algn="ctr" indent="0" marL="0">
-              <a:buNone/>
-            </a:pPr>
-            <a:r>
-              <a:rPr lang="en-US" sz="900" b="1" dirty="0">
-                <a:solidFill>
-                  <a:srgbClr val="9D174D"/>
-                </a:solidFill>
-                <a:latin typeface="Trebuchet MS" pitchFamily="34" charset="0"/>
-                <a:ea typeface="Trebuchet MS" pitchFamily="34" charset="-122"/>
-                <a:cs typeface="Trebuchet MS" pitchFamily="34" charset="-120"/>
-              </a:rPr>
-              <a:t>s</a:t>
-            </a:r>
-            <a:endParaRPr lang="en-US" sz="900" dirty="0"/>
-          </a:p>
-        </p:txBody>
-      </p:sp>
-      <p:sp>
-        <p:nvSpPr>
-          <p:cNvPr id="51" name="Shape 49"/>
-          <p:cNvSpPr/>
-          <p:nvPr/>
-        </p:nvSpPr>
-        <p:spPr>
-          <a:xfrm>
-            <a:off x="6870192" y="4169664"/>
-            <a:ext cx="685800" cy="475488"/>
-          </a:xfrm>
-          <a:prstGeom prst="rect">
-            <a:avLst>
-              <a:gd name="adj" fmla="val 7692"/>
-            </a:avLst>
-          </a:prstGeom>
-          <a:solidFill>
-            <a:srgbClr val="FFFFFF"/>
-          </a:solidFill>
-          <a:ln w="12700">
-            <a:solidFill>
-              <a:srgbClr val="DB2777"/>
-            </a:solidFill>
-            <a:prstDash val="solid"/>
-          </a:ln>
-        </p:spPr>
-      </p:sp>
-      <p:sp>
-        <p:nvSpPr>
-          <p:cNvPr id="52" name="Text 50"/>
-          <p:cNvSpPr/>
-          <p:nvPr/>
-        </p:nvSpPr>
-        <p:spPr>
-          <a:xfrm>
-            <a:off x="6870192" y="4169664"/>
-            <a:ext cx="685800" cy="475488"/>
-          </a:xfrm>
-          <a:prstGeom prst="rect">
-            <a:avLst/>
-          </a:prstGeom>
-          <a:noFill/>
-          <a:ln/>
-        </p:spPr>
-        <p:txBody>
-          <a:bodyPr wrap="square" lIns="0" tIns="0" rIns="0" bIns="0" rtlCol="0" anchor="ctr"/>
-          <a:lstStyle/>
-          <a:p>
-            <a:pPr algn="ctr" indent="0" marL="0">
-              <a:buNone/>
-            </a:pPr>
-            <a:r>
-              <a:rPr lang="en-US" sz="900" b="1" dirty="0">
-                <a:solidFill>
-                  <a:srgbClr val="9D174D"/>
-                </a:solidFill>
-                <a:latin typeface="Trebuchet MS" pitchFamily="34" charset="0"/>
-                <a:ea typeface="Trebuchet MS" pitchFamily="34" charset="-122"/>
-                <a:cs typeface="Trebuchet MS" pitchFamily="34" charset="-120"/>
-              </a:rPr>
-              <a:t>e</a:t>
-            </a:r>
-            <a:endParaRPr lang="en-US" sz="900" dirty="0"/>
-          </a:p>
-        </p:txBody>
-      </p:sp>
-      <p:sp>
-        <p:nvSpPr>
-          <p:cNvPr id="53" name="Shape 51"/>
-          <p:cNvSpPr/>
-          <p:nvPr/>
-        </p:nvSpPr>
-        <p:spPr>
-          <a:xfrm>
-            <a:off x="7677912" y="4169664"/>
-            <a:ext cx="685800" cy="475488"/>
-          </a:xfrm>
-          <a:prstGeom prst="rect">
-            <a:avLst>
-              <a:gd name="adj" fmla="val 7692"/>
-            </a:avLst>
-          </a:prstGeom>
-          <a:solidFill>
-            <a:srgbClr val="FFFFFF"/>
-          </a:solidFill>
-          <a:ln w="12700">
-            <a:solidFill>
-              <a:srgbClr val="DB2777"/>
-            </a:solidFill>
-            <a:prstDash val="solid"/>
-          </a:ln>
-        </p:spPr>
-      </p:sp>
-      <p:sp>
-        <p:nvSpPr>
-          <p:cNvPr id="54" name="Text 52"/>
-          <p:cNvSpPr/>
-          <p:nvPr/>
-        </p:nvSpPr>
-        <p:spPr>
-          <a:xfrm>
-            <a:off x="7677912" y="4169664"/>
-            <a:ext cx="685800" cy="475488"/>
-          </a:xfrm>
-          <a:prstGeom prst="rect">
-            <a:avLst/>
-          </a:prstGeom>
-          <a:noFill/>
-          <a:ln/>
-        </p:spPr>
-        <p:txBody>
-          <a:bodyPr wrap="square" lIns="0" tIns="0" rIns="0" bIns="0" rtlCol="0" anchor="ctr"/>
-          <a:lstStyle/>
-          <a:p>
-            <a:pPr algn="ctr" indent="0" marL="0">
-              <a:buNone/>
-            </a:pPr>
-            <a:r>
-              <a:rPr lang="en-US" sz="900" b="1" dirty="0">
-                <a:solidFill>
-                  <a:srgbClr val="9D174D"/>
-                </a:solidFill>
-                <a:latin typeface="Trebuchet MS" pitchFamily="34" charset="0"/>
-                <a:ea typeface="Trebuchet MS" pitchFamily="34" charset="-122"/>
-                <a:cs typeface="Trebuchet MS" pitchFamily="34" charset="-120"/>
-              </a:rPr>
-              <a:t>s</a:t>
-            </a:r>
-            <a:endParaRPr lang="en-US" sz="900" dirty="0"/>
+          <p:cNvPr id="51" name="Text 49"/>
+          <p:cNvSpPr/>
+          <p:nvPr/>
+        </p:nvSpPr>
+        <p:spPr>
+          <a:xfrm>
+            <a:off x="7576947" y="4572000"/>
+            <a:ext cx="685800" cy="219456"/>
+          </a:xfrm>
+          <a:prstGeom prst="rect">
+            <a:avLst/>
+          </a:prstGeom>
+          <a:noFill/>
+          <a:ln/>
+        </p:spPr>
+        <p:txBody>
+          <a:bodyPr wrap="square" lIns="0" tIns="0" rIns="0" bIns="0" rtlCol="0" anchor="t"/>
+          <a:lstStyle/>
+          <a:p>
+            <a:pPr algn="ctr" indent="0" marL="0">
+              <a:buNone/>
+            </a:pPr>
+            <a:r>
+              <a:rPr lang="en-US" sz="750" i="1" dirty="0">
+                <a:solidFill>
+                  <a:srgbClr val="94A3B8"/>
+                </a:solidFill>
+                <a:latin typeface="Calibri" pitchFamily="34" charset="0"/>
+                <a:ea typeface="Calibri" pitchFamily="34" charset="-122"/>
+                <a:cs typeface="Calibri" pitchFamily="34" charset="-120"/>
+              </a:rPr>
+              <a:t>/s/</a:t>
+            </a:r>
+            <a:endParaRPr lang="en-US" sz="750" dirty="0"/>
           </a:p>
         </p:txBody>
       </p:sp>
@@ -37328,7 +39167,7 @@
                 <a:ea typeface="Trebuchet MS" pitchFamily="34" charset="-122"/>
                 <a:cs typeface="Trebuchet MS" pitchFamily="34" charset="-120"/>
               </a:rPr>
-              <a:t>pension</a:t>
+              <a:t>suspense</a:t>
             </a:r>
             <a:endParaRPr lang="en-US" sz="1200" dirty="0"/>
           </a:p>
@@ -37394,7 +39233,7 @@
                 <a:ea typeface="Trebuchet MS" pitchFamily="34" charset="-122"/>
                 <a:cs typeface="Trebuchet MS" pitchFamily="34" charset="-120"/>
               </a:rPr>
-              <a:t>suspend</a:t>
+              <a:t>pension</a:t>
             </a:r>
             <a:endParaRPr lang="en-US" sz="1200" dirty="0"/>
           </a:p>
@@ -37460,7 +39299,7 @@
                 <a:ea typeface="Trebuchet MS" pitchFamily="34" charset="-122"/>
                 <a:cs typeface="Trebuchet MS" pitchFamily="34" charset="-120"/>
               </a:rPr>
-              <a:t>compensatory</a:t>
+              <a:t>recompense</a:t>
             </a:r>
             <a:endParaRPr lang="en-US" sz="1200" dirty="0"/>
           </a:p>
@@ -37592,7 +39431,7 @@
                 <a:ea typeface="Trebuchet MS" pitchFamily="34" charset="-122"/>
                 <a:cs typeface="Trebuchet MS" pitchFamily="34" charset="-120"/>
               </a:rPr>
-              <a:t>recompense</a:t>
+              <a:t>compensation</a:t>
             </a:r>
             <a:endParaRPr lang="en-US" sz="1200" dirty="0"/>
           </a:p>
@@ -38780,7 +40619,7 @@
                 <a:ea typeface="Calibri" pitchFamily="34" charset="-122"/>
                 <a:cs typeface="Calibri" pitchFamily="34" charset="-120"/>
               </a:rPr>
-              <a:t>1.  The root 'pens' comes from Latin and relates to the idea of weighing or paying.</a:t>
+              <a:t>1.  The prefix 'com' in 'compensate' means 'together' or 'with'.</a:t>
             </a:r>
             <a:endParaRPr lang="en-US" sz="1300" dirty="0"/>
           </a:p>
@@ -38919,7 +40758,7 @@
                 <a:ea typeface="Calibri" pitchFamily="34" charset="-122"/>
                 <a:cs typeface="Calibri" pitchFamily="34" charset="-120"/>
               </a:rPr>
-              <a:t>2.  The word 'expensive' means something that is very easy to find.</a:t>
+              <a:t>2.  The word 'suspense' has nothing to do with the root 'pens'.</a:t>
             </a:r>
             <a:endParaRPr lang="en-US" sz="1300" dirty="0"/>
           </a:p>
@@ -39058,7 +40897,7 @@
                 <a:ea typeface="Calibri" pitchFamily="34" charset="-122"/>
                 <a:cs typeface="Calibri" pitchFamily="34" charset="-120"/>
               </a:rPr>
-              <a:t>3.  A dispensary is a place where medicines are given out to people.</a:t>
+              <a:t>3.  The root 'pens' only ever appears at the start of a word.</a:t>
             </a:r>
             <a:endParaRPr lang="en-US" sz="1300" dirty="0"/>
           </a:p>
@@ -39081,11 +40920,11 @@
             </a:avLst>
           </a:prstGeom>
           <a:solidFill>
-            <a:srgbClr val="DCFCE7"/>
-          </a:solidFill>
-          <a:ln w="12700">
-            <a:solidFill>
-              <a:srgbClr val="16A34A"/>
+            <a:srgbClr val="FEE2E2"/>
+          </a:solidFill>
+          <a:ln w="12700">
+            <a:solidFill>
+              <a:srgbClr val="DC2626"/>
             </a:solidFill>
             <a:prstDash val="solid"/>
           </a:ln>
@@ -39118,13 +40957,13 @@
             <a:r>
               <a:rPr lang="en-US" sz="1100" b="1" dirty="0">
                 <a:solidFill>
-                  <a:srgbClr val="16A34A"/>
+                  <a:srgbClr val="DC2626"/>
                 </a:solidFill>
                 <a:latin typeface="Trebuchet MS" pitchFamily="34" charset="0"/>
                 <a:ea typeface="Trebuchet MS" pitchFamily="34" charset="-122"/>
                 <a:cs typeface="Trebuchet MS" pitchFamily="34" charset="-120"/>
               </a:rPr>
-              <a:t>TRUE</a:t>
+              <a:t>FALSE</a:t>
             </a:r>
             <a:endParaRPr lang="en-US" sz="1100" dirty="0"/>
           </a:p>
@@ -39197,7 +41036,7 @@
                 <a:ea typeface="Calibri" pitchFamily="34" charset="-122"/>
                 <a:cs typeface="Calibri" pitchFamily="34" charset="-120"/>
               </a:rPr>
-              <a:t>4.  The prefix 'com' in 'compensate' means 'together' or 'with'.</a:t>
+              <a:t>4.  The root 'pens' comes from a Latin word meaning to hang, weigh, or pay.</a:t>
             </a:r>
             <a:endParaRPr lang="en-US" sz="1300" dirty="0"/>
           </a:p>
@@ -39336,7 +41175,7 @@
                 <a:ea typeface="Calibri" pitchFamily="34" charset="-122"/>
                 <a:cs typeface="Calibri" pitchFamily="34" charset="-120"/>
               </a:rPr>
-              <a:t>5.  The root 'pens' comes from Greek and means 'to write'.</a:t>
+              <a:t>5.  A dispensary is a place where medicines are given out.</a:t>
             </a:r>
             <a:endParaRPr lang="en-US" sz="1300" dirty="0"/>
           </a:p>
@@ -39359,11 +41198,11 @@
             </a:avLst>
           </a:prstGeom>
           <a:solidFill>
-            <a:srgbClr val="FEE2E2"/>
-          </a:solidFill>
-          <a:ln w="12700">
-            <a:solidFill>
-              <a:srgbClr val="DC2626"/>
+            <a:srgbClr val="DCFCE7"/>
+          </a:solidFill>
+          <a:ln w="12700">
+            <a:solidFill>
+              <a:srgbClr val="16A34A"/>
             </a:solidFill>
             <a:prstDash val="solid"/>
           </a:ln>
@@ -39396,13 +41235,13 @@
             <a:r>
               <a:rPr lang="en-US" sz="1100" b="1" dirty="0">
                 <a:solidFill>
-                  <a:srgbClr val="DC2626"/>
+                  <a:srgbClr val="16A34A"/>
                 </a:solidFill>
                 <a:latin typeface="Trebuchet MS" pitchFamily="34" charset="0"/>
                 <a:ea typeface="Trebuchet MS" pitchFamily="34" charset="-122"/>
                 <a:cs typeface="Trebuchet MS" pitchFamily="34" charset="-120"/>
               </a:rPr>
-              <a:t>FALSE</a:t>
+              <a:t>TRUE</a:t>
             </a:r>
             <a:endParaRPr lang="en-US" sz="1100" dirty="0"/>
           </a:p>
@@ -40173,7 +42012,7 @@
                 <a:ea typeface="Trebuchet MS" pitchFamily="34" charset="-122"/>
                 <a:cs typeface="Trebuchet MS" pitchFamily="34" charset="-120"/>
               </a:rPr>
-              <a:t>pension</a:t>
+              <a:t>suspense</a:t>
             </a:r>
             <a:endParaRPr lang="en-US" sz="1300" dirty="0"/>
           </a:p>
@@ -40239,7 +42078,7 @@
                 <a:ea typeface="Trebuchet MS" pitchFamily="34" charset="-122"/>
                 <a:cs typeface="Trebuchet MS" pitchFamily="34" charset="-120"/>
               </a:rPr>
-              <a:t>suspend</a:t>
+              <a:t>pension</a:t>
             </a:r>
             <a:endParaRPr lang="en-US" sz="1300" dirty="0"/>
           </a:p>
@@ -40305,7 +42144,7 @@
                 <a:ea typeface="Trebuchet MS" pitchFamily="34" charset="-122"/>
                 <a:cs typeface="Trebuchet MS" pitchFamily="34" charset="-120"/>
               </a:rPr>
-              <a:t>compensatory</a:t>
+              <a:t>recompense</a:t>
             </a:r>
             <a:endParaRPr lang="en-US" sz="1300" dirty="0"/>
           </a:p>
@@ -42754,7 +44593,7 @@
                 <a:ea typeface="Calibri" pitchFamily="34" charset="-122"/>
                 <a:cs typeface="Calibri" pitchFamily="34" charset="-120"/>
               </a:rPr>
-              <a:t>To hang something up, or to stop something for a period of time.</a:t>
+              <a:t>A regular payment given to someone who has stopped working because they are old.</a:t>
             </a:r>
             <a:endParaRPr lang="en-US" sz="1200" dirty="0"/>
           </a:p>
@@ -42966,7 +44805,7 @@
                 <a:ea typeface="Trebuchet MS" pitchFamily="34" charset="-122"/>
                 <a:cs typeface="Trebuchet MS" pitchFamily="34" charset="-120"/>
               </a:rPr>
-              <a:t>pension</a:t>
+              <a:t>suspense</a:t>
             </a:r>
             <a:endParaRPr lang="en-US" sz="1200" dirty="0"/>
           </a:p>
@@ -43032,7 +44871,7 @@
                 <a:ea typeface="Calibri" pitchFamily="34" charset="-122"/>
                 <a:cs typeface="Calibri" pitchFamily="34" charset="-120"/>
               </a:rPr>
-              <a:t>Describing something given to make up for a loss or harm.</a:t>
+              <a:t>To pay someone back or reward them for their effort or loss.</a:t>
             </a:r>
             <a:endParaRPr lang="en-US" sz="1200" dirty="0"/>
           </a:p>
@@ -43105,7 +44944,7 @@
                 <a:ea typeface="Trebuchet MS" pitchFamily="34" charset="-122"/>
                 <a:cs typeface="Trebuchet MS" pitchFamily="34" charset="-120"/>
               </a:rPr>
-              <a:t>suspend</a:t>
+              <a:t>pension</a:t>
             </a:r>
             <a:endParaRPr lang="en-US" sz="1200" dirty="0"/>
           </a:p>
@@ -43244,7 +45083,7 @@
                 <a:ea typeface="Trebuchet MS" pitchFamily="34" charset="-122"/>
                 <a:cs typeface="Trebuchet MS" pitchFamily="34" charset="-120"/>
               </a:rPr>
-              <a:t>compensatory</a:t>
+              <a:t>recompense</a:t>
             </a:r>
             <a:endParaRPr lang="en-US" sz="1200" dirty="0"/>
           </a:p>
@@ -43310,7 +45149,7 @@
                 <a:ea typeface="Calibri" pitchFamily="34" charset="-122"/>
                 <a:cs typeface="Calibri" pitchFamily="34" charset="-120"/>
               </a:rPr>
-              <a:t>Money paid regularly to someone who has stopped working because they are old.</a:t>
+              <a:t>A feeling of excitement and uncertainty while waiting to find out what happens.</a:t>
             </a:r>
             <a:endParaRPr lang="en-US" sz="1200" dirty="0"/>
           </a:p>
@@ -43449,7 +45288,7 @@
                 <a:ea typeface="Calibri" pitchFamily="34" charset="-122"/>
                 <a:cs typeface="Calibri" pitchFamily="34" charset="-120"/>
               </a:rPr>
-              <a:t>To give out or hand out something, like medicine or supplies.</a:t>
+              <a:t>To give out or distribute something, like medicine from a machine.</a:t>
             </a:r>
             <a:endParaRPr lang="en-US" sz="1200" dirty="0"/>
           </a:p>
@@ -43944,7 +45783,7 @@
                 <a:ea typeface="Calibri" pitchFamily="34" charset="-122"/>
                 <a:cs typeface="Calibri" pitchFamily="34" charset="-120"/>
               </a:rPr>
-              <a:t>The school decided to suspend the excursion because of the heavy rain forecast for that day.</a:t>
+              <a:t>The shop had to compensate the customer after selling her a broken toy.</a:t>
             </a:r>
             <a:endParaRPr lang="en-US" sz="1500" dirty="0"/>
           </a:p>
@@ -44108,7 +45947,7 @@
                 <a:ea typeface="Calibri" pitchFamily="34" charset="-122"/>
                 <a:cs typeface="Calibri" pitchFamily="34" charset="-120"/>
               </a:rPr>
-              <a:t>Mum said the new gaming console was far too expensive for a birthday present this year.</a:t>
+              <a:t>There was so much suspense in the story that nobody wanted to stop reading.</a:t>
             </a:r>
             <a:endParaRPr lang="en-US" sz="1500" dirty="0"/>
           </a:p>
@@ -44272,7 +46111,7 @@
                 <a:ea typeface="Calibri" pitchFamily="34" charset="-122"/>
                 <a:cs typeface="Calibri" pitchFamily="34" charset="-120"/>
               </a:rPr>
-              <a:t>The pharmacist worked in the dispensary carefully measuring out each patient's medicine.</a:t>
+              <a:t>The nurse went to the dispensary to collect the correct medicine for the patient.</a:t>
             </a:r>
             <a:endParaRPr lang="en-US" sz="1500" dirty="0"/>
           </a:p>
